--- a/preview_v7/cn/l-cn-bs-u1-2.pptx
+++ b/preview_v7/cn/l-cn-bs-u1-2.pptx
@@ -3142,177 +3142,14 @@
       </p:sp>
       <p:sp>
         <p:nvSpPr>
-          <p:cNvPr id="3" name="TextBox 2"/>
-          <p:cNvSpPr txBox="1"/>
-          <p:nvPr/>
-        </p:nvSpPr>
-        <p:spPr>
-          <a:xfrm>
-            <a:off x="640080" y="640080"/>
-            <a:ext cx="10911535" cy="502920"/>
-          </a:xfrm>
-          <a:prstGeom prst="rect">
-            <a:avLst/>
-          </a:prstGeom>
-          <a:noFill/>
-        </p:spPr>
-        <p:txBody>
-          <a:bodyPr wrap="square" anchor="t" lIns="0" rIns="0" tIns="0" bIns="0">
-            <a:spAutoFit/>
-          </a:bodyPr>
-          <a:lstStyle/>
-          <a:p>
-            <a:pPr algn="l">
-              <a:spcAft>
-                <a:spcPts val="0"/>
-              </a:spcAft>
-            </a:pPr>
-            <a:r>
-              <a:rPr sz="1200" b="1">
-                <a:solidFill>
-                  <a:srgbClr val="B23A2A"/>
-                </a:solidFill>
-                <a:latin typeface="微软雅黑"/>
-                <a:ea typeface="微软雅黑"/>
-                <a:cs typeface="微软雅黑"/>
-              </a:rPr>
-              <a:t>语文 · 必修上册 · 第1单元 青春的价值</a:t>
-            </a:r>
-          </a:p>
-        </p:txBody>
-      </p:sp>
-      <p:sp>
-        <p:nvSpPr>
-          <p:cNvPr id="4" name="Rectangle 3"/>
+          <p:cNvPr id="3" name="Rectangle 2"/>
           <p:cNvSpPr/>
           <p:nvPr/>
         </p:nvSpPr>
         <p:spPr>
           <a:xfrm>
-            <a:off x="640080" y="1207008"/>
-            <a:ext cx="822960" cy="30480"/>
-          </a:xfrm>
-          <a:prstGeom prst="rect">
-            <a:avLst/>
-          </a:prstGeom>
-          <a:solidFill>
-            <a:srgbClr val="B23A2A"/>
-          </a:solidFill>
-          <a:ln>
-            <a:noFill/>
-          </a:ln>
-          <a:effectLst/>
-        </p:spPr>
-        <p:style>
-          <a:lnRef idx="1">
-            <a:schemeClr val="accent1"/>
-          </a:lnRef>
-          <a:fillRef idx="3">
-            <a:schemeClr val="accent1"/>
-          </a:fillRef>
-          <a:effectRef idx="2">
-            <a:schemeClr val="accent1"/>
-          </a:effectRef>
-          <a:fontRef idx="minor">
-            <a:schemeClr val="lt1"/>
-          </a:fontRef>
-        </p:style>
-        <p:txBody>
-          <a:bodyPr rtlCol="0" anchor="ctr"/>
-          <a:lstStyle/>
-          <a:p>
-            <a:pPr algn="ctr"/>
-          </a:p>
-        </p:txBody>
-      </p:sp>
-      <p:sp>
-        <p:nvSpPr>
-          <p:cNvPr id="5" name="TextBox 4"/>
-          <p:cNvSpPr txBox="1"/>
-          <p:nvPr/>
-        </p:nvSpPr>
-        <p:spPr>
-          <a:xfrm>
-            <a:off x="640080" y="1737360"/>
-            <a:ext cx="10911535" cy="2011680"/>
-          </a:xfrm>
-          <a:prstGeom prst="rect">
-            <a:avLst/>
-          </a:prstGeom>
-          <a:noFill/>
-        </p:spPr>
-        <p:txBody>
-          <a:bodyPr wrap="square" anchor="t" lIns="0" rIns="0" tIns="0" bIns="0">
-            <a:spAutoFit/>
-          </a:bodyPr>
-          <a:lstStyle/>
-          <a:p>
-            <a:pPr algn="l">
-              <a:lnSpc>
-                <a:spcPct val="115000"/>
-              </a:lnSpc>
-            </a:pPr>
-            <a:r>
-              <a:rPr sz="4000" b="1">
-                <a:solidFill>
-                  <a:srgbClr val="1C2A33"/>
-                </a:solidFill>
-                <a:latin typeface="楷体"/>
-                <a:ea typeface="楷体"/>
-                <a:cs typeface="楷体"/>
-              </a:rPr>
-              <a:t>沁园春·长沙 精读（下）——忆青春与「谁主沉浮」之答</a:t>
-            </a:r>
-          </a:p>
-        </p:txBody>
-      </p:sp>
-      <p:sp>
-        <p:nvSpPr>
-          <p:cNvPr id="6" name="TextBox 5"/>
-          <p:cNvSpPr txBox="1"/>
-          <p:nvPr/>
-        </p:nvSpPr>
-        <p:spPr>
-          <a:xfrm>
-            <a:off x="640080" y="3840480"/>
-            <a:ext cx="10911535" cy="457200"/>
-          </a:xfrm>
-          <a:prstGeom prst="rect">
-            <a:avLst/>
-          </a:prstGeom>
-          <a:noFill/>
-        </p:spPr>
-        <p:txBody>
-          <a:bodyPr wrap="square" anchor="t" lIns="0" rIns="0" tIns="0" bIns="0">
-            <a:spAutoFit/>
-          </a:bodyPr>
-          <a:lstStyle/>
-          <a:p>
-            <a:pPr algn="l"/>
-            <a:r>
-              <a:rPr sz="1700" b="1">
-                <a:solidFill>
-                  <a:srgbClr val="B23A2A"/>
-                </a:solidFill>
-                <a:latin typeface="微软雅黑"/>
-                <a:ea typeface="微软雅黑"/>
-                <a:cs typeface="微软雅黑"/>
-              </a:rPr>
-              <a:t>课文精读  ·  第2课时  ·  45分钟</a:t>
-            </a:r>
-          </a:p>
-        </p:txBody>
-      </p:sp>
-      <p:sp>
-        <p:nvSpPr>
-          <p:cNvPr id="7" name="Rectangle 6"/>
-          <p:cNvSpPr/>
-          <p:nvPr/>
-        </p:nvSpPr>
-        <p:spPr>
-          <a:xfrm>
-            <a:off x="640080" y="5394960"/>
-            <a:ext cx="2011680" cy="33020"/>
+            <a:off x="640080" y="1005840"/>
+            <a:ext cx="822960" cy="38100"/>
           </a:xfrm>
           <a:prstGeom prst="rect">
             <a:avLst/>
@@ -3349,14 +3186,14 @@
       </p:sp>
       <p:sp>
         <p:nvSpPr>
-          <p:cNvPr id="8" name="TextBox 7"/>
+          <p:cNvPr id="4" name="TextBox 3"/>
           <p:cNvSpPr txBox="1"/>
           <p:nvPr/>
         </p:nvSpPr>
         <p:spPr>
           <a:xfrm>
-            <a:off x="640080" y="5623560"/>
-            <a:ext cx="10911535" cy="548640"/>
+            <a:off x="640080" y="1188720"/>
+            <a:ext cx="10058400" cy="457200"/>
           </a:xfrm>
           <a:prstGeom prst="rect">
             <a:avLst/>
@@ -3371,22 +3208,363 @@
           <a:p>
             <a:pPr algn="l"/>
             <a:r>
-              <a:rPr sz="1400" b="0">
-                <a:solidFill>
-                  <a:srgbClr val="6B6258"/>
+              <a:rPr sz="1500" b="1">
+                <a:solidFill>
+                  <a:srgbClr val="C8A86B"/>
                 </a:solidFill>
                 <a:latin typeface="微软雅黑"/>
                 <a:ea typeface="微软雅黑"/>
                 <a:cs typeface="微软雅黑"/>
               </a:rPr>
-              <a:t>学习任务群：文学阅读与写作    |    年级：高一</a:t>
-            </a:r>
-          </a:p>
-        </p:txBody>
-      </p:sp>
-      <p:sp>
-        <p:nvSpPr>
-          <p:cNvPr id="9" name="TextBox 8"/>
+              <a:t>必修上 第一单元 · 青春的价值 · 第二课时</a:t>
+            </a:r>
+          </a:p>
+        </p:txBody>
+      </p:sp>
+      <p:sp>
+        <p:nvSpPr>
+          <p:cNvPr id="5" name="TextBox 4"/>
+          <p:cNvSpPr txBox="1"/>
+          <p:nvPr/>
+        </p:nvSpPr>
+        <p:spPr>
+          <a:xfrm>
+            <a:off x="640080" y="1828800"/>
+            <a:ext cx="7498079" cy="1463040"/>
+          </a:xfrm>
+          <a:prstGeom prst="rect">
+            <a:avLst/>
+          </a:prstGeom>
+          <a:noFill/>
+        </p:spPr>
+        <p:txBody>
+          <a:bodyPr wrap="square" anchor="t" lIns="0" rIns="0" tIns="0" bIns="0">
+            <a:spAutoFit/>
+          </a:bodyPr>
+          <a:lstStyle/>
+          <a:p>
+            <a:pPr algn="l"/>
+            <a:r>
+              <a:rPr sz="5600" b="1">
+                <a:solidFill>
+                  <a:srgbClr val="1C2A33"/>
+                </a:solidFill>
+                <a:latin typeface="楷体"/>
+                <a:ea typeface="楷体"/>
+                <a:cs typeface="楷体"/>
+              </a:rPr>
+              <a:t>沁园春·长沙</a:t>
+            </a:r>
+          </a:p>
+        </p:txBody>
+      </p:sp>
+      <p:sp>
+        <p:nvSpPr>
+          <p:cNvPr id="6" name="TextBox 5"/>
+          <p:cNvSpPr txBox="1"/>
+          <p:nvPr/>
+        </p:nvSpPr>
+        <p:spPr>
+          <a:xfrm>
+            <a:off x="640080" y="2880360"/>
+            <a:ext cx="7863840" cy="914400"/>
+          </a:xfrm>
+          <a:prstGeom prst="rect">
+            <a:avLst/>
+          </a:prstGeom>
+          <a:noFill/>
+        </p:spPr>
+        <p:txBody>
+          <a:bodyPr wrap="square" anchor="t" lIns="0" rIns="0" tIns="0" bIns="0">
+            <a:spAutoFit/>
+          </a:bodyPr>
+          <a:lstStyle/>
+          <a:p>
+            <a:pPr algn="l"/>
+            <a:r>
+              <a:rPr sz="2700" b="1">
+                <a:solidFill>
+                  <a:srgbClr val="B23A2A"/>
+                </a:solidFill>
+                <a:latin typeface="楷体"/>
+                <a:ea typeface="楷体"/>
+                <a:cs typeface="楷体"/>
+              </a:rPr>
+              <a:t>精读（下）——忆青春与「谁主沉浮」之答</a:t>
+            </a:r>
+          </a:p>
+        </p:txBody>
+      </p:sp>
+      <p:sp>
+        <p:nvSpPr>
+          <p:cNvPr id="7" name="TextBox 6"/>
+          <p:cNvSpPr txBox="1"/>
+          <p:nvPr/>
+        </p:nvSpPr>
+        <p:spPr>
+          <a:xfrm>
+            <a:off x="640080" y="4160520"/>
+            <a:ext cx="7315200" cy="914400"/>
+          </a:xfrm>
+          <a:prstGeom prst="rect">
+            <a:avLst/>
+          </a:prstGeom>
+          <a:noFill/>
+        </p:spPr>
+        <p:txBody>
+          <a:bodyPr wrap="square" anchor="t" lIns="0" rIns="0" tIns="0" bIns="0">
+            <a:spAutoFit/>
+          </a:bodyPr>
+          <a:lstStyle/>
+          <a:p>
+            <a:pPr algn="l">
+              <a:lnSpc>
+                <a:spcPct val="140000"/>
+              </a:lnSpc>
+            </a:pPr>
+            <a:r>
+              <a:rPr sz="1700" b="0">
+                <a:solidFill>
+                  <a:srgbClr val="6B6258"/>
+                </a:solidFill>
+                <a:latin typeface="楷体"/>
+                <a:ea typeface="楷体"/>
+                <a:cs typeface="楷体"/>
+              </a:rPr>
+              <a:t>上阕问沉浮，下阕作答——看少年词人的群像与担当。</a:t>
+            </a:r>
+          </a:p>
+        </p:txBody>
+      </p:sp>
+      <p:sp>
+        <p:nvSpPr>
+          <p:cNvPr id="8" name="TextBox 7"/>
+          <p:cNvSpPr txBox="1"/>
+          <p:nvPr/>
+        </p:nvSpPr>
+        <p:spPr>
+          <a:xfrm>
+            <a:off x="640080" y="4892040"/>
+            <a:ext cx="7315200" cy="914400"/>
+          </a:xfrm>
+          <a:prstGeom prst="rect">
+            <a:avLst/>
+          </a:prstGeom>
+          <a:noFill/>
+        </p:spPr>
+        <p:txBody>
+          <a:bodyPr wrap="square" anchor="t" lIns="0" rIns="0" tIns="0" bIns="0">
+            <a:spAutoFit/>
+          </a:bodyPr>
+          <a:lstStyle/>
+          <a:p>
+            <a:pPr algn="l">
+              <a:lnSpc>
+                <a:spcPct val="140000"/>
+              </a:lnSpc>
+            </a:pPr>
+            <a:r>
+              <a:rPr sz="1600" b="0">
+                <a:solidFill>
+                  <a:srgbClr val="1C2A33"/>
+                </a:solidFill>
+                <a:latin typeface="楷体"/>
+                <a:ea typeface="楷体"/>
+                <a:cs typeface="楷体"/>
+              </a:rPr>
+              <a:t>一条读词路径：抓领字 → 串意象 → 看结构 → 答沉浮。</a:t>
+            </a:r>
+          </a:p>
+        </p:txBody>
+      </p:sp>
+      <p:sp>
+        <p:nvSpPr>
+          <p:cNvPr id="9" name="Rounded Rectangle 8"/>
+          <p:cNvSpPr/>
+          <p:nvPr/>
+        </p:nvSpPr>
+        <p:spPr>
+          <a:xfrm>
+            <a:off x="8321040" y="1463040"/>
+            <a:ext cx="3291840" cy="4480560"/>
+          </a:xfrm>
+          <a:prstGeom prst="roundRect">
+            <a:avLst/>
+          </a:prstGeom>
+          <a:solidFill>
+            <a:srgbClr val="1C2A33"/>
+          </a:solidFill>
+          <a:effectLst/>
+        </p:spPr>
+        <p:style>
+          <a:lnRef idx="1">
+            <a:schemeClr val="accent1"/>
+          </a:lnRef>
+          <a:fillRef idx="3">
+            <a:schemeClr val="accent1"/>
+          </a:fillRef>
+          <a:effectRef idx="2">
+            <a:schemeClr val="accent1"/>
+          </a:effectRef>
+          <a:fontRef idx="minor">
+            <a:schemeClr val="lt1"/>
+          </a:fontRef>
+        </p:style>
+        <p:txBody>
+          <a:bodyPr rtlCol="0" anchor="ctr"/>
+          <a:lstStyle/>
+          <a:p>
+            <a:pPr algn="ctr"/>
+          </a:p>
+        </p:txBody>
+      </p:sp>
+      <p:sp>
+        <p:nvSpPr>
+          <p:cNvPr id="10" name="Rectangle 9"/>
+          <p:cNvSpPr/>
+          <p:nvPr/>
+        </p:nvSpPr>
+        <p:spPr>
+          <a:xfrm>
+            <a:off x="8595360" y="1828800"/>
+            <a:ext cx="54864" cy="330200"/>
+          </a:xfrm>
+          <a:prstGeom prst="rect">
+            <a:avLst/>
+          </a:prstGeom>
+          <a:solidFill>
+            <a:srgbClr val="C8A86B"/>
+          </a:solidFill>
+          <a:ln>
+            <a:noFill/>
+          </a:ln>
+          <a:effectLst/>
+        </p:spPr>
+        <p:style>
+          <a:lnRef idx="1">
+            <a:schemeClr val="accent1"/>
+          </a:lnRef>
+          <a:fillRef idx="3">
+            <a:schemeClr val="accent1"/>
+          </a:fillRef>
+          <a:effectRef idx="2">
+            <a:schemeClr val="accent1"/>
+          </a:effectRef>
+          <a:fontRef idx="minor">
+            <a:schemeClr val="lt1"/>
+          </a:fontRef>
+        </p:style>
+        <p:txBody>
+          <a:bodyPr rtlCol="0" anchor="ctr"/>
+          <a:lstStyle/>
+          <a:p>
+            <a:pPr algn="ctr"/>
+          </a:p>
+        </p:txBody>
+      </p:sp>
+      <p:sp>
+        <p:nvSpPr>
+          <p:cNvPr id="11" name="TextBox 10"/>
+          <p:cNvSpPr txBox="1"/>
+          <p:nvPr/>
+        </p:nvSpPr>
+        <p:spPr>
+          <a:xfrm>
+            <a:off x="8823960" y="1874519"/>
+            <a:ext cx="2560320" cy="457200"/>
+          </a:xfrm>
+          <a:prstGeom prst="rect">
+            <a:avLst/>
+          </a:prstGeom>
+          <a:noFill/>
+        </p:spPr>
+        <p:txBody>
+          <a:bodyPr wrap="square" anchor="t" lIns="0" rIns="0" tIns="0" bIns="0">
+            <a:spAutoFit/>
+          </a:bodyPr>
+          <a:lstStyle/>
+          <a:p>
+            <a:pPr algn="l"/>
+            <a:r>
+              <a:rPr sz="1500" b="1">
+                <a:solidFill>
+                  <a:srgbClr val="C8A86B"/>
+                </a:solidFill>
+                <a:latin typeface="楷体"/>
+                <a:ea typeface="楷体"/>
+                <a:cs typeface="楷体"/>
+              </a:rPr>
+              <a:t>词的下阕</a:t>
+            </a:r>
+          </a:p>
+        </p:txBody>
+      </p:sp>
+      <p:sp>
+        <p:nvSpPr>
+          <p:cNvPr id="12" name="TextBox 11"/>
+          <p:cNvSpPr txBox="1"/>
+          <p:nvPr/>
+        </p:nvSpPr>
+        <p:spPr>
+          <a:xfrm>
+            <a:off x="8823960" y="2423160"/>
+            <a:ext cx="2514600" cy="3291840"/>
+          </a:xfrm>
+          <a:prstGeom prst="rect">
+            <a:avLst/>
+          </a:prstGeom>
+          <a:noFill/>
+        </p:spPr>
+        <p:txBody>
+          <a:bodyPr wrap="square" anchor="t" lIns="0" rIns="0" tIns="0" bIns="0">
+            <a:spAutoFit/>
+          </a:bodyPr>
+          <a:lstStyle/>
+          <a:p>
+            <a:pPr algn="l">
+              <a:lnSpc>
+                <a:spcPct val="150000"/>
+              </a:lnSpc>
+              <a:spcAft>
+                <a:spcPts val="1200"/>
+              </a:spcAft>
+            </a:pPr>
+            <a:r>
+              <a:rPr sz="1800" b="0">
+                <a:solidFill>
+                  <a:srgbClr val="FFFFFF"/>
+                </a:solidFill>
+                <a:latin typeface="楷体"/>
+                <a:ea typeface="楷体"/>
+                <a:cs typeface="楷体"/>
+              </a:rPr>
+              <a:t>恰同学少年，
+风华正茂；
+书生意气，
+挥斥方遒。
+到中流击水，
+浪遏飞舟？</a:t>
+            </a:r>
+          </a:p>
+          <a:p>
+            <a:pPr algn="l"/>
+            <a:r>
+              <a:rPr sz="1150" b="0">
+                <a:solidFill>
+                  <a:srgbClr val="E7DFD2"/>
+                </a:solidFill>
+                <a:latin typeface="微软雅黑"/>
+                <a:ea typeface="微软雅黑"/>
+                <a:cs typeface="微软雅黑"/>
+              </a:rPr>
+              <a:t>—— 《沁园春·长沙》下阕（节选）</a:t>
+            </a:r>
+          </a:p>
+        </p:txBody>
+      </p:sp>
+      <p:sp>
+        <p:nvSpPr>
+          <p:cNvPr id="13" name="TextBox 12"/>
           <p:cNvSpPr txBox="1"/>
           <p:nvPr/>
         </p:nvSpPr>
@@ -3519,7 +3697,7 @@
                 <a:ea typeface="微软雅黑"/>
                 <a:cs typeface="微软雅黑"/>
               </a:rPr>
-              <a:t>学习目标</a:t>
+              <a:t>本课目标</a:t>
             </a:r>
           </a:p>
         </p:txBody>
@@ -3570,14 +3748,51 @@
       </p:sp>
       <p:sp>
         <p:nvSpPr>
-          <p:cNvPr id="5" name="Rounded Rectangle 4"/>
+          <p:cNvPr id="5" name="TextBox 4"/>
+          <p:cNvSpPr txBox="1"/>
+          <p:nvPr/>
+        </p:nvSpPr>
+        <p:spPr>
+          <a:xfrm>
+            <a:off x="640080" y="1325880"/>
+            <a:ext cx="10058400" cy="640080"/>
+          </a:xfrm>
+          <a:prstGeom prst="rect">
+            <a:avLst/>
+          </a:prstGeom>
+          <a:noFill/>
+        </p:spPr>
+        <p:txBody>
+          <a:bodyPr wrap="square" anchor="t" lIns="0" rIns="0" tIns="0" bIns="0">
+            <a:spAutoFit/>
+          </a:bodyPr>
+          <a:lstStyle/>
+          <a:p>
+            <a:pPr algn="l"/>
+            <a:r>
+              <a:rPr sz="3200" b="1">
+                <a:solidFill>
+                  <a:srgbClr val="1C2A33"/>
+                </a:solidFill>
+                <a:latin typeface="楷体"/>
+                <a:ea typeface="楷体"/>
+                <a:cs typeface="楷体"/>
+              </a:rPr>
+              <a:t>四向学习目标</a:t>
+            </a:r>
+          </a:p>
+        </p:txBody>
+      </p:sp>
+      <p:sp>
+        <p:nvSpPr>
+          <p:cNvPr id="6" name="Rounded Rectangle 5"/>
           <p:cNvSpPr/>
           <p:nvPr/>
         </p:nvSpPr>
         <p:spPr>
           <a:xfrm>
-            <a:off x="640080" y="1417320"/>
-            <a:ext cx="5349240" cy="2057400"/>
+            <a:off x="640080" y="2377440"/>
+            <a:ext cx="2453563" cy="3291840"/>
           </a:xfrm>
           <a:prstGeom prst="roundRect">
             <a:avLst/>
@@ -3585,7 +3800,7 @@
           <a:solidFill>
             <a:srgbClr val="FFFFFF"/>
           </a:solidFill>
-          <a:ln w="22860">
+          <a:ln w="20320">
             <a:solidFill>
               <a:srgbClr val="B23A2A"/>
             </a:solidFill>
@@ -3616,14 +3831,14 @@
       </p:sp>
       <p:sp>
         <p:nvSpPr>
-          <p:cNvPr id="6" name="Oval 5"/>
+          <p:cNvPr id="7" name="Oval 6"/>
           <p:cNvSpPr/>
           <p:nvPr/>
         </p:nvSpPr>
         <p:spPr>
           <a:xfrm>
-            <a:off x="804672" y="1581912"/>
-            <a:ext cx="457200" cy="457200"/>
+            <a:off x="1455381" y="2697480"/>
+            <a:ext cx="822960" cy="822960"/>
           </a:xfrm>
           <a:prstGeom prst="ellipse">
             <a:avLst/>
@@ -3660,14 +3875,14 @@
       </p:sp>
       <p:sp>
         <p:nvSpPr>
-          <p:cNvPr id="7" name="TextBox 6"/>
+          <p:cNvPr id="8" name="TextBox 7"/>
           <p:cNvSpPr txBox="1"/>
           <p:nvPr/>
         </p:nvSpPr>
         <p:spPr>
           <a:xfrm>
-            <a:off x="804672" y="1636776"/>
-            <a:ext cx="457200" cy="384048"/>
+            <a:off x="1455381" y="2880360"/>
+            <a:ext cx="822960" cy="457200"/>
           </a:xfrm>
           <a:prstGeom prst="rect">
             <a:avLst/>
@@ -3682,29 +3897,66 @@
           <a:p>
             <a:pPr algn="ctr"/>
             <a:r>
-              <a:rPr sz="1600" b="1">
+              <a:rPr sz="2400" b="1">
                 <a:solidFill>
                   <a:srgbClr val="FFFFFF"/>
+                </a:solidFill>
+                <a:latin typeface="楷体"/>
+                <a:ea typeface="楷体"/>
+                <a:cs typeface="楷体"/>
+              </a:rPr>
+              <a:t>1</a:t>
+            </a:r>
+          </a:p>
+        </p:txBody>
+      </p:sp>
+      <p:sp>
+        <p:nvSpPr>
+          <p:cNvPr id="9" name="TextBox 8"/>
+          <p:cNvSpPr txBox="1"/>
+          <p:nvPr/>
+        </p:nvSpPr>
+        <p:spPr>
+          <a:xfrm>
+            <a:off x="822960" y="3749040"/>
+            <a:ext cx="2087803" cy="548640"/>
+          </a:xfrm>
+          <a:prstGeom prst="rect">
+            <a:avLst/>
+          </a:prstGeom>
+          <a:noFill/>
+        </p:spPr>
+        <p:txBody>
+          <a:bodyPr wrap="square" anchor="t" lIns="0" rIns="0" tIns="0" bIns="0">
+            <a:spAutoFit/>
+          </a:bodyPr>
+          <a:lstStyle/>
+          <a:p>
+            <a:pPr algn="ctr"/>
+            <a:r>
+              <a:rPr sz="1800" b="1">
+                <a:solidFill>
+                  <a:srgbClr val="B23A2A"/>
                 </a:solidFill>
                 <a:latin typeface="微软雅黑"/>
                 <a:ea typeface="微软雅黑"/>
                 <a:cs typeface="微软雅黑"/>
               </a:rPr>
-              <a:t>1</a:t>
-            </a:r>
-          </a:p>
-        </p:txBody>
-      </p:sp>
-      <p:sp>
-        <p:nvSpPr>
-          <p:cNvPr id="8" name="TextBox 7"/>
+              <a:t>语言能力</a:t>
+            </a:r>
+          </a:p>
+        </p:txBody>
+      </p:sp>
+      <p:sp>
+        <p:nvSpPr>
+          <p:cNvPr id="10" name="TextBox 9"/>
           <p:cNvSpPr txBox="1"/>
           <p:nvPr/>
         </p:nvSpPr>
         <p:spPr>
           <a:xfrm>
-            <a:off x="1371600" y="1527048"/>
-            <a:ext cx="4434840" cy="457200"/>
+            <a:off x="841248" y="4343400"/>
+            <a:ext cx="2051227" cy="1188720"/>
           </a:xfrm>
           <a:prstGeom prst="rect">
             <a:avLst/>
@@ -3717,54 +3969,13 @@
           </a:bodyPr>
           <a:lstStyle/>
           <a:p>
-            <a:pPr algn="l">
+            <a:pPr algn="ctr">
               <a:lnSpc>
-                <a:spcPct val="110000"/>
+                <a:spcPct val="145000"/>
               </a:lnSpc>
             </a:pPr>
             <a:r>
-              <a:rPr sz="1600" b="1">
-                <a:solidFill>
-                  <a:srgbClr val="1C2A33"/>
-                </a:solidFill>
-                <a:latin typeface="微软雅黑"/>
-                <a:ea typeface="微软雅黑"/>
-                <a:cs typeface="微软雅黑"/>
-              </a:rPr>
-              <a:t>目标</a:t>
-            </a:r>
-          </a:p>
-        </p:txBody>
-      </p:sp>
-      <p:sp>
-        <p:nvSpPr>
-          <p:cNvPr id="9" name="TextBox 8"/>
-          <p:cNvSpPr txBox="1"/>
-          <p:nvPr/>
-        </p:nvSpPr>
-        <p:spPr>
-          <a:xfrm>
-            <a:off x="1371600" y="1965960"/>
-            <a:ext cx="4434840" cy="1417320"/>
-          </a:xfrm>
-          <a:prstGeom prst="rect">
-            <a:avLst/>
-          </a:prstGeom>
-          <a:noFill/>
-        </p:spPr>
-        <p:txBody>
-          <a:bodyPr wrap="square" anchor="t" lIns="0" rIns="0" tIns="0" bIns="0">
-            <a:spAutoFit/>
-          </a:bodyPr>
-          <a:lstStyle/>
-          <a:p>
-            <a:pPr algn="l">
-              <a:lnSpc>
-                <a:spcPct val="128000"/>
-              </a:lnSpc>
-            </a:pPr>
-            <a:r>
-              <a:rPr sz="1400" b="0">
+              <a:rPr sz="1300" b="0">
                 <a:solidFill>
                   <a:srgbClr val="1C2A33"/>
                 </a:solidFill>
@@ -3772,21 +3983,21 @@
                 <a:ea typeface="楷体"/>
                 <a:cs typeface="楷体"/>
               </a:rPr>
-              <a:t>语言能力：准确背诵下阕，解释「粪土」「挥斥方遒」「中流击水」等词句的含义与用法。</a:t>
-            </a:r>
-          </a:p>
-        </p:txBody>
-      </p:sp>
-      <p:sp>
-        <p:nvSpPr>
-          <p:cNvPr id="10" name="Rounded Rectangle 9"/>
+              <a:t>准确背诵下阕，解释「粪土」「挥斥方遒」「中流击水」的含义与用法。</a:t>
+            </a:r>
+          </a:p>
+        </p:txBody>
+      </p:sp>
+      <p:sp>
+        <p:nvSpPr>
+          <p:cNvPr id="11" name="Rounded Rectangle 10"/>
           <p:cNvSpPr/>
           <p:nvPr/>
         </p:nvSpPr>
         <p:spPr>
           <a:xfrm>
-            <a:off x="6263640" y="1417320"/>
-            <a:ext cx="5349240" cy="2057400"/>
+            <a:off x="3459403" y="2377440"/>
+            <a:ext cx="2453563" cy="3291840"/>
           </a:xfrm>
           <a:prstGeom prst="roundRect">
             <a:avLst/>
@@ -3794,9 +4005,9 @@
           <a:solidFill>
             <a:srgbClr val="FFFFFF"/>
           </a:solidFill>
-          <a:ln w="22860">
+          <a:ln w="20320">
             <a:solidFill>
-              <a:srgbClr val="B23A2A"/>
+              <a:srgbClr val="2E7D6B"/>
             </a:solidFill>
           </a:ln>
           <a:effectLst/>
@@ -3825,20 +4036,20 @@
       </p:sp>
       <p:sp>
         <p:nvSpPr>
-          <p:cNvPr id="11" name="Oval 10"/>
+          <p:cNvPr id="12" name="Oval 11"/>
           <p:cNvSpPr/>
           <p:nvPr/>
         </p:nvSpPr>
         <p:spPr>
           <a:xfrm>
-            <a:off x="6428232" y="1581912"/>
-            <a:ext cx="457200" cy="457200"/>
+            <a:off x="4274705" y="2697480"/>
+            <a:ext cx="822960" cy="822960"/>
           </a:xfrm>
           <a:prstGeom prst="ellipse">
             <a:avLst/>
           </a:prstGeom>
           <a:solidFill>
-            <a:srgbClr val="B23A2A"/>
+            <a:srgbClr val="2E7D6B"/>
           </a:solidFill>
           <a:ln>
             <a:noFill/>
@@ -3869,14 +4080,14 @@
       </p:sp>
       <p:sp>
         <p:nvSpPr>
-          <p:cNvPr id="12" name="TextBox 11"/>
+          <p:cNvPr id="13" name="TextBox 12"/>
           <p:cNvSpPr txBox="1"/>
           <p:nvPr/>
         </p:nvSpPr>
         <p:spPr>
           <a:xfrm>
-            <a:off x="6428232" y="1636776"/>
-            <a:ext cx="457200" cy="384048"/>
+            <a:off x="4274705" y="2880360"/>
+            <a:ext cx="822960" cy="457200"/>
           </a:xfrm>
           <a:prstGeom prst="rect">
             <a:avLst/>
@@ -3891,29 +4102,66 @@
           <a:p>
             <a:pPr algn="ctr"/>
             <a:r>
-              <a:rPr sz="1600" b="1">
+              <a:rPr sz="2400" b="1">
                 <a:solidFill>
                   <a:srgbClr val="FFFFFF"/>
+                </a:solidFill>
+                <a:latin typeface="楷体"/>
+                <a:ea typeface="楷体"/>
+                <a:cs typeface="楷体"/>
+              </a:rPr>
+              <a:t>2</a:t>
+            </a:r>
+          </a:p>
+        </p:txBody>
+      </p:sp>
+      <p:sp>
+        <p:nvSpPr>
+          <p:cNvPr id="14" name="TextBox 13"/>
+          <p:cNvSpPr txBox="1"/>
+          <p:nvPr/>
+        </p:nvSpPr>
+        <p:spPr>
+          <a:xfrm>
+            <a:off x="3642283" y="3749040"/>
+            <a:ext cx="2087803" cy="548640"/>
+          </a:xfrm>
+          <a:prstGeom prst="rect">
+            <a:avLst/>
+          </a:prstGeom>
+          <a:noFill/>
+        </p:spPr>
+        <p:txBody>
+          <a:bodyPr wrap="square" anchor="t" lIns="0" rIns="0" tIns="0" bIns="0">
+            <a:spAutoFit/>
+          </a:bodyPr>
+          <a:lstStyle/>
+          <a:p>
+            <a:pPr algn="ctr"/>
+            <a:r>
+              <a:rPr sz="1800" b="1">
+                <a:solidFill>
+                  <a:srgbClr val="2E7D6B"/>
                 </a:solidFill>
                 <a:latin typeface="微软雅黑"/>
                 <a:ea typeface="微软雅黑"/>
                 <a:cs typeface="微软雅黑"/>
               </a:rPr>
-              <a:t>2</a:t>
-            </a:r>
-          </a:p>
-        </p:txBody>
-      </p:sp>
-      <p:sp>
-        <p:nvSpPr>
-          <p:cNvPr id="13" name="TextBox 12"/>
+              <a:t>文化意识</a:t>
+            </a:r>
+          </a:p>
+        </p:txBody>
+      </p:sp>
+      <p:sp>
+        <p:nvSpPr>
+          <p:cNvPr id="15" name="TextBox 14"/>
           <p:cNvSpPr txBox="1"/>
           <p:nvPr/>
         </p:nvSpPr>
         <p:spPr>
           <a:xfrm>
-            <a:off x="6995160" y="1527048"/>
-            <a:ext cx="4434840" cy="457200"/>
+            <a:off x="3660571" y="4343400"/>
+            <a:ext cx="2051227" cy="1188720"/>
           </a:xfrm>
           <a:prstGeom prst="rect">
             <a:avLst/>
@@ -3926,54 +4174,13 @@
           </a:bodyPr>
           <a:lstStyle/>
           <a:p>
-            <a:pPr algn="l">
+            <a:pPr algn="ctr">
               <a:lnSpc>
-                <a:spcPct val="110000"/>
+                <a:spcPct val="145000"/>
               </a:lnSpc>
             </a:pPr>
             <a:r>
-              <a:rPr sz="1600" b="1">
-                <a:solidFill>
-                  <a:srgbClr val="1C2A33"/>
-                </a:solidFill>
-                <a:latin typeface="微软雅黑"/>
-                <a:ea typeface="微软雅黑"/>
-                <a:cs typeface="微软雅黑"/>
-              </a:rPr>
-              <a:t>目标</a:t>
-            </a:r>
-          </a:p>
-        </p:txBody>
-      </p:sp>
-      <p:sp>
-        <p:nvSpPr>
-          <p:cNvPr id="14" name="TextBox 13"/>
-          <p:cNvSpPr txBox="1"/>
-          <p:nvPr/>
-        </p:nvSpPr>
-        <p:spPr>
-          <a:xfrm>
-            <a:off x="6995160" y="1965960"/>
-            <a:ext cx="4434840" cy="1417320"/>
-          </a:xfrm>
-          <a:prstGeom prst="rect">
-            <a:avLst/>
-          </a:prstGeom>
-          <a:noFill/>
-        </p:spPr>
-        <p:txBody>
-          <a:bodyPr wrap="square" anchor="t" lIns="0" rIns="0" tIns="0" bIns="0">
-            <a:spAutoFit/>
-          </a:bodyPr>
-          <a:lstStyle/>
-          <a:p>
-            <a:pPr algn="l">
-              <a:lnSpc>
-                <a:spcPct val="128000"/>
-              </a:lnSpc>
-            </a:pPr>
-            <a:r>
-              <a:rPr sz="1400" b="0">
+              <a:rPr sz="1300" b="0">
                 <a:solidFill>
                   <a:srgbClr val="1C2A33"/>
                 </a:solidFill>
@@ -3981,21 +4188,21 @@
                 <a:ea typeface="楷体"/>
                 <a:cs typeface="楷体"/>
               </a:rPr>
-              <a:t>文化意识：理解「同学少年」群像体现的革命青年精神，联系当代青年使命进行思考。</a:t>
-            </a:r>
-          </a:p>
-        </p:txBody>
-      </p:sp>
-      <p:sp>
-        <p:nvSpPr>
-          <p:cNvPr id="15" name="Rounded Rectangle 14"/>
+              <a:t>读懂「同学少年」群像里的革命青年精神，联系当代青年的使命。</a:t>
+            </a:r>
+          </a:p>
+        </p:txBody>
+      </p:sp>
+      <p:sp>
+        <p:nvSpPr>
+          <p:cNvPr id="16" name="Rounded Rectangle 15"/>
           <p:cNvSpPr/>
           <p:nvPr/>
         </p:nvSpPr>
         <p:spPr>
           <a:xfrm>
-            <a:off x="640080" y="3703320"/>
-            <a:ext cx="5349240" cy="2057400"/>
+            <a:off x="6278727" y="2377440"/>
+            <a:ext cx="2453563" cy="3291840"/>
           </a:xfrm>
           <a:prstGeom prst="roundRect">
             <a:avLst/>
@@ -4003,9 +4210,9 @@
           <a:solidFill>
             <a:srgbClr val="FFFFFF"/>
           </a:solidFill>
-          <a:ln w="22860">
+          <a:ln w="20320">
             <a:solidFill>
-              <a:srgbClr val="B23A2A"/>
+              <a:srgbClr val="C8A86B"/>
             </a:solidFill>
           </a:ln>
           <a:effectLst/>
@@ -4034,20 +4241,20 @@
       </p:sp>
       <p:sp>
         <p:nvSpPr>
-          <p:cNvPr id="16" name="Oval 15"/>
+          <p:cNvPr id="17" name="Oval 16"/>
           <p:cNvSpPr/>
           <p:nvPr/>
         </p:nvSpPr>
         <p:spPr>
           <a:xfrm>
-            <a:off x="804672" y="3867912"/>
-            <a:ext cx="457200" cy="457200"/>
+            <a:off x="7094029" y="2697480"/>
+            <a:ext cx="822960" cy="822960"/>
           </a:xfrm>
           <a:prstGeom prst="ellipse">
             <a:avLst/>
           </a:prstGeom>
           <a:solidFill>
-            <a:srgbClr val="B23A2A"/>
+            <a:srgbClr val="C8A86B"/>
           </a:solidFill>
           <a:ln>
             <a:noFill/>
@@ -4078,14 +4285,14 @@
       </p:sp>
       <p:sp>
         <p:nvSpPr>
-          <p:cNvPr id="17" name="TextBox 16"/>
+          <p:cNvPr id="18" name="TextBox 17"/>
           <p:cNvSpPr txBox="1"/>
           <p:nvPr/>
         </p:nvSpPr>
         <p:spPr>
           <a:xfrm>
-            <a:off x="804672" y="3922776"/>
-            <a:ext cx="457200" cy="384048"/>
+            <a:off x="7094029" y="2880360"/>
+            <a:ext cx="822960" cy="457200"/>
           </a:xfrm>
           <a:prstGeom prst="rect">
             <a:avLst/>
@@ -4100,29 +4307,66 @@
           <a:p>
             <a:pPr algn="ctr"/>
             <a:r>
-              <a:rPr sz="1600" b="1">
+              <a:rPr sz="2400" b="1">
                 <a:solidFill>
                   <a:srgbClr val="FFFFFF"/>
+                </a:solidFill>
+                <a:latin typeface="楷体"/>
+                <a:ea typeface="楷体"/>
+                <a:cs typeface="楷体"/>
+              </a:rPr>
+              <a:t>3</a:t>
+            </a:r>
+          </a:p>
+        </p:txBody>
+      </p:sp>
+      <p:sp>
+        <p:nvSpPr>
+          <p:cNvPr id="19" name="TextBox 18"/>
+          <p:cNvSpPr txBox="1"/>
+          <p:nvPr/>
+        </p:nvSpPr>
+        <p:spPr>
+          <a:xfrm>
+            <a:off x="6461607" y="3749040"/>
+            <a:ext cx="2087803" cy="548640"/>
+          </a:xfrm>
+          <a:prstGeom prst="rect">
+            <a:avLst/>
+          </a:prstGeom>
+          <a:noFill/>
+        </p:spPr>
+        <p:txBody>
+          <a:bodyPr wrap="square" anchor="t" lIns="0" rIns="0" tIns="0" bIns="0">
+            <a:spAutoFit/>
+          </a:bodyPr>
+          <a:lstStyle/>
+          <a:p>
+            <a:pPr algn="ctr"/>
+            <a:r>
+              <a:rPr sz="1800" b="1">
+                <a:solidFill>
+                  <a:srgbClr val="C8A86B"/>
                 </a:solidFill>
                 <a:latin typeface="微软雅黑"/>
                 <a:ea typeface="微软雅黑"/>
                 <a:cs typeface="微软雅黑"/>
               </a:rPr>
-              <a:t>3</a:t>
-            </a:r>
-          </a:p>
-        </p:txBody>
-      </p:sp>
-      <p:sp>
-        <p:nvSpPr>
-          <p:cNvPr id="18" name="TextBox 17"/>
+              <a:t>思维品质</a:t>
+            </a:r>
+          </a:p>
+        </p:txBody>
+      </p:sp>
+      <p:sp>
+        <p:nvSpPr>
+          <p:cNvPr id="20" name="TextBox 19"/>
           <p:cNvSpPr txBox="1"/>
           <p:nvPr/>
         </p:nvSpPr>
         <p:spPr>
           <a:xfrm>
-            <a:off x="1371600" y="3813048"/>
-            <a:ext cx="4434840" cy="457200"/>
+            <a:off x="6479895" y="4343400"/>
+            <a:ext cx="2051227" cy="1188720"/>
           </a:xfrm>
           <a:prstGeom prst="rect">
             <a:avLst/>
@@ -4135,54 +4379,13 @@
           </a:bodyPr>
           <a:lstStyle/>
           <a:p>
-            <a:pPr algn="l">
+            <a:pPr algn="ctr">
               <a:lnSpc>
-                <a:spcPct val="110000"/>
+                <a:spcPct val="145000"/>
               </a:lnSpc>
             </a:pPr>
             <a:r>
-              <a:rPr sz="1600" b="1">
-                <a:solidFill>
-                  <a:srgbClr val="1C2A33"/>
-                </a:solidFill>
-                <a:latin typeface="微软雅黑"/>
-                <a:ea typeface="微软雅黑"/>
-                <a:cs typeface="微软雅黑"/>
-              </a:rPr>
-              <a:t>目标</a:t>
-            </a:r>
-          </a:p>
-        </p:txBody>
-      </p:sp>
-      <p:sp>
-        <p:nvSpPr>
-          <p:cNvPr id="19" name="TextBox 18"/>
-          <p:cNvSpPr txBox="1"/>
-          <p:nvPr/>
-        </p:nvSpPr>
-        <p:spPr>
-          <a:xfrm>
-            <a:off x="1371600" y="4251960"/>
-            <a:ext cx="4434840" cy="1417320"/>
-          </a:xfrm>
-          <a:prstGeom prst="rect">
-            <a:avLst/>
-          </a:prstGeom>
-          <a:noFill/>
-        </p:spPr>
-        <p:txBody>
-          <a:bodyPr wrap="square" anchor="t" lIns="0" rIns="0" tIns="0" bIns="0">
-            <a:spAutoFit/>
-          </a:bodyPr>
-          <a:lstStyle/>
-          <a:p>
-            <a:pPr algn="l">
-              <a:lnSpc>
-                <a:spcPct val="128000"/>
-              </a:lnSpc>
-            </a:pPr>
-            <a:r>
-              <a:rPr sz="1400" b="0">
+              <a:rPr sz="1300" b="0">
                 <a:solidFill>
                   <a:srgbClr val="1C2A33"/>
                 </a:solidFill>
@@ -4190,21 +4393,21 @@
                 <a:ea typeface="楷体"/>
                 <a:cs typeface="楷体"/>
               </a:rPr>
-              <a:t>思维品质：发现上下阕「问—答」结构呼应，培养整体把握诗词结构的思维能力。</a:t>
-            </a:r>
-          </a:p>
-        </p:txBody>
-      </p:sp>
-      <p:sp>
-        <p:nvSpPr>
-          <p:cNvPr id="20" name="Rounded Rectangle 19"/>
+              <a:t>发现上下阕「问—答」的结构呼应，整体把握词的章法。</a:t>
+            </a:r>
+          </a:p>
+        </p:txBody>
+      </p:sp>
+      <p:sp>
+        <p:nvSpPr>
+          <p:cNvPr id="21" name="Rounded Rectangle 20"/>
           <p:cNvSpPr/>
           <p:nvPr/>
         </p:nvSpPr>
         <p:spPr>
           <a:xfrm>
-            <a:off x="6263640" y="3703320"/>
-            <a:ext cx="5349240" cy="2057400"/>
+            <a:off x="9098051" y="2377440"/>
+            <a:ext cx="2453563" cy="3291840"/>
           </a:xfrm>
           <a:prstGeom prst="roundRect">
             <a:avLst/>
@@ -4212,9 +4415,9 @@
           <a:solidFill>
             <a:srgbClr val="FFFFFF"/>
           </a:solidFill>
-          <a:ln w="22860">
+          <a:ln w="20320">
             <a:solidFill>
-              <a:srgbClr val="B23A2A"/>
+              <a:srgbClr val="6B6258"/>
             </a:solidFill>
           </a:ln>
           <a:effectLst/>
@@ -4243,20 +4446,20 @@
       </p:sp>
       <p:sp>
         <p:nvSpPr>
-          <p:cNvPr id="21" name="Oval 20"/>
+          <p:cNvPr id="22" name="Oval 21"/>
           <p:cNvSpPr/>
           <p:nvPr/>
         </p:nvSpPr>
         <p:spPr>
           <a:xfrm>
-            <a:off x="6428232" y="3867912"/>
-            <a:ext cx="457200" cy="457200"/>
+            <a:off x="9913353" y="2697480"/>
+            <a:ext cx="822960" cy="822960"/>
           </a:xfrm>
           <a:prstGeom prst="ellipse">
             <a:avLst/>
           </a:prstGeom>
           <a:solidFill>
-            <a:srgbClr val="B23A2A"/>
+            <a:srgbClr val="6B6258"/>
           </a:solidFill>
           <a:ln>
             <a:noFill/>
@@ -4287,14 +4490,14 @@
       </p:sp>
       <p:sp>
         <p:nvSpPr>
-          <p:cNvPr id="22" name="TextBox 21"/>
+          <p:cNvPr id="23" name="TextBox 22"/>
           <p:cNvSpPr txBox="1"/>
           <p:nvPr/>
         </p:nvSpPr>
         <p:spPr>
           <a:xfrm>
-            <a:off x="6428232" y="3922776"/>
-            <a:ext cx="457200" cy="384048"/>
+            <a:off x="9913353" y="2880360"/>
+            <a:ext cx="822960" cy="457200"/>
           </a:xfrm>
           <a:prstGeom prst="rect">
             <a:avLst/>
@@ -4309,29 +4512,66 @@
           <a:p>
             <a:pPr algn="ctr"/>
             <a:r>
-              <a:rPr sz="1600" b="1">
+              <a:rPr sz="2400" b="1">
                 <a:solidFill>
                   <a:srgbClr val="FFFFFF"/>
+                </a:solidFill>
+                <a:latin typeface="楷体"/>
+                <a:ea typeface="楷体"/>
+                <a:cs typeface="楷体"/>
+              </a:rPr>
+              <a:t>4</a:t>
+            </a:r>
+          </a:p>
+        </p:txBody>
+      </p:sp>
+      <p:sp>
+        <p:nvSpPr>
+          <p:cNvPr id="24" name="TextBox 23"/>
+          <p:cNvSpPr txBox="1"/>
+          <p:nvPr/>
+        </p:nvSpPr>
+        <p:spPr>
+          <a:xfrm>
+            <a:off x="9280931" y="3749040"/>
+            <a:ext cx="2087803" cy="548640"/>
+          </a:xfrm>
+          <a:prstGeom prst="rect">
+            <a:avLst/>
+          </a:prstGeom>
+          <a:noFill/>
+        </p:spPr>
+        <p:txBody>
+          <a:bodyPr wrap="square" anchor="t" lIns="0" rIns="0" tIns="0" bIns="0">
+            <a:spAutoFit/>
+          </a:bodyPr>
+          <a:lstStyle/>
+          <a:p>
+            <a:pPr algn="ctr"/>
+            <a:r>
+              <a:rPr sz="1800" b="1">
+                <a:solidFill>
+                  <a:srgbClr val="6B6258"/>
                 </a:solidFill>
                 <a:latin typeface="微软雅黑"/>
                 <a:ea typeface="微软雅黑"/>
                 <a:cs typeface="微软雅黑"/>
               </a:rPr>
-              <a:t>4</a:t>
-            </a:r>
-          </a:p>
-        </p:txBody>
-      </p:sp>
-      <p:sp>
-        <p:nvSpPr>
-          <p:cNvPr id="23" name="TextBox 22"/>
+              <a:t>学习能力</a:t>
+            </a:r>
+          </a:p>
+        </p:txBody>
+      </p:sp>
+      <p:sp>
+        <p:nvSpPr>
+          <p:cNvPr id="25" name="TextBox 24"/>
           <p:cNvSpPr txBox="1"/>
           <p:nvPr/>
         </p:nvSpPr>
         <p:spPr>
           <a:xfrm>
-            <a:off x="6995160" y="3813048"/>
-            <a:ext cx="4434840" cy="457200"/>
+            <a:off x="9299219" y="4343400"/>
+            <a:ext cx="2051227" cy="1188720"/>
           </a:xfrm>
           <a:prstGeom prst="rect">
             <a:avLst/>
@@ -4344,54 +4584,13 @@
           </a:bodyPr>
           <a:lstStyle/>
           <a:p>
-            <a:pPr algn="l">
+            <a:pPr algn="ctr">
               <a:lnSpc>
-                <a:spcPct val="110000"/>
+                <a:spcPct val="145000"/>
               </a:lnSpc>
             </a:pPr>
             <a:r>
-              <a:rPr sz="1600" b="1">
-                <a:solidFill>
-                  <a:srgbClr val="1C2A33"/>
-                </a:solidFill>
-                <a:latin typeface="微软雅黑"/>
-                <a:ea typeface="微软雅黑"/>
-                <a:cs typeface="微软雅黑"/>
-              </a:rPr>
-              <a:t>目标</a:t>
-            </a:r>
-          </a:p>
-        </p:txBody>
-      </p:sp>
-      <p:sp>
-        <p:nvSpPr>
-          <p:cNvPr id="24" name="TextBox 23"/>
-          <p:cNvSpPr txBox="1"/>
-          <p:nvPr/>
-        </p:nvSpPr>
-        <p:spPr>
-          <a:xfrm>
-            <a:off x="6995160" y="4251960"/>
-            <a:ext cx="4434840" cy="1417320"/>
-          </a:xfrm>
-          <a:prstGeom prst="rect">
-            <a:avLst/>
-          </a:prstGeom>
-          <a:noFill/>
-        </p:spPr>
-        <p:txBody>
-          <a:bodyPr wrap="square" anchor="t" lIns="0" rIns="0" tIns="0" bIns="0">
-            <a:spAutoFit/>
-          </a:bodyPr>
-          <a:lstStyle/>
-          <a:p>
-            <a:pPr algn="l">
-              <a:lnSpc>
-                <a:spcPct val="128000"/>
-              </a:lnSpc>
-            </a:pPr>
-            <a:r>
-              <a:rPr sz="1200" b="0">
+              <a:rPr sz="1300" b="0">
                 <a:solidFill>
                   <a:srgbClr val="1C2A33"/>
                 </a:solidFill>
@@ -4399,14 +4598,14 @@
                 <a:ea typeface="楷体"/>
                 <a:cs typeface="楷体"/>
               </a:rPr>
-              <a:t>学习能力：运用「比较阅读」法，将上阕「看景」与下阕「忆人」对照分析，深化对诗词双线结构的理解。</a:t>
-            </a:r>
-          </a:p>
-        </p:txBody>
-      </p:sp>
-      <p:sp>
-        <p:nvSpPr>
-          <p:cNvPr id="25" name="TextBox 24"/>
+              <a:t>用「对照阅读」法，把上阕「看景」与下阕「忆人」并排比较。</a:t>
+            </a:r>
+          </a:p>
+        </p:txBody>
+      </p:sp>
+      <p:sp>
+        <p:nvSpPr>
+          <p:cNvPr id="26" name="TextBox 25"/>
           <p:cNvSpPr txBox="1"/>
           <p:nvPr/>
         </p:nvSpPr>
@@ -4533,13 +4732,13 @@
             <a:r>
               <a:rPr sz="1300" b="1">
                 <a:solidFill>
-                  <a:srgbClr val="2E7D6B"/>
+                  <a:srgbClr val="B23A2A"/>
                 </a:solidFill>
                 <a:latin typeface="微软雅黑"/>
                 <a:ea typeface="微软雅黑"/>
                 <a:cs typeface="微软雅黑"/>
               </a:rPr>
-              <a:t>课文背景</a:t>
+              <a:t>背景 · 权威调研</a:t>
             </a:r>
           </a:p>
         </p:txBody>
@@ -4559,7 +4758,7 @@
             <a:avLst/>
           </a:prstGeom>
           <a:solidFill>
-            <a:srgbClr val="2E7D6B"/>
+            <a:srgbClr val="B23A2A"/>
           </a:solidFill>
           <a:ln>
             <a:noFill/>
@@ -4596,8 +4795,289 @@
         </p:nvSpPr>
         <p:spPr>
           <a:xfrm>
-            <a:off x="640080" y="1508760"/>
-            <a:ext cx="6766560" cy="4572000"/>
+            <a:off x="640080" y="1325880"/>
+            <a:ext cx="10515600" cy="640080"/>
+          </a:xfrm>
+          <a:prstGeom prst="rect">
+            <a:avLst/>
+          </a:prstGeom>
+          <a:noFill/>
+        </p:spPr>
+        <p:txBody>
+          <a:bodyPr wrap="square" anchor="t" lIns="0" rIns="0" tIns="0" bIns="0">
+            <a:spAutoFit/>
+          </a:bodyPr>
+          <a:lstStyle/>
+          <a:p>
+            <a:pPr algn="l"/>
+            <a:r>
+              <a:rPr sz="3000" b="1">
+                <a:solidFill>
+                  <a:srgbClr val="1C2A33"/>
+                </a:solidFill>
+                <a:latin typeface="楷体"/>
+                <a:ea typeface="楷体"/>
+                <a:cs typeface="楷体"/>
+              </a:rPr>
+              <a:t>下阕写于 1925 · 橘子洲头</a:t>
+            </a:r>
+          </a:p>
+        </p:txBody>
+      </p:sp>
+      <p:sp>
+        <p:nvSpPr>
+          <p:cNvPr id="6" name="Rounded Rectangle 5"/>
+          <p:cNvSpPr/>
+          <p:nvPr/>
+        </p:nvSpPr>
+        <p:spPr>
+          <a:xfrm>
+            <a:off x="640080" y="2011680"/>
+            <a:ext cx="5029200" cy="3749039"/>
+          </a:xfrm>
+          <a:prstGeom prst="roundRect">
+            <a:avLst/>
+          </a:prstGeom>
+          <a:solidFill>
+            <a:srgbClr val="1C2A33"/>
+          </a:solidFill>
+          <a:effectLst/>
+        </p:spPr>
+        <p:style>
+          <a:lnRef idx="1">
+            <a:schemeClr val="accent1"/>
+          </a:lnRef>
+          <a:fillRef idx="3">
+            <a:schemeClr val="accent1"/>
+          </a:fillRef>
+          <a:effectRef idx="2">
+            <a:schemeClr val="accent1"/>
+          </a:effectRef>
+          <a:fontRef idx="minor">
+            <a:schemeClr val="lt1"/>
+          </a:fontRef>
+        </p:style>
+        <p:txBody>
+          <a:bodyPr rtlCol="0" anchor="ctr"/>
+          <a:lstStyle/>
+          <a:p>
+            <a:pPr algn="ctr"/>
+          </a:p>
+        </p:txBody>
+      </p:sp>
+      <p:sp>
+        <p:nvSpPr>
+          <p:cNvPr id="7" name="TextBox 6"/>
+          <p:cNvSpPr txBox="1"/>
+          <p:nvPr/>
+        </p:nvSpPr>
+        <p:spPr>
+          <a:xfrm>
+            <a:off x="914400" y="2194560"/>
+            <a:ext cx="4480560" cy="457200"/>
+          </a:xfrm>
+          <a:prstGeom prst="rect">
+            <a:avLst/>
+          </a:prstGeom>
+          <a:noFill/>
+        </p:spPr>
+        <p:txBody>
+          <a:bodyPr wrap="square" anchor="t" lIns="0" rIns="0" tIns="0" bIns="0">
+            <a:spAutoFit/>
+          </a:bodyPr>
+          <a:lstStyle/>
+          <a:p>
+            <a:pPr algn="l"/>
+            <a:r>
+              <a:rPr sz="1600" b="1">
+                <a:solidFill>
+                  <a:srgbClr val="C8A86B"/>
+                </a:solidFill>
+                <a:latin typeface="楷体"/>
+                <a:ea typeface="楷体"/>
+                <a:cs typeface="楷体"/>
+              </a:rPr>
+              <a:t>写作坐标</a:t>
+            </a:r>
+          </a:p>
+        </p:txBody>
+      </p:sp>
+      <p:sp>
+        <p:nvSpPr>
+          <p:cNvPr id="8" name="TextBox 7"/>
+          <p:cNvSpPr txBox="1"/>
+          <p:nvPr/>
+        </p:nvSpPr>
+        <p:spPr>
+          <a:xfrm>
+            <a:off x="914400" y="2697480"/>
+            <a:ext cx="4480560" cy="2926080"/>
+          </a:xfrm>
+          <a:prstGeom prst="rect">
+            <a:avLst/>
+          </a:prstGeom>
+          <a:noFill/>
+        </p:spPr>
+        <p:txBody>
+          <a:bodyPr wrap="square" anchor="t" lIns="0" rIns="0" tIns="0" bIns="0">
+            <a:spAutoFit/>
+          </a:bodyPr>
+          <a:lstStyle/>
+          <a:p>
+            <a:pPr algn="l">
+              <a:lnSpc>
+                <a:spcPct val="145000"/>
+              </a:lnSpc>
+              <a:spcAft>
+                <a:spcPts val="800"/>
+              </a:spcAft>
+            </a:pPr>
+            <a:r>
+              <a:rPr sz="1250" b="0">
+                <a:solidFill>
+                  <a:srgbClr val="E7DFD2"/>
+                </a:solidFill>
+                <a:latin typeface="楷体"/>
+                <a:ea typeface="楷体"/>
+                <a:cs typeface="楷体"/>
+              </a:rPr>
+              <a:t>1925 年秋，毛泽东离开韶山赴广州主办农民运动讲习所，途经长沙，重游橘子洲头。</a:t>
+            </a:r>
+          </a:p>
+          <a:p>
+            <a:pPr algn="l">
+              <a:lnSpc>
+                <a:spcPct val="145000"/>
+              </a:lnSpc>
+              <a:spcAft>
+                <a:spcPts val="800"/>
+              </a:spcAft>
+            </a:pPr>
+            <a:r>
+              <a:rPr sz="1250" b="0">
+                <a:solidFill>
+                  <a:srgbClr val="FFFFFF"/>
+                </a:solidFill>
+                <a:latin typeface="楷体"/>
+                <a:ea typeface="楷体"/>
+                <a:cs typeface="楷体"/>
+              </a:rPr>
+              <a:t>面对湘江秋景与蓬勃的革命形势，他写下全词。上阕"看"秋景，下阕"忆"青春，以"问苍茫大地，谁主沉浮"为枢纽衔接。</a:t>
+            </a:r>
+          </a:p>
+          <a:p>
+            <a:pPr algn="l">
+              <a:lnSpc>
+                <a:spcPct val="145000"/>
+              </a:lnSpc>
+            </a:pPr>
+            <a:r>
+              <a:rPr sz="1250" b="0">
+                <a:solidFill>
+                  <a:srgbClr val="C8A86B"/>
+                </a:solidFill>
+                <a:latin typeface="楷体"/>
+                <a:ea typeface="楷体"/>
+                <a:cs typeface="楷体"/>
+              </a:rPr>
+              <a:t>下阕是上阕一问的回答：用"同学少年"的群像，给出"谁主沉浮"的答案。</a:t>
+            </a:r>
+          </a:p>
+        </p:txBody>
+      </p:sp>
+      <p:sp>
+        <p:nvSpPr>
+          <p:cNvPr id="9" name="Rounded Rectangle 8"/>
+          <p:cNvSpPr/>
+          <p:nvPr/>
+        </p:nvSpPr>
+        <p:spPr>
+          <a:xfrm>
+            <a:off x="6035040" y="2011680"/>
+            <a:ext cx="5330952" cy="1828800"/>
+          </a:xfrm>
+          <a:prstGeom prst="roundRect">
+            <a:avLst/>
+          </a:prstGeom>
+          <a:solidFill>
+            <a:srgbClr val="FFFFFF"/>
+          </a:solidFill>
+          <a:ln w="20320">
+            <a:solidFill>
+              <a:srgbClr val="B23A2A"/>
+            </a:solidFill>
+          </a:ln>
+          <a:effectLst/>
+        </p:spPr>
+        <p:style>
+          <a:lnRef idx="1">
+            <a:schemeClr val="accent1"/>
+          </a:lnRef>
+          <a:fillRef idx="3">
+            <a:schemeClr val="accent1"/>
+          </a:fillRef>
+          <a:effectRef idx="2">
+            <a:schemeClr val="accent1"/>
+          </a:effectRef>
+          <a:fontRef idx="minor">
+            <a:schemeClr val="lt1"/>
+          </a:fontRef>
+        </p:style>
+        <p:txBody>
+          <a:bodyPr rtlCol="0" anchor="ctr"/>
+          <a:lstStyle/>
+          <a:p>
+            <a:pPr algn="ctr"/>
+          </a:p>
+        </p:txBody>
+      </p:sp>
+      <p:sp>
+        <p:nvSpPr>
+          <p:cNvPr id="10" name="TextBox 9"/>
+          <p:cNvSpPr txBox="1"/>
+          <p:nvPr/>
+        </p:nvSpPr>
+        <p:spPr>
+          <a:xfrm>
+            <a:off x="6309360" y="2157984"/>
+            <a:ext cx="4782312" cy="411480"/>
+          </a:xfrm>
+          <a:prstGeom prst="rect">
+            <a:avLst/>
+          </a:prstGeom>
+          <a:noFill/>
+        </p:spPr>
+        <p:txBody>
+          <a:bodyPr wrap="square" anchor="t" lIns="0" rIns="0" tIns="0" bIns="0">
+            <a:spAutoFit/>
+          </a:bodyPr>
+          <a:lstStyle/>
+          <a:p>
+            <a:pPr algn="l"/>
+            <a:r>
+              <a:rPr sz="1450" b="1">
+                <a:solidFill>
+                  <a:srgbClr val="B23A2A"/>
+                </a:solidFill>
+                <a:latin typeface="微软雅黑"/>
+                <a:ea typeface="微软雅黑"/>
+                <a:cs typeface="微软雅黑"/>
+              </a:rPr>
+              <a:t>来源 A · 学术权威解读</a:t>
+            </a:r>
+          </a:p>
+        </p:txBody>
+      </p:sp>
+      <p:sp>
+        <p:nvSpPr>
+          <p:cNvPr id="11" name="TextBox 10"/>
+          <p:cNvSpPr txBox="1"/>
+          <p:nvPr/>
+        </p:nvSpPr>
+        <p:spPr>
+          <a:xfrm>
+            <a:off x="6309360" y="2578608"/>
+            <a:ext cx="4782312" cy="914400"/>
           </a:xfrm>
           <a:prstGeom prst="rect">
             <a:avLst/>
@@ -4614,12 +5094,9 @@
               <a:lnSpc>
                 <a:spcPct val="150000"/>
               </a:lnSpc>
-              <a:spcAft>
-                <a:spcPts val="600"/>
-              </a:spcAft>
             </a:pPr>
             <a:r>
-              <a:rPr sz="1600" b="0">
+              <a:rPr sz="1200" b="0">
                 <a:solidFill>
                   <a:srgbClr val="1C2A33"/>
                 </a:solidFill>
@@ -4627,46 +5104,21 @@
                 <a:ea typeface="楷体"/>
                 <a:cs typeface="楷体"/>
               </a:rPr>
-              <a:t>本课延续第一课时，聚焦下阕。下阕以「忆」领起，回忆1913-1925年间在湖南第一师范的求学岁月：「恰同学少年，风华正茂；书生意气，挥斥方遒」四句十六字，凝练青春群像；「指点江山，激扬文字，粪土当年万户侯」展现革命青年的批判精神；末句「到中流击水，浪遏飞舟」以设问作答，回应上阕「谁主沉浮」——主宰中国命运的，正是这样的革命青年。结构上「问—忆—答」浑然一体。</a:t>
-            </a:r>
-          </a:p>
-        </p:txBody>
-      </p:sp>
-      <p:pic>
-        <p:nvPicPr>
-          <p:cNvPr id="6" name="Picture 5" descr="typewriter.jpg"/>
-          <p:cNvPicPr>
-            <a:picLocks noChangeAspect="1"/>
-          </p:cNvPicPr>
-          <p:nvPr/>
-        </p:nvPicPr>
-        <p:blipFill>
-          <a:blip r:embed="rId2"/>
-          <a:srcRect l="5860" r="5860"/>
-          <a:stretch>
-            <a:fillRect/>
-          </a:stretch>
-        </p:blipFill>
-        <p:spPr>
-          <a:xfrm>
-            <a:off x="8046720" y="1508760"/>
-            <a:ext cx="4114800" cy="3108960"/>
-          </a:xfrm>
-          <a:prstGeom prst="rect">
-            <a:avLst/>
-          </a:prstGeom>
-        </p:spPr>
-      </p:pic>
-      <p:sp>
-        <p:nvSpPr>
-          <p:cNvPr id="7" name="TextBox 6"/>
+              <a:t>下阕“以'忆'字为统领，以情为线”；“一个'恰'字打开记忆的闸口”；“粪土当年万户侯”典出《离骚》“苏粪壤以充帏兮”。并引 1964 年毛泽东自解“谁主沉浮”指“北伐前军阀统治，中国命运由哪个阶级做主”。</a:t>
+            </a:r>
+          </a:p>
+        </p:txBody>
+      </p:sp>
+      <p:sp>
+        <p:nvSpPr>
+          <p:cNvPr id="12" name="TextBox 11"/>
           <p:cNvSpPr txBox="1"/>
           <p:nvPr/>
         </p:nvSpPr>
         <p:spPr>
           <a:xfrm>
-            <a:off x="8046720" y="4663440"/>
-            <a:ext cx="4114800" cy="365760"/>
+            <a:off x="6309360" y="3474720"/>
+            <a:ext cx="4782312" cy="320040"/>
           </a:xfrm>
           <a:prstGeom prst="rect">
             <a:avLst/>
@@ -4679,9 +5131,9 @@
           </a:bodyPr>
           <a:lstStyle/>
           <a:p>
-            <a:pPr algn="ctr"/>
-            <a:r>
-              <a:rPr sz="1100" b="0">
+            <a:pPr algn="l"/>
+            <a:r>
+              <a:rPr sz="1000" b="0">
                 <a:solidFill>
                   <a:srgbClr val="6B6258"/>
                 </a:solidFill>
@@ -4689,14 +5141,216 @@
                 <a:ea typeface="微软雅黑"/>
                 <a:cs typeface="微软雅黑"/>
               </a:rPr>
-              <a:t>资料图（自由授权，复用 typewriter.jpg）</a:t>
-            </a:r>
-          </a:p>
-        </p:txBody>
-      </p:sp>
-      <p:sp>
-        <p:nvSpPr>
-          <p:cNvPr id="8" name="TextBox 7"/>
+              <a:t>来源：人民网《万类霜天竞自由——〈沁园春·长沙〉解析》（2024）</a:t>
+            </a:r>
+          </a:p>
+        </p:txBody>
+      </p:sp>
+      <p:sp>
+        <p:nvSpPr>
+          <p:cNvPr id="13" name="Rounded Rectangle 12"/>
+          <p:cNvSpPr/>
+          <p:nvPr/>
+        </p:nvSpPr>
+        <p:spPr>
+          <a:xfrm>
+            <a:off x="6035040" y="3977640"/>
+            <a:ext cx="5330952" cy="1828800"/>
+          </a:xfrm>
+          <a:prstGeom prst="roundRect">
+            <a:avLst/>
+          </a:prstGeom>
+          <a:solidFill>
+            <a:srgbClr val="FFFFFF"/>
+          </a:solidFill>
+          <a:ln w="20320">
+            <a:solidFill>
+              <a:srgbClr val="2E7D6B"/>
+            </a:solidFill>
+          </a:ln>
+          <a:effectLst/>
+        </p:spPr>
+        <p:style>
+          <a:lnRef idx="1">
+            <a:schemeClr val="accent1"/>
+          </a:lnRef>
+          <a:fillRef idx="3">
+            <a:schemeClr val="accent1"/>
+          </a:fillRef>
+          <a:effectRef idx="2">
+            <a:schemeClr val="accent1"/>
+          </a:effectRef>
+          <a:fontRef idx="minor">
+            <a:schemeClr val="lt1"/>
+          </a:fontRef>
+        </p:style>
+        <p:txBody>
+          <a:bodyPr rtlCol="0" anchor="ctr"/>
+          <a:lstStyle/>
+          <a:p>
+            <a:pPr algn="ctr"/>
+          </a:p>
+        </p:txBody>
+      </p:sp>
+      <p:sp>
+        <p:nvSpPr>
+          <p:cNvPr id="14" name="TextBox 13"/>
+          <p:cNvSpPr txBox="1"/>
+          <p:nvPr/>
+        </p:nvSpPr>
+        <p:spPr>
+          <a:xfrm>
+            <a:off x="6309360" y="4123944"/>
+            <a:ext cx="4782312" cy="411480"/>
+          </a:xfrm>
+          <a:prstGeom prst="rect">
+            <a:avLst/>
+          </a:prstGeom>
+          <a:noFill/>
+        </p:spPr>
+        <p:txBody>
+          <a:bodyPr wrap="square" anchor="t" lIns="0" rIns="0" tIns="0" bIns="0">
+            <a:spAutoFit/>
+          </a:bodyPr>
+          <a:lstStyle/>
+          <a:p>
+            <a:pPr algn="l"/>
+            <a:r>
+              <a:rPr sz="1450" b="1">
+                <a:solidFill>
+                  <a:srgbClr val="2E7D6B"/>
+                </a:solidFill>
+                <a:latin typeface="微软雅黑"/>
+                <a:ea typeface="微软雅黑"/>
+                <a:cs typeface="微软雅黑"/>
+              </a:rPr>
+              <a:t>来源 B · 作者亲笔批注（一手）</a:t>
+            </a:r>
+          </a:p>
+        </p:txBody>
+      </p:sp>
+      <p:sp>
+        <p:nvSpPr>
+          <p:cNvPr id="15" name="TextBox 14"/>
+          <p:cNvSpPr txBox="1"/>
+          <p:nvPr/>
+        </p:nvSpPr>
+        <p:spPr>
+          <a:xfrm>
+            <a:off x="6309360" y="4544568"/>
+            <a:ext cx="4782312" cy="914400"/>
+          </a:xfrm>
+          <a:prstGeom prst="rect">
+            <a:avLst/>
+          </a:prstGeom>
+          <a:noFill/>
+        </p:spPr>
+        <p:txBody>
+          <a:bodyPr wrap="square" anchor="t" lIns="0" rIns="0" tIns="0" bIns="0">
+            <a:spAutoFit/>
+          </a:bodyPr>
+          <a:lstStyle/>
+          <a:p>
+            <a:pPr algn="l">
+              <a:lnSpc>
+                <a:spcPct val="150000"/>
+              </a:lnSpc>
+            </a:pPr>
+            <a:r>
+              <a:rPr sz="1200" b="0">
+                <a:solidFill>
+                  <a:srgbClr val="1C2A33"/>
+                </a:solidFill>
+                <a:latin typeface="楷体"/>
+                <a:ea typeface="楷体"/>
+                <a:cs typeface="楷体"/>
+              </a:rPr>
+              <a:t>“击水：游泳。那时初学，盛夏水涨，几死者数……自信人生二百年，会当水击三千里。”——证实“中流击水”写湘江游泳经历，兼喻“搏击时代大潮”。</a:t>
+            </a:r>
+          </a:p>
+        </p:txBody>
+      </p:sp>
+      <p:sp>
+        <p:nvSpPr>
+          <p:cNvPr id="16" name="TextBox 15"/>
+          <p:cNvSpPr txBox="1"/>
+          <p:nvPr/>
+        </p:nvSpPr>
+        <p:spPr>
+          <a:xfrm>
+            <a:off x="6309360" y="5440680"/>
+            <a:ext cx="4782312" cy="320040"/>
+          </a:xfrm>
+          <a:prstGeom prst="rect">
+            <a:avLst/>
+          </a:prstGeom>
+          <a:noFill/>
+        </p:spPr>
+        <p:txBody>
+          <a:bodyPr wrap="square" anchor="t" lIns="0" rIns="0" tIns="0" bIns="0">
+            <a:spAutoFit/>
+          </a:bodyPr>
+          <a:lstStyle/>
+          <a:p>
+            <a:pPr algn="l"/>
+            <a:r>
+              <a:rPr sz="1000" b="0">
+                <a:solidFill>
+                  <a:srgbClr val="6B6258"/>
+                </a:solidFill>
+                <a:latin typeface="微软雅黑"/>
+                <a:ea typeface="微软雅黑"/>
+                <a:cs typeface="微软雅黑"/>
+              </a:rPr>
+              <a:t>来源：毛泽东 1958 年书眉批注；人民网党史频道、中国作家网转引</a:t>
+            </a:r>
+          </a:p>
+        </p:txBody>
+      </p:sp>
+      <p:sp>
+        <p:nvSpPr>
+          <p:cNvPr id="17" name="TextBox 16"/>
+          <p:cNvSpPr txBox="1"/>
+          <p:nvPr/>
+        </p:nvSpPr>
+        <p:spPr>
+          <a:xfrm>
+            <a:off x="640080" y="5852160"/>
+            <a:ext cx="10881360" cy="411480"/>
+          </a:xfrm>
+          <a:prstGeom prst="rect">
+            <a:avLst/>
+          </a:prstGeom>
+          <a:noFill/>
+        </p:spPr>
+        <p:txBody>
+          <a:bodyPr wrap="square" anchor="t" lIns="0" rIns="0" tIns="0" bIns="0">
+            <a:spAutoFit/>
+          </a:bodyPr>
+          <a:lstStyle/>
+          <a:p>
+            <a:pPr algn="l">
+              <a:lnSpc>
+                <a:spcPct val="130000"/>
+              </a:lnSpc>
+            </a:pPr>
+            <a:r>
+              <a:rPr sz="1050" b="0">
+                <a:solidFill>
+                  <a:srgbClr val="6B6258"/>
+                </a:solidFill>
+                <a:latin typeface="微软雅黑"/>
+                <a:ea typeface="微软雅黑"/>
+                <a:cs typeface="微软雅黑"/>
+              </a:rPr>
+              <a:t>（本词为橘子洲怀古之作，现有可复用照片均属第二单元劳动主题，与词题无关联；按规范 §2.3 以学科色块呈现，本课件未使用无关配图。）</a:t>
+            </a:r>
+          </a:p>
+        </p:txBody>
+      </p:sp>
+      <p:sp>
+        <p:nvSpPr>
+          <p:cNvPr id="18" name="TextBox 17"/>
           <p:cNvSpPr txBox="1"/>
           <p:nvPr/>
         </p:nvSpPr>
@@ -4829,7 +5483,7 @@
                 <a:ea typeface="微软雅黑"/>
                 <a:cs typeface="微软雅黑"/>
               </a:rPr>
-              <a:t>学习重点</a:t>
+              <a:t>重点 · 三个落点</a:t>
             </a:r>
           </a:p>
         </p:txBody>
@@ -4880,14 +5534,51 @@
       </p:sp>
       <p:sp>
         <p:nvSpPr>
-          <p:cNvPr id="5" name="Rounded Rectangle 4"/>
+          <p:cNvPr id="5" name="TextBox 4"/>
+          <p:cNvSpPr txBox="1"/>
+          <p:nvPr/>
+        </p:nvSpPr>
+        <p:spPr>
+          <a:xfrm>
+            <a:off x="640080" y="1325880"/>
+            <a:ext cx="10515600" cy="640080"/>
+          </a:xfrm>
+          <a:prstGeom prst="rect">
+            <a:avLst/>
+          </a:prstGeom>
+          <a:noFill/>
+        </p:spPr>
+        <p:txBody>
+          <a:bodyPr wrap="square" anchor="t" lIns="0" rIns="0" tIns="0" bIns="0">
+            <a:spAutoFit/>
+          </a:bodyPr>
+          <a:lstStyle/>
+          <a:p>
+            <a:pPr algn="l"/>
+            <a:r>
+              <a:rPr sz="2800" b="1">
+                <a:solidFill>
+                  <a:srgbClr val="1C2A33"/>
+                </a:solidFill>
+                <a:latin typeface="楷体"/>
+                <a:ea typeface="楷体"/>
+                <a:cs typeface="楷体"/>
+              </a:rPr>
+              <a:t>结构 · 词句 · 呼应</a:t>
+            </a:r>
+          </a:p>
+        </p:txBody>
+      </p:sp>
+      <p:sp>
+        <p:nvSpPr>
+          <p:cNvPr id="6" name="Rounded Rectangle 5"/>
           <p:cNvSpPr/>
           <p:nvPr/>
         </p:nvSpPr>
         <p:spPr>
           <a:xfrm>
-            <a:off x="640080" y="1371600"/>
-            <a:ext cx="10911535" cy="1597152"/>
+            <a:off x="640080" y="2286000"/>
+            <a:ext cx="3393338" cy="3840480"/>
           </a:xfrm>
           <a:prstGeom prst="roundRect">
             <a:avLst/>
@@ -4895,7 +5586,343 @@
           <a:solidFill>
             <a:srgbClr val="FFFFFF"/>
           </a:solidFill>
-          <a:ln w="22860">
+          <a:ln w="20320">
+            <a:solidFill>
+              <a:srgbClr val="B23A2A"/>
+            </a:solidFill>
+          </a:ln>
+          <a:effectLst/>
+        </p:spPr>
+        <p:style>
+          <a:lnRef idx="1">
+            <a:schemeClr val="accent1"/>
+          </a:lnRef>
+          <a:fillRef idx="3">
+            <a:schemeClr val="accent1"/>
+          </a:fillRef>
+          <a:effectRef idx="2">
+            <a:schemeClr val="accent1"/>
+          </a:effectRef>
+          <a:fontRef idx="minor">
+            <a:schemeClr val="lt1"/>
+          </a:fontRef>
+        </p:style>
+        <p:txBody>
+          <a:bodyPr rtlCol="0" anchor="ctr"/>
+          <a:lstStyle/>
+          <a:p>
+            <a:pPr algn="ctr"/>
+          </a:p>
+        </p:txBody>
+      </p:sp>
+      <p:sp>
+        <p:nvSpPr>
+          <p:cNvPr id="7" name="Rectangle 6"/>
+          <p:cNvSpPr/>
+          <p:nvPr/>
+        </p:nvSpPr>
+        <p:spPr>
+          <a:xfrm>
+            <a:off x="640080" y="2286000"/>
+            <a:ext cx="3393338" cy="548640"/>
+          </a:xfrm>
+          <a:prstGeom prst="rect">
+            <a:avLst/>
+          </a:prstGeom>
+          <a:solidFill>
+            <a:srgbClr val="B23A2A"/>
+          </a:solidFill>
+          <a:ln>
+            <a:noFill/>
+          </a:ln>
+          <a:effectLst/>
+        </p:spPr>
+        <p:style>
+          <a:lnRef idx="1">
+            <a:schemeClr val="accent1"/>
+          </a:lnRef>
+          <a:fillRef idx="3">
+            <a:schemeClr val="accent1"/>
+          </a:fillRef>
+          <a:effectRef idx="2">
+            <a:schemeClr val="accent1"/>
+          </a:effectRef>
+          <a:fontRef idx="minor">
+            <a:schemeClr val="lt1"/>
+          </a:fontRef>
+        </p:style>
+        <p:txBody>
+          <a:bodyPr rtlCol="0" anchor="ctr"/>
+          <a:lstStyle/>
+          <a:p>
+            <a:pPr algn="ctr"/>
+          </a:p>
+        </p:txBody>
+      </p:sp>
+      <p:sp>
+        <p:nvSpPr>
+          <p:cNvPr id="8" name="TextBox 7"/>
+          <p:cNvSpPr txBox="1"/>
+          <p:nvPr/>
+        </p:nvSpPr>
+        <p:spPr>
+          <a:xfrm>
+            <a:off x="640080" y="2395728"/>
+            <a:ext cx="3393338" cy="365760"/>
+          </a:xfrm>
+          <a:prstGeom prst="rect">
+            <a:avLst/>
+          </a:prstGeom>
+          <a:noFill/>
+        </p:spPr>
+        <p:txBody>
+          <a:bodyPr wrap="square" anchor="t" lIns="0" rIns="0" tIns="0" bIns="0">
+            <a:spAutoFit/>
+          </a:bodyPr>
+          <a:lstStyle/>
+          <a:p>
+            <a:pPr algn="ctr"/>
+            <a:r>
+              <a:rPr sz="1500" b="1">
+                <a:solidFill>
+                  <a:srgbClr val="FFFFFF"/>
+                </a:solidFill>
+                <a:latin typeface="微软雅黑"/>
+                <a:ea typeface="微软雅黑"/>
+                <a:cs typeface="微软雅黑"/>
+              </a:rPr>
+              <a:t>① 下阕结构</a:t>
+            </a:r>
+          </a:p>
+        </p:txBody>
+      </p:sp>
+      <p:sp>
+        <p:nvSpPr>
+          <p:cNvPr id="9" name="TextBox 8"/>
+          <p:cNvSpPr txBox="1"/>
+          <p:nvPr/>
+        </p:nvSpPr>
+        <p:spPr>
+          <a:xfrm>
+            <a:off x="914400" y="3108960"/>
+            <a:ext cx="2844698" cy="2834640"/>
+          </a:xfrm>
+          <a:prstGeom prst="rect">
+            <a:avLst/>
+          </a:prstGeom>
+          <a:noFill/>
+        </p:spPr>
+        <p:txBody>
+          <a:bodyPr wrap="square" anchor="t" lIns="0" rIns="0" tIns="0" bIns="0">
+            <a:spAutoFit/>
+          </a:bodyPr>
+          <a:lstStyle/>
+          <a:p>
+            <a:pPr algn="l">
+              <a:lnSpc>
+                <a:spcPct val="160000"/>
+              </a:lnSpc>
+            </a:pPr>
+            <a:r>
+              <a:rPr sz="1400" b="0">
+                <a:solidFill>
+                  <a:srgbClr val="1C2A33"/>
+                </a:solidFill>
+                <a:latin typeface="楷体"/>
+                <a:ea typeface="楷体"/>
+                <a:cs typeface="楷体"/>
+              </a:rPr>
+              <a:t>「忆」领起 →「恰」字群像描写 →「到」字设问作答，一线贯通。</a:t>
+            </a:r>
+          </a:p>
+        </p:txBody>
+      </p:sp>
+      <p:sp>
+        <p:nvSpPr>
+          <p:cNvPr id="10" name="Rounded Rectangle 9"/>
+          <p:cNvSpPr/>
+          <p:nvPr/>
+        </p:nvSpPr>
+        <p:spPr>
+          <a:xfrm>
+            <a:off x="4399178" y="2286000"/>
+            <a:ext cx="3393338" cy="3840480"/>
+          </a:xfrm>
+          <a:prstGeom prst="roundRect">
+            <a:avLst/>
+          </a:prstGeom>
+          <a:solidFill>
+            <a:srgbClr val="FFFFFF"/>
+          </a:solidFill>
+          <a:ln w="20320">
+            <a:solidFill>
+              <a:srgbClr val="2E7D6B"/>
+            </a:solidFill>
+          </a:ln>
+          <a:effectLst/>
+        </p:spPr>
+        <p:style>
+          <a:lnRef idx="1">
+            <a:schemeClr val="accent1"/>
+          </a:lnRef>
+          <a:fillRef idx="3">
+            <a:schemeClr val="accent1"/>
+          </a:fillRef>
+          <a:effectRef idx="2">
+            <a:schemeClr val="accent1"/>
+          </a:effectRef>
+          <a:fontRef idx="minor">
+            <a:schemeClr val="lt1"/>
+          </a:fontRef>
+        </p:style>
+        <p:txBody>
+          <a:bodyPr rtlCol="0" anchor="ctr"/>
+          <a:lstStyle/>
+          <a:p>
+            <a:pPr algn="ctr"/>
+          </a:p>
+        </p:txBody>
+      </p:sp>
+      <p:sp>
+        <p:nvSpPr>
+          <p:cNvPr id="11" name="Rectangle 10"/>
+          <p:cNvSpPr/>
+          <p:nvPr/>
+        </p:nvSpPr>
+        <p:spPr>
+          <a:xfrm>
+            <a:off x="4399178" y="2286000"/>
+            <a:ext cx="3393338" cy="548640"/>
+          </a:xfrm>
+          <a:prstGeom prst="rect">
+            <a:avLst/>
+          </a:prstGeom>
+          <a:solidFill>
+            <a:srgbClr val="2E7D6B"/>
+          </a:solidFill>
+          <a:ln>
+            <a:noFill/>
+          </a:ln>
+          <a:effectLst/>
+        </p:spPr>
+        <p:style>
+          <a:lnRef idx="1">
+            <a:schemeClr val="accent1"/>
+          </a:lnRef>
+          <a:fillRef idx="3">
+            <a:schemeClr val="accent1"/>
+          </a:fillRef>
+          <a:effectRef idx="2">
+            <a:schemeClr val="accent1"/>
+          </a:effectRef>
+          <a:fontRef idx="minor">
+            <a:schemeClr val="lt1"/>
+          </a:fontRef>
+        </p:style>
+        <p:txBody>
+          <a:bodyPr rtlCol="0" anchor="ctr"/>
+          <a:lstStyle/>
+          <a:p>
+            <a:pPr algn="ctr"/>
+          </a:p>
+        </p:txBody>
+      </p:sp>
+      <p:sp>
+        <p:nvSpPr>
+          <p:cNvPr id="12" name="TextBox 11"/>
+          <p:cNvSpPr txBox="1"/>
+          <p:nvPr/>
+        </p:nvSpPr>
+        <p:spPr>
+          <a:xfrm>
+            <a:off x="4399178" y="2395728"/>
+            <a:ext cx="3393338" cy="365760"/>
+          </a:xfrm>
+          <a:prstGeom prst="rect">
+            <a:avLst/>
+          </a:prstGeom>
+          <a:noFill/>
+        </p:spPr>
+        <p:txBody>
+          <a:bodyPr wrap="square" anchor="t" lIns="0" rIns="0" tIns="0" bIns="0">
+            <a:spAutoFit/>
+          </a:bodyPr>
+          <a:lstStyle/>
+          <a:p>
+            <a:pPr algn="ctr"/>
+            <a:r>
+              <a:rPr sz="1500" b="1">
+                <a:solidFill>
+                  <a:srgbClr val="FFFFFF"/>
+                </a:solidFill>
+                <a:latin typeface="微软雅黑"/>
+                <a:ea typeface="微软雅黑"/>
+                <a:cs typeface="微软雅黑"/>
+              </a:rPr>
+              <a:t>② 关键词句</a:t>
+            </a:r>
+          </a:p>
+        </p:txBody>
+      </p:sp>
+      <p:sp>
+        <p:nvSpPr>
+          <p:cNvPr id="13" name="TextBox 12"/>
+          <p:cNvSpPr txBox="1"/>
+          <p:nvPr/>
+        </p:nvSpPr>
+        <p:spPr>
+          <a:xfrm>
+            <a:off x="4673498" y="3108960"/>
+            <a:ext cx="2844698" cy="2834640"/>
+          </a:xfrm>
+          <a:prstGeom prst="rect">
+            <a:avLst/>
+          </a:prstGeom>
+          <a:noFill/>
+        </p:spPr>
+        <p:txBody>
+          <a:bodyPr wrap="square" anchor="t" lIns="0" rIns="0" tIns="0" bIns="0">
+            <a:spAutoFit/>
+          </a:bodyPr>
+          <a:lstStyle/>
+          <a:p>
+            <a:pPr algn="l">
+              <a:lnSpc>
+                <a:spcPct val="160000"/>
+              </a:lnSpc>
+            </a:pPr>
+            <a:r>
+              <a:rPr sz="1400" b="0">
+                <a:solidFill>
+                  <a:srgbClr val="1C2A33"/>
+                </a:solidFill>
+                <a:latin typeface="楷体"/>
+                <a:ea typeface="楷体"/>
+                <a:cs typeface="楷体"/>
+              </a:rPr>
+              <a:t>粪土（名词作动词，把……看作粪土）；挥斥方遒（奔放·正·强劲）。</a:t>
+            </a:r>
+          </a:p>
+        </p:txBody>
+      </p:sp>
+      <p:sp>
+        <p:nvSpPr>
+          <p:cNvPr id="14" name="Rounded Rectangle 13"/>
+          <p:cNvSpPr/>
+          <p:nvPr/>
+        </p:nvSpPr>
+        <p:spPr>
+          <a:xfrm>
+            <a:off x="8158276" y="2286000"/>
+            <a:ext cx="3393338" cy="3840480"/>
+          </a:xfrm>
+          <a:prstGeom prst="roundRect">
+            <a:avLst/>
+          </a:prstGeom>
+          <a:solidFill>
+            <a:srgbClr val="FFFFFF"/>
+          </a:solidFill>
+          <a:ln w="20320">
             <a:solidFill>
               <a:srgbClr val="C8A86B"/>
             </a:solidFill>
@@ -4926,107 +5953,23 @@
       </p:sp>
       <p:sp>
         <p:nvSpPr>
-          <p:cNvPr id="6" name="TextBox 5"/>
-          <p:cNvSpPr txBox="1"/>
-          <p:nvPr/>
-        </p:nvSpPr>
-        <p:spPr>
-          <a:xfrm>
-            <a:off x="1371600" y="1481328"/>
-            <a:ext cx="9997135" cy="457200"/>
-          </a:xfrm>
-          <a:prstGeom prst="rect">
-            <a:avLst/>
-          </a:prstGeom>
-          <a:noFill/>
-        </p:spPr>
-        <p:txBody>
-          <a:bodyPr wrap="square" anchor="t" lIns="0" rIns="0" tIns="0" bIns="0">
-            <a:spAutoFit/>
-          </a:bodyPr>
-          <a:lstStyle/>
-          <a:p>
-            <a:pPr algn="l">
-              <a:lnSpc>
-                <a:spcPct val="110000"/>
-              </a:lnSpc>
-            </a:pPr>
-            <a:r>
-              <a:rPr sz="1600" b="1">
-                <a:solidFill>
-                  <a:srgbClr val="1C2A33"/>
-                </a:solidFill>
-                <a:latin typeface="微软雅黑"/>
-                <a:ea typeface="微软雅黑"/>
-                <a:cs typeface="微软雅黑"/>
-              </a:rPr>
-              <a:t/>
-            </a:r>
-          </a:p>
-        </p:txBody>
-      </p:sp>
-      <p:sp>
-        <p:nvSpPr>
-          <p:cNvPr id="7" name="TextBox 6"/>
-          <p:cNvSpPr txBox="1"/>
-          <p:nvPr/>
-        </p:nvSpPr>
-        <p:spPr>
-          <a:xfrm>
-            <a:off x="1371600" y="1920240"/>
-            <a:ext cx="9997135" cy="957072"/>
-          </a:xfrm>
-          <a:prstGeom prst="rect">
-            <a:avLst/>
-          </a:prstGeom>
-          <a:noFill/>
-        </p:spPr>
-        <p:txBody>
-          <a:bodyPr wrap="square" anchor="t" lIns="0" rIns="0" tIns="0" bIns="0">
-            <a:spAutoFit/>
-          </a:bodyPr>
-          <a:lstStyle/>
-          <a:p>
-            <a:pPr algn="l">
-              <a:lnSpc>
-                <a:spcPct val="128000"/>
-              </a:lnSpc>
-            </a:pPr>
-            <a:r>
-              <a:rPr sz="1300" b="0">
-                <a:solidFill>
-                  <a:srgbClr val="1C2A33"/>
-                </a:solidFill>
-                <a:latin typeface="楷体"/>
-                <a:ea typeface="楷体"/>
-                <a:cs typeface="楷体"/>
-              </a:rPr>
-              <a:t>① 下阕结构：「忆」领起→「恰」字群像描写→「到」字设问作答。</a:t>
-            </a:r>
-          </a:p>
-        </p:txBody>
-      </p:sp>
-      <p:sp>
-        <p:nvSpPr>
-          <p:cNvPr id="8" name="Rounded Rectangle 7"/>
+          <p:cNvPr id="15" name="Rectangle 14"/>
           <p:cNvSpPr/>
           <p:nvPr/>
         </p:nvSpPr>
         <p:spPr>
           <a:xfrm>
-            <a:off x="640080" y="3078480"/>
-            <a:ext cx="10911535" cy="1597152"/>
-          </a:xfrm>
-          <a:prstGeom prst="roundRect">
+            <a:off x="8158276" y="2286000"/>
+            <a:ext cx="3393338" cy="548640"/>
+          </a:xfrm>
+          <a:prstGeom prst="rect">
             <a:avLst/>
           </a:prstGeom>
           <a:solidFill>
-            <a:srgbClr val="FFFFFF"/>
+            <a:srgbClr val="C8A86B"/>
           </a:solidFill>
-          <a:ln w="22860">
-            <a:solidFill>
-              <a:srgbClr val="C8A86B"/>
-            </a:solidFill>
+          <a:ln>
+            <a:noFill/>
           </a:ln>
           <a:effectLst/>
         </p:spPr>
@@ -5054,14 +5997,14 @@
       </p:sp>
       <p:sp>
         <p:nvSpPr>
-          <p:cNvPr id="9" name="TextBox 8"/>
+          <p:cNvPr id="16" name="TextBox 15"/>
           <p:cNvSpPr txBox="1"/>
           <p:nvPr/>
         </p:nvSpPr>
         <p:spPr>
           <a:xfrm>
-            <a:off x="1371600" y="3188208"/>
-            <a:ext cx="9997135" cy="457200"/>
+            <a:off x="8158276" y="2395728"/>
+            <a:ext cx="3393338" cy="365760"/>
           </a:xfrm>
           <a:prstGeom prst="rect">
             <a:avLst/>
@@ -5074,35 +6017,31 @@
           </a:bodyPr>
           <a:lstStyle/>
           <a:p>
-            <a:pPr algn="l">
-              <a:lnSpc>
-                <a:spcPct val="110000"/>
-              </a:lnSpc>
-            </a:pPr>
-            <a:r>
-              <a:rPr sz="1600" b="1">
-                <a:solidFill>
-                  <a:srgbClr val="1C2A33"/>
+            <a:pPr algn="ctr"/>
+            <a:r>
+              <a:rPr sz="1500" b="1">
+                <a:solidFill>
+                  <a:srgbClr val="FFFFFF"/>
                 </a:solidFill>
                 <a:latin typeface="微软雅黑"/>
                 <a:ea typeface="微软雅黑"/>
                 <a:cs typeface="微软雅黑"/>
               </a:rPr>
-              <a:t/>
-            </a:r>
-          </a:p>
-        </p:txBody>
-      </p:sp>
-      <p:sp>
-        <p:nvSpPr>
-          <p:cNvPr id="10" name="TextBox 9"/>
+              <a:t>③ 上下阕呼应</a:t>
+            </a:r>
+          </a:p>
+        </p:txBody>
+      </p:sp>
+      <p:sp>
+        <p:nvSpPr>
+          <p:cNvPr id="17" name="TextBox 16"/>
           <p:cNvSpPr txBox="1"/>
           <p:nvPr/>
         </p:nvSpPr>
         <p:spPr>
           <a:xfrm>
-            <a:off x="1371600" y="3627120"/>
-            <a:ext cx="9997135" cy="957072"/>
+            <a:off x="8432596" y="3108960"/>
+            <a:ext cx="2844698" cy="2834640"/>
           </a:xfrm>
           <a:prstGeom prst="rect">
             <a:avLst/>
@@ -5117,11 +6056,11 @@
           <a:p>
             <a:pPr algn="l">
               <a:lnSpc>
-                <a:spcPct val="128000"/>
+                <a:spcPct val="160000"/>
               </a:lnSpc>
             </a:pPr>
             <a:r>
-              <a:rPr sz="1100" b="0">
+              <a:rPr sz="1400" b="0">
                 <a:solidFill>
                   <a:srgbClr val="1C2A33"/>
                 </a:solidFill>
@@ -5129,142 +6068,14 @@
                 <a:ea typeface="楷体"/>
                 <a:cs typeface="楷体"/>
               </a:rPr>
-              <a:t>② 关键词句：「粪土当年万户侯」——粪土（名词作动词，把……看作粪土）；「挥斥方遒」——挥斥（奔放），方（正），遒（强劲）。</a:t>
-            </a:r>
-          </a:p>
-        </p:txBody>
-      </p:sp>
-      <p:sp>
-        <p:nvSpPr>
-          <p:cNvPr id="11" name="Rounded Rectangle 10"/>
-          <p:cNvSpPr/>
-          <p:nvPr/>
-        </p:nvSpPr>
-        <p:spPr>
-          <a:xfrm>
-            <a:off x="640080" y="4785360"/>
-            <a:ext cx="10911535" cy="1597152"/>
-          </a:xfrm>
-          <a:prstGeom prst="roundRect">
-            <a:avLst/>
-          </a:prstGeom>
-          <a:solidFill>
-            <a:srgbClr val="FFFFFF"/>
-          </a:solidFill>
-          <a:ln w="22860">
-            <a:solidFill>
-              <a:srgbClr val="C8A86B"/>
-            </a:solidFill>
-          </a:ln>
-          <a:effectLst/>
-        </p:spPr>
-        <p:style>
-          <a:lnRef idx="1">
-            <a:schemeClr val="accent1"/>
-          </a:lnRef>
-          <a:fillRef idx="3">
-            <a:schemeClr val="accent1"/>
-          </a:fillRef>
-          <a:effectRef idx="2">
-            <a:schemeClr val="accent1"/>
-          </a:effectRef>
-          <a:fontRef idx="minor">
-            <a:schemeClr val="lt1"/>
-          </a:fontRef>
-        </p:style>
-        <p:txBody>
-          <a:bodyPr rtlCol="0" anchor="ctr"/>
-          <a:lstStyle/>
-          <a:p>
-            <a:pPr algn="ctr"/>
-          </a:p>
-        </p:txBody>
-      </p:sp>
-      <p:sp>
-        <p:nvSpPr>
-          <p:cNvPr id="12" name="TextBox 11"/>
-          <p:cNvSpPr txBox="1"/>
-          <p:nvPr/>
-        </p:nvSpPr>
-        <p:spPr>
-          <a:xfrm>
-            <a:off x="1371600" y="4895088"/>
-            <a:ext cx="9997135" cy="457200"/>
-          </a:xfrm>
-          <a:prstGeom prst="rect">
-            <a:avLst/>
-          </a:prstGeom>
-          <a:noFill/>
-        </p:spPr>
-        <p:txBody>
-          <a:bodyPr wrap="square" anchor="t" lIns="0" rIns="0" tIns="0" bIns="0">
-            <a:spAutoFit/>
-          </a:bodyPr>
-          <a:lstStyle/>
-          <a:p>
-            <a:pPr algn="l">
-              <a:lnSpc>
-                <a:spcPct val="110000"/>
-              </a:lnSpc>
-            </a:pPr>
-            <a:r>
-              <a:rPr sz="1600" b="1">
-                <a:solidFill>
-                  <a:srgbClr val="1C2A33"/>
-                </a:solidFill>
-                <a:latin typeface="微软雅黑"/>
-                <a:ea typeface="微软雅黑"/>
-                <a:cs typeface="微软雅黑"/>
-              </a:rPr>
-              <a:t/>
-            </a:r>
-          </a:p>
-        </p:txBody>
-      </p:sp>
-      <p:sp>
-        <p:nvSpPr>
-          <p:cNvPr id="13" name="TextBox 12"/>
-          <p:cNvSpPr txBox="1"/>
-          <p:nvPr/>
-        </p:nvSpPr>
-        <p:spPr>
-          <a:xfrm>
-            <a:off x="1371600" y="5334000"/>
-            <a:ext cx="9997135" cy="957072"/>
-          </a:xfrm>
-          <a:prstGeom prst="rect">
-            <a:avLst/>
-          </a:prstGeom>
-          <a:noFill/>
-        </p:spPr>
-        <p:txBody>
-          <a:bodyPr wrap="square" anchor="t" lIns="0" rIns="0" tIns="0" bIns="0">
-            <a:spAutoFit/>
-          </a:bodyPr>
-          <a:lstStyle/>
-          <a:p>
-            <a:pPr algn="l">
-              <a:lnSpc>
-                <a:spcPct val="128000"/>
-              </a:lnSpc>
-            </a:pPr>
-            <a:r>
-              <a:rPr sz="1200" b="0">
-                <a:solidFill>
-                  <a:srgbClr val="1C2A33"/>
-                </a:solidFill>
-                <a:latin typeface="楷体"/>
-                <a:ea typeface="楷体"/>
-                <a:cs typeface="楷体"/>
-              </a:rPr>
-              <a:t>③ 上下阕呼应：上阕「问苍茫大地，谁主沉浮」→下阕「到中流击水，浪遏飞舟」即为回答。</a:t>
-            </a:r>
-          </a:p>
-        </p:txBody>
-      </p:sp>
-      <p:sp>
-        <p:nvSpPr>
-          <p:cNvPr id="14" name="TextBox 13"/>
+              <a:t>上阕"问苍茫大地，谁主沉浮" → 下阕"到中流击水，浪遏飞舟"即作答。</a:t>
+            </a:r>
+          </a:p>
+        </p:txBody>
+      </p:sp>
+      <p:sp>
+        <p:nvSpPr>
+          <p:cNvPr id="18" name="TextBox 17"/>
           <p:cNvSpPr txBox="1"/>
           <p:nvPr/>
         </p:nvSpPr>
@@ -5391,13 +6202,13 @@
             <a:r>
               <a:rPr sz="1300" b="1">
                 <a:solidFill>
-                  <a:srgbClr val="2E7D6B"/>
+                  <a:srgbClr val="B23A2A"/>
                 </a:solidFill>
                 <a:latin typeface="微软雅黑"/>
                 <a:ea typeface="微软雅黑"/>
                 <a:cs typeface="微软雅黑"/>
               </a:rPr>
-              <a:t>学习路径</a:t>
+              <a:t>方法 · 四招读词</a:t>
             </a:r>
           </a:p>
         </p:txBody>
@@ -5417,7 +6228,7 @@
             <a:avLst/>
           </a:prstGeom>
           <a:solidFill>
-            <a:srgbClr val="2E7D6B"/>
+            <a:srgbClr val="B23A2A"/>
           </a:solidFill>
           <a:ln>
             <a:noFill/>
@@ -5448,14 +6259,175 @@
       </p:sp>
       <p:sp>
         <p:nvSpPr>
-          <p:cNvPr id="5" name="Rounded Rectangle 4"/>
+          <p:cNvPr id="5" name="TextBox 4"/>
+          <p:cNvSpPr txBox="1"/>
+          <p:nvPr/>
+        </p:nvSpPr>
+        <p:spPr>
+          <a:xfrm>
+            <a:off x="640080" y="1325880"/>
+            <a:ext cx="10515600" cy="640080"/>
+          </a:xfrm>
+          <a:prstGeom prst="rect">
+            <a:avLst/>
+          </a:prstGeom>
+          <a:noFill/>
+        </p:spPr>
+        <p:txBody>
+          <a:bodyPr wrap="square" anchor="t" lIns="0" rIns="0" tIns="0" bIns="0">
+            <a:spAutoFit/>
+          </a:bodyPr>
+          <a:lstStyle/>
+          <a:p>
+            <a:pPr algn="l"/>
+            <a:r>
+              <a:rPr sz="2600" b="1">
+                <a:solidFill>
+                  <a:srgbClr val="1C2A33"/>
+                </a:solidFill>
+                <a:latin typeface="楷体"/>
+                <a:ea typeface="楷体"/>
+                <a:cs typeface="楷体"/>
+              </a:rPr>
+              <a:t>把方法握在手里</a:t>
+            </a:r>
+          </a:p>
+        </p:txBody>
+      </p:sp>
+      <p:sp>
+        <p:nvSpPr>
+          <p:cNvPr id="6" name="Rounded Rectangle 5"/>
           <p:cNvSpPr/>
           <p:nvPr/>
         </p:nvSpPr>
         <p:spPr>
           <a:xfrm>
-            <a:off x="640080" y="1371600"/>
-            <a:ext cx="10911535" cy="685800"/>
+            <a:off x="640080" y="2286000"/>
+            <a:ext cx="2453563" cy="3840480"/>
+          </a:xfrm>
+          <a:prstGeom prst="roundRect">
+            <a:avLst/>
+          </a:prstGeom>
+          <a:solidFill>
+            <a:srgbClr val="FFFFFF"/>
+          </a:solidFill>
+          <a:ln w="22860">
+            <a:solidFill>
+              <a:srgbClr val="B23A2A"/>
+            </a:solidFill>
+          </a:ln>
+          <a:effectLst/>
+        </p:spPr>
+        <p:style>
+          <a:lnRef idx="1">
+            <a:schemeClr val="accent1"/>
+          </a:lnRef>
+          <a:fillRef idx="3">
+            <a:schemeClr val="accent1"/>
+          </a:fillRef>
+          <a:effectRef idx="2">
+            <a:schemeClr val="accent1"/>
+          </a:effectRef>
+          <a:fontRef idx="minor">
+            <a:schemeClr val="lt1"/>
+          </a:fontRef>
+        </p:style>
+        <p:txBody>
+          <a:bodyPr rtlCol="0" anchor="ctr"/>
+          <a:lstStyle/>
+          <a:p>
+            <a:pPr algn="ctr"/>
+          </a:p>
+        </p:txBody>
+      </p:sp>
+      <p:sp>
+        <p:nvSpPr>
+          <p:cNvPr id="7" name="TextBox 6"/>
+          <p:cNvSpPr txBox="1"/>
+          <p:nvPr/>
+        </p:nvSpPr>
+        <p:spPr>
+          <a:xfrm>
+            <a:off x="868680" y="2606040"/>
+            <a:ext cx="1996363" cy="548640"/>
+          </a:xfrm>
+          <a:prstGeom prst="rect">
+            <a:avLst/>
+          </a:prstGeom>
+          <a:noFill/>
+        </p:spPr>
+        <p:txBody>
+          <a:bodyPr wrap="square" anchor="t" lIns="0" rIns="0" tIns="0" bIns="0">
+            <a:spAutoFit/>
+          </a:bodyPr>
+          <a:lstStyle/>
+          <a:p>
+            <a:pPr algn="l"/>
+            <a:r>
+              <a:rPr sz="1900" b="1">
+                <a:solidFill>
+                  <a:srgbClr val="B23A2A"/>
+                </a:solidFill>
+                <a:latin typeface="楷体"/>
+                <a:ea typeface="楷体"/>
+                <a:cs typeface="楷体"/>
+              </a:rPr>
+              <a:t>诵读体会</a:t>
+            </a:r>
+          </a:p>
+        </p:txBody>
+      </p:sp>
+      <p:sp>
+        <p:nvSpPr>
+          <p:cNvPr id="8" name="TextBox 7"/>
+          <p:cNvSpPr txBox="1"/>
+          <p:nvPr/>
+        </p:nvSpPr>
+        <p:spPr>
+          <a:xfrm>
+            <a:off x="868680" y="3337560"/>
+            <a:ext cx="1996363" cy="2560320"/>
+          </a:xfrm>
+          <a:prstGeom prst="rect">
+            <a:avLst/>
+          </a:prstGeom>
+          <a:noFill/>
+        </p:spPr>
+        <p:txBody>
+          <a:bodyPr wrap="square" anchor="t" lIns="0" rIns="0" tIns="0" bIns="0">
+            <a:spAutoFit/>
+          </a:bodyPr>
+          <a:lstStyle/>
+          <a:p>
+            <a:pPr algn="l">
+              <a:lnSpc>
+                <a:spcPct val="155000"/>
+              </a:lnSpc>
+            </a:pPr>
+            <a:r>
+              <a:rPr sz="1300" b="0">
+                <a:solidFill>
+                  <a:srgbClr val="1C2A33"/>
+                </a:solidFill>
+                <a:latin typeface="楷体"/>
+                <a:ea typeface="楷体"/>
+                <a:cs typeface="楷体"/>
+              </a:rPr>
+              <a:t>听范读、练读四字句群（恰—同学少年……），"恰"后稍顿，读出气势与层次。</a:t>
+            </a:r>
+          </a:p>
+        </p:txBody>
+      </p:sp>
+      <p:sp>
+        <p:nvSpPr>
+          <p:cNvPr id="9" name="Rounded Rectangle 8"/>
+          <p:cNvSpPr/>
+          <p:nvPr/>
+        </p:nvSpPr>
+        <p:spPr>
+          <a:xfrm>
+            <a:off x="3459403" y="2286000"/>
+            <a:ext cx="2453563" cy="3840480"/>
           </a:xfrm>
           <a:prstGeom prst="roundRect">
             <a:avLst/>
@@ -5494,23 +6466,103 @@
       </p:sp>
       <p:sp>
         <p:nvSpPr>
-          <p:cNvPr id="6" name="Oval 5"/>
+          <p:cNvPr id="10" name="TextBox 9"/>
+          <p:cNvSpPr txBox="1"/>
+          <p:nvPr/>
+        </p:nvSpPr>
+        <p:spPr>
+          <a:xfrm>
+            <a:off x="3688003" y="2606040"/>
+            <a:ext cx="1996363" cy="548640"/>
+          </a:xfrm>
+          <a:prstGeom prst="rect">
+            <a:avLst/>
+          </a:prstGeom>
+          <a:noFill/>
+        </p:spPr>
+        <p:txBody>
+          <a:bodyPr wrap="square" anchor="t" lIns="0" rIns="0" tIns="0" bIns="0">
+            <a:spAutoFit/>
+          </a:bodyPr>
+          <a:lstStyle/>
+          <a:p>
+            <a:pPr algn="l"/>
+            <a:r>
+              <a:rPr sz="1900" b="1">
+                <a:solidFill>
+                  <a:srgbClr val="2E7D6B"/>
+                </a:solidFill>
+                <a:latin typeface="楷体"/>
+                <a:ea typeface="楷体"/>
+                <a:cs typeface="楷体"/>
+              </a:rPr>
+              <a:t>对照阅读</a:t>
+            </a:r>
+          </a:p>
+        </p:txBody>
+      </p:sp>
+      <p:sp>
+        <p:nvSpPr>
+          <p:cNvPr id="11" name="TextBox 10"/>
+          <p:cNvSpPr txBox="1"/>
+          <p:nvPr/>
+        </p:nvSpPr>
+        <p:spPr>
+          <a:xfrm>
+            <a:off x="3688003" y="3337560"/>
+            <a:ext cx="1996363" cy="2560320"/>
+          </a:xfrm>
+          <a:prstGeom prst="rect">
+            <a:avLst/>
+          </a:prstGeom>
+          <a:noFill/>
+        </p:spPr>
+        <p:txBody>
+          <a:bodyPr wrap="square" anchor="t" lIns="0" rIns="0" tIns="0" bIns="0">
+            <a:spAutoFit/>
+          </a:bodyPr>
+          <a:lstStyle/>
+          <a:p>
+            <a:pPr algn="l">
+              <a:lnSpc>
+                <a:spcPct val="155000"/>
+              </a:lnSpc>
+            </a:pPr>
+            <a:r>
+              <a:rPr sz="1300" b="0">
+                <a:solidFill>
+                  <a:srgbClr val="1C2A33"/>
+                </a:solidFill>
+                <a:latin typeface="楷体"/>
+                <a:ea typeface="楷体"/>
+                <a:cs typeface="楷体"/>
+              </a:rPr>
+              <a:t>上阕"看景" vs 下阕"忆人"，"问" vs "答"，双栏列表并排比较。</a:t>
+            </a:r>
+          </a:p>
+        </p:txBody>
+      </p:sp>
+      <p:sp>
+        <p:nvSpPr>
+          <p:cNvPr id="12" name="Rounded Rectangle 11"/>
           <p:cNvSpPr/>
           <p:nvPr/>
         </p:nvSpPr>
         <p:spPr>
           <a:xfrm>
-            <a:off x="804672" y="1536192"/>
-            <a:ext cx="457200" cy="457200"/>
-          </a:xfrm>
-          <a:prstGeom prst="ellipse">
+            <a:off x="6278727" y="2286000"/>
+            <a:ext cx="2453563" cy="3840480"/>
+          </a:xfrm>
+          <a:prstGeom prst="roundRect">
             <a:avLst/>
           </a:prstGeom>
           <a:solidFill>
-            <a:srgbClr val="2E7D6B"/>
+            <a:srgbClr val="FFFFFF"/>
           </a:solidFill>
-          <a:ln>
-            <a:noFill/>
+          <a:ln w="22860">
+            <a:solidFill>
+              <a:srgbClr val="C8A86B"/>
+            </a:solidFill>
           </a:ln>
           <a:effectLst/>
         </p:spPr>
@@ -5538,14 +6590,14 @@
       </p:sp>
       <p:sp>
         <p:nvSpPr>
-          <p:cNvPr id="7" name="TextBox 6"/>
+          <p:cNvPr id="13" name="TextBox 12"/>
           <p:cNvSpPr txBox="1"/>
           <p:nvPr/>
         </p:nvSpPr>
         <p:spPr>
           <a:xfrm>
-            <a:off x="804672" y="1591056"/>
-            <a:ext cx="457200" cy="384048"/>
+            <a:off x="6507327" y="2606040"/>
+            <a:ext cx="1996363" cy="548640"/>
           </a:xfrm>
           <a:prstGeom prst="rect">
             <a:avLst/>
@@ -5558,31 +6610,31 @@
           </a:bodyPr>
           <a:lstStyle/>
           <a:p>
-            <a:pPr algn="ctr"/>
-            <a:r>
-              <a:rPr sz="1600" b="1">
-                <a:solidFill>
-                  <a:srgbClr val="FFFFFF"/>
-                </a:solidFill>
-                <a:latin typeface="微软雅黑"/>
-                <a:ea typeface="微软雅黑"/>
-                <a:cs typeface="微软雅黑"/>
-              </a:rPr>
-              <a:t>1</a:t>
-            </a:r>
-          </a:p>
-        </p:txBody>
-      </p:sp>
-      <p:sp>
-        <p:nvSpPr>
-          <p:cNvPr id="8" name="TextBox 7"/>
+            <a:pPr algn="l"/>
+            <a:r>
+              <a:rPr sz="1900" b="1">
+                <a:solidFill>
+                  <a:srgbClr val="C8A86B"/>
+                </a:solidFill>
+                <a:latin typeface="楷体"/>
+                <a:ea typeface="楷体"/>
+                <a:cs typeface="楷体"/>
+              </a:rPr>
+              <a:t>比较迁移</a:t>
+            </a:r>
+          </a:p>
+        </p:txBody>
+      </p:sp>
+      <p:sp>
+        <p:nvSpPr>
+          <p:cNvPr id="14" name="TextBox 13"/>
           <p:cNvSpPr txBox="1"/>
           <p:nvPr/>
         </p:nvSpPr>
         <p:spPr>
           <a:xfrm>
-            <a:off x="1371600" y="1481328"/>
-            <a:ext cx="9997135" cy="484632"/>
+            <a:off x="6507327" y="3337560"/>
+            <a:ext cx="1996363" cy="2560320"/>
           </a:xfrm>
           <a:prstGeom prst="rect">
             <a:avLst/>
@@ -5597,33 +6649,33 @@
           <a:p>
             <a:pPr algn="l">
               <a:lnSpc>
-                <a:spcPct val="110000"/>
+                <a:spcPct val="155000"/>
               </a:lnSpc>
             </a:pPr>
             <a:r>
-              <a:rPr sz="1400" b="1">
+              <a:rPr sz="1300" b="0">
                 <a:solidFill>
                   <a:srgbClr val="1C2A33"/>
                 </a:solidFill>
-                <a:latin typeface="微软雅黑"/>
-                <a:ea typeface="微软雅黑"/>
-                <a:cs typeface="微软雅黑"/>
-              </a:rPr>
-              <a:t>Step 1 复习导入 Review</a:t>
-            </a:r>
-          </a:p>
-        </p:txBody>
-      </p:sp>
-      <p:sp>
-        <p:nvSpPr>
-          <p:cNvPr id="9" name="Rounded Rectangle 8"/>
+                <a:latin typeface="楷体"/>
+                <a:ea typeface="楷体"/>
+                <a:cs typeface="楷体"/>
+              </a:rPr>
+              <a:t>联系《沁园春·雪》"数风流人物，还看今朝"，体会同一词牌的"答"法。</a:t>
+            </a:r>
+          </a:p>
+        </p:txBody>
+      </p:sp>
+      <p:sp>
+        <p:nvSpPr>
+          <p:cNvPr id="15" name="Rounded Rectangle 14"/>
           <p:cNvSpPr/>
           <p:nvPr/>
         </p:nvSpPr>
         <p:spPr>
           <a:xfrm>
-            <a:off x="640080" y="2194560"/>
-            <a:ext cx="10911535" cy="685800"/>
+            <a:off x="9098051" y="2286000"/>
+            <a:ext cx="2453563" cy="3840480"/>
           </a:xfrm>
           <a:prstGeom prst="roundRect">
             <a:avLst/>
@@ -5633,7 +6685,7 @@
           </a:solidFill>
           <a:ln w="22860">
             <a:solidFill>
-              <a:srgbClr val="2E7D6B"/>
+              <a:srgbClr val="6B6258"/>
             </a:solidFill>
           </a:ln>
           <a:effectLst/>
@@ -5662,58 +6714,14 @@
       </p:sp>
       <p:sp>
         <p:nvSpPr>
-          <p:cNvPr id="10" name="Oval 9"/>
-          <p:cNvSpPr/>
-          <p:nvPr/>
-        </p:nvSpPr>
-        <p:spPr>
-          <a:xfrm>
-            <a:off x="804672" y="2359152"/>
-            <a:ext cx="457200" cy="457200"/>
-          </a:xfrm>
-          <a:prstGeom prst="ellipse">
-            <a:avLst/>
-          </a:prstGeom>
-          <a:solidFill>
-            <a:srgbClr val="2E7D6B"/>
-          </a:solidFill>
-          <a:ln>
-            <a:noFill/>
-          </a:ln>
-          <a:effectLst/>
-        </p:spPr>
-        <p:style>
-          <a:lnRef idx="1">
-            <a:schemeClr val="accent1"/>
-          </a:lnRef>
-          <a:fillRef idx="3">
-            <a:schemeClr val="accent1"/>
-          </a:fillRef>
-          <a:effectRef idx="2">
-            <a:schemeClr val="accent1"/>
-          </a:effectRef>
-          <a:fontRef idx="minor">
-            <a:schemeClr val="lt1"/>
-          </a:fontRef>
-        </p:style>
-        <p:txBody>
-          <a:bodyPr rtlCol="0" anchor="ctr"/>
-          <a:lstStyle/>
-          <a:p>
-            <a:pPr algn="ctr"/>
-          </a:p>
-        </p:txBody>
-      </p:sp>
-      <p:sp>
-        <p:nvSpPr>
-          <p:cNvPr id="11" name="TextBox 10"/>
+          <p:cNvPr id="16" name="TextBox 15"/>
           <p:cNvSpPr txBox="1"/>
           <p:nvPr/>
         </p:nvSpPr>
         <p:spPr>
           <a:xfrm>
-            <a:off x="804672" y="2414016"/>
-            <a:ext cx="457200" cy="384048"/>
+            <a:off x="9326651" y="2606040"/>
+            <a:ext cx="1996363" cy="548640"/>
           </a:xfrm>
           <a:prstGeom prst="rect">
             <a:avLst/>
@@ -5726,31 +6734,31 @@
           </a:bodyPr>
           <a:lstStyle/>
           <a:p>
-            <a:pPr algn="ctr"/>
-            <a:r>
-              <a:rPr sz="1600" b="1">
-                <a:solidFill>
-                  <a:srgbClr val="FFFFFF"/>
-                </a:solidFill>
-                <a:latin typeface="微软雅黑"/>
-                <a:ea typeface="微软雅黑"/>
-                <a:cs typeface="微软雅黑"/>
-              </a:rPr>
-              <a:t>2</a:t>
-            </a:r>
-          </a:p>
-        </p:txBody>
-      </p:sp>
-      <p:sp>
-        <p:nvSpPr>
-          <p:cNvPr id="12" name="TextBox 11"/>
+            <a:pPr algn="l"/>
+            <a:r>
+              <a:rPr sz="1900" b="1">
+                <a:solidFill>
+                  <a:srgbClr val="6B6258"/>
+                </a:solidFill>
+                <a:latin typeface="楷体"/>
+                <a:ea typeface="楷体"/>
+                <a:cs typeface="楷体"/>
+              </a:rPr>
+              <a:t>情境补白</a:t>
+            </a:r>
+          </a:p>
+        </p:txBody>
+      </p:sp>
+      <p:sp>
+        <p:nvSpPr>
+          <p:cNvPr id="17" name="TextBox 16"/>
           <p:cNvSpPr txBox="1"/>
           <p:nvPr/>
         </p:nvSpPr>
         <p:spPr>
           <a:xfrm>
-            <a:off x="1371600" y="2304288"/>
-            <a:ext cx="9997135" cy="484632"/>
+            <a:off x="9326651" y="3337560"/>
+            <a:ext cx="1996363" cy="2560320"/>
           </a:xfrm>
           <a:prstGeom prst="rect">
             <a:avLst/>
@@ -5765,698 +6773,26 @@
           <a:p>
             <a:pPr algn="l">
               <a:lnSpc>
-                <a:spcPct val="110000"/>
+                <a:spcPct val="155000"/>
               </a:lnSpc>
             </a:pPr>
             <a:r>
-              <a:rPr sz="1600" b="1">
+              <a:rPr sz="1300" b="0">
                 <a:solidFill>
                   <a:srgbClr val="1C2A33"/>
                 </a:solidFill>
-                <a:latin typeface="微软雅黑"/>
-                <a:ea typeface="微软雅黑"/>
-                <a:cs typeface="微软雅黑"/>
-              </a:rPr>
-              <a:t>Step 2 下阕诵读</a:t>
-            </a:r>
-          </a:p>
-        </p:txBody>
-      </p:sp>
-      <p:sp>
-        <p:nvSpPr>
-          <p:cNvPr id="13" name="Rounded Rectangle 12"/>
-          <p:cNvSpPr/>
-          <p:nvPr/>
-        </p:nvSpPr>
-        <p:spPr>
-          <a:xfrm>
-            <a:off x="640080" y="3017520"/>
-            <a:ext cx="10911535" cy="685800"/>
-          </a:xfrm>
-          <a:prstGeom prst="roundRect">
-            <a:avLst/>
-          </a:prstGeom>
-          <a:solidFill>
-            <a:srgbClr val="FFFFFF"/>
-          </a:solidFill>
-          <a:ln w="22860">
-            <a:solidFill>
-              <a:srgbClr val="2E7D6B"/>
-            </a:solidFill>
-          </a:ln>
-          <a:effectLst/>
-        </p:spPr>
-        <p:style>
-          <a:lnRef idx="1">
-            <a:schemeClr val="accent1"/>
-          </a:lnRef>
-          <a:fillRef idx="3">
-            <a:schemeClr val="accent1"/>
-          </a:fillRef>
-          <a:effectRef idx="2">
-            <a:schemeClr val="accent1"/>
-          </a:effectRef>
-          <a:fontRef idx="minor">
-            <a:schemeClr val="lt1"/>
-          </a:fontRef>
-        </p:style>
-        <p:txBody>
-          <a:bodyPr rtlCol="0" anchor="ctr"/>
-          <a:lstStyle/>
-          <a:p>
-            <a:pPr algn="ctr"/>
-          </a:p>
-        </p:txBody>
-      </p:sp>
-      <p:sp>
-        <p:nvSpPr>
-          <p:cNvPr id="14" name="Oval 13"/>
-          <p:cNvSpPr/>
-          <p:nvPr/>
-        </p:nvSpPr>
-        <p:spPr>
-          <a:xfrm>
-            <a:off x="804672" y="3182112"/>
-            <a:ext cx="457200" cy="457200"/>
-          </a:xfrm>
-          <a:prstGeom prst="ellipse">
-            <a:avLst/>
-          </a:prstGeom>
-          <a:solidFill>
-            <a:srgbClr val="2E7D6B"/>
-          </a:solidFill>
-          <a:ln>
-            <a:noFill/>
-          </a:ln>
-          <a:effectLst/>
-        </p:spPr>
-        <p:style>
-          <a:lnRef idx="1">
-            <a:schemeClr val="accent1"/>
-          </a:lnRef>
-          <a:fillRef idx="3">
-            <a:schemeClr val="accent1"/>
-          </a:fillRef>
-          <a:effectRef idx="2">
-            <a:schemeClr val="accent1"/>
-          </a:effectRef>
-          <a:fontRef idx="minor">
-            <a:schemeClr val="lt1"/>
-          </a:fontRef>
-        </p:style>
-        <p:txBody>
-          <a:bodyPr rtlCol="0" anchor="ctr"/>
-          <a:lstStyle/>
-          <a:p>
-            <a:pPr algn="ctr"/>
-          </a:p>
-        </p:txBody>
-      </p:sp>
-      <p:sp>
-        <p:nvSpPr>
-          <p:cNvPr id="15" name="TextBox 14"/>
-          <p:cNvSpPr txBox="1"/>
-          <p:nvPr/>
-        </p:nvSpPr>
-        <p:spPr>
-          <a:xfrm>
-            <a:off x="804672" y="3236976"/>
-            <a:ext cx="457200" cy="384048"/>
-          </a:xfrm>
-          <a:prstGeom prst="rect">
-            <a:avLst/>
-          </a:prstGeom>
-          <a:noFill/>
-        </p:spPr>
-        <p:txBody>
-          <a:bodyPr wrap="square" anchor="t" lIns="0" rIns="0" tIns="0" bIns="0">
-            <a:spAutoFit/>
-          </a:bodyPr>
-          <a:lstStyle/>
-          <a:p>
-            <a:pPr algn="ctr"/>
-            <a:r>
-              <a:rPr sz="1600" b="1">
-                <a:solidFill>
-                  <a:srgbClr val="FFFFFF"/>
-                </a:solidFill>
-                <a:latin typeface="微软雅黑"/>
-                <a:ea typeface="微软雅黑"/>
-                <a:cs typeface="微软雅黑"/>
-              </a:rPr>
-              <a:t>3</a:t>
-            </a:r>
-          </a:p>
-        </p:txBody>
-      </p:sp>
-      <p:sp>
-        <p:nvSpPr>
-          <p:cNvPr id="16" name="TextBox 15"/>
-          <p:cNvSpPr txBox="1"/>
-          <p:nvPr/>
-        </p:nvSpPr>
-        <p:spPr>
-          <a:xfrm>
-            <a:off x="1371600" y="3127248"/>
-            <a:ext cx="9997135" cy="484632"/>
-          </a:xfrm>
-          <a:prstGeom prst="rect">
-            <a:avLst/>
-          </a:prstGeom>
-          <a:noFill/>
-        </p:spPr>
-        <p:txBody>
-          <a:bodyPr wrap="square" anchor="t" lIns="0" rIns="0" tIns="0" bIns="0">
-            <a:spAutoFit/>
-          </a:bodyPr>
-          <a:lstStyle/>
-          <a:p>
-            <a:pPr algn="l">
-              <a:lnSpc>
-                <a:spcPct val="110000"/>
-              </a:lnSpc>
-            </a:pPr>
-            <a:r>
-              <a:rPr sz="1600" b="1">
-                <a:solidFill>
-                  <a:srgbClr val="1C2A33"/>
-                </a:solidFill>
-                <a:latin typeface="微软雅黑"/>
-                <a:ea typeface="微软雅黑"/>
-                <a:cs typeface="微软雅黑"/>
-              </a:rPr>
-              <a:t>Step 3 群像分析</a:t>
-            </a:r>
-          </a:p>
-        </p:txBody>
-      </p:sp>
-      <p:sp>
-        <p:nvSpPr>
-          <p:cNvPr id="17" name="Rounded Rectangle 16"/>
-          <p:cNvSpPr/>
-          <p:nvPr/>
-        </p:nvSpPr>
-        <p:spPr>
-          <a:xfrm>
-            <a:off x="640080" y="3840480"/>
-            <a:ext cx="10911535" cy="685800"/>
-          </a:xfrm>
-          <a:prstGeom prst="roundRect">
-            <a:avLst/>
-          </a:prstGeom>
-          <a:solidFill>
-            <a:srgbClr val="FFFFFF"/>
-          </a:solidFill>
-          <a:ln w="22860">
-            <a:solidFill>
-              <a:srgbClr val="2E7D6B"/>
-            </a:solidFill>
-          </a:ln>
-          <a:effectLst/>
-        </p:spPr>
-        <p:style>
-          <a:lnRef idx="1">
-            <a:schemeClr val="accent1"/>
-          </a:lnRef>
-          <a:fillRef idx="3">
-            <a:schemeClr val="accent1"/>
-          </a:fillRef>
-          <a:effectRef idx="2">
-            <a:schemeClr val="accent1"/>
-          </a:effectRef>
-          <a:fontRef idx="minor">
-            <a:schemeClr val="lt1"/>
-          </a:fontRef>
-        </p:style>
-        <p:txBody>
-          <a:bodyPr rtlCol="0" anchor="ctr"/>
-          <a:lstStyle/>
-          <a:p>
-            <a:pPr algn="ctr"/>
-          </a:p>
-        </p:txBody>
-      </p:sp>
-      <p:sp>
-        <p:nvSpPr>
-          <p:cNvPr id="18" name="Oval 17"/>
-          <p:cNvSpPr/>
-          <p:nvPr/>
-        </p:nvSpPr>
-        <p:spPr>
-          <a:xfrm>
-            <a:off x="804672" y="4005072"/>
-            <a:ext cx="457200" cy="457200"/>
-          </a:xfrm>
-          <a:prstGeom prst="ellipse">
-            <a:avLst/>
-          </a:prstGeom>
-          <a:solidFill>
-            <a:srgbClr val="2E7D6B"/>
-          </a:solidFill>
-          <a:ln>
-            <a:noFill/>
-          </a:ln>
-          <a:effectLst/>
-        </p:spPr>
-        <p:style>
-          <a:lnRef idx="1">
-            <a:schemeClr val="accent1"/>
-          </a:lnRef>
-          <a:fillRef idx="3">
-            <a:schemeClr val="accent1"/>
-          </a:fillRef>
-          <a:effectRef idx="2">
-            <a:schemeClr val="accent1"/>
-          </a:effectRef>
-          <a:fontRef idx="minor">
-            <a:schemeClr val="lt1"/>
-          </a:fontRef>
-        </p:style>
-        <p:txBody>
-          <a:bodyPr rtlCol="0" anchor="ctr"/>
-          <a:lstStyle/>
-          <a:p>
-            <a:pPr algn="ctr"/>
-          </a:p>
-        </p:txBody>
-      </p:sp>
-      <p:sp>
-        <p:nvSpPr>
-          <p:cNvPr id="19" name="TextBox 18"/>
-          <p:cNvSpPr txBox="1"/>
-          <p:nvPr/>
-        </p:nvSpPr>
-        <p:spPr>
-          <a:xfrm>
-            <a:off x="804672" y="4059936"/>
-            <a:ext cx="457200" cy="384048"/>
-          </a:xfrm>
-          <a:prstGeom prst="rect">
-            <a:avLst/>
-          </a:prstGeom>
-          <a:noFill/>
-        </p:spPr>
-        <p:txBody>
-          <a:bodyPr wrap="square" anchor="t" lIns="0" rIns="0" tIns="0" bIns="0">
-            <a:spAutoFit/>
-          </a:bodyPr>
-          <a:lstStyle/>
-          <a:p>
-            <a:pPr algn="ctr"/>
-            <a:r>
-              <a:rPr sz="1600" b="1">
-                <a:solidFill>
-                  <a:srgbClr val="FFFFFF"/>
-                </a:solidFill>
-                <a:latin typeface="微软雅黑"/>
-                <a:ea typeface="微软雅黑"/>
-                <a:cs typeface="微软雅黑"/>
-              </a:rPr>
-              <a:t>4</a:t>
-            </a:r>
-          </a:p>
-        </p:txBody>
-      </p:sp>
-      <p:sp>
-        <p:nvSpPr>
-          <p:cNvPr id="20" name="TextBox 19"/>
-          <p:cNvSpPr txBox="1"/>
-          <p:nvPr/>
-        </p:nvSpPr>
-        <p:spPr>
-          <a:xfrm>
-            <a:off x="1371600" y="3950208"/>
-            <a:ext cx="9997135" cy="484632"/>
-          </a:xfrm>
-          <a:prstGeom prst="rect">
-            <a:avLst/>
-          </a:prstGeom>
-          <a:noFill/>
-        </p:spPr>
-        <p:txBody>
-          <a:bodyPr wrap="square" anchor="t" lIns="0" rIns="0" tIns="0" bIns="0">
-            <a:spAutoFit/>
-          </a:bodyPr>
-          <a:lstStyle/>
-          <a:p>
-            <a:pPr algn="l">
-              <a:lnSpc>
-                <a:spcPct val="110000"/>
-              </a:lnSpc>
-            </a:pPr>
-            <a:r>
-              <a:rPr sz="1400" b="1">
-                <a:solidFill>
-                  <a:srgbClr val="1C2A33"/>
-                </a:solidFill>
-                <a:latin typeface="微软雅黑"/>
-                <a:ea typeface="微软雅黑"/>
-                <a:cs typeface="微软雅黑"/>
-              </a:rPr>
-              <a:t>Step 4 词类活用专题</a:t>
-            </a:r>
-          </a:p>
-        </p:txBody>
-      </p:sp>
-      <p:sp>
-        <p:nvSpPr>
-          <p:cNvPr id="21" name="Rounded Rectangle 20"/>
-          <p:cNvSpPr/>
-          <p:nvPr/>
-        </p:nvSpPr>
-        <p:spPr>
-          <a:xfrm>
-            <a:off x="640080" y="4663440"/>
-            <a:ext cx="10911535" cy="685800"/>
-          </a:xfrm>
-          <a:prstGeom prst="roundRect">
-            <a:avLst/>
-          </a:prstGeom>
-          <a:solidFill>
-            <a:srgbClr val="FFFFFF"/>
-          </a:solidFill>
-          <a:ln w="22860">
-            <a:solidFill>
-              <a:srgbClr val="2E7D6B"/>
-            </a:solidFill>
-          </a:ln>
-          <a:effectLst/>
-        </p:spPr>
-        <p:style>
-          <a:lnRef idx="1">
-            <a:schemeClr val="accent1"/>
-          </a:lnRef>
-          <a:fillRef idx="3">
-            <a:schemeClr val="accent1"/>
-          </a:fillRef>
-          <a:effectRef idx="2">
-            <a:schemeClr val="accent1"/>
-          </a:effectRef>
-          <a:fontRef idx="minor">
-            <a:schemeClr val="lt1"/>
-          </a:fontRef>
-        </p:style>
-        <p:txBody>
-          <a:bodyPr rtlCol="0" anchor="ctr"/>
-          <a:lstStyle/>
-          <a:p>
-            <a:pPr algn="ctr"/>
-          </a:p>
-        </p:txBody>
-      </p:sp>
-      <p:sp>
-        <p:nvSpPr>
-          <p:cNvPr id="22" name="Oval 21"/>
-          <p:cNvSpPr/>
-          <p:nvPr/>
-        </p:nvSpPr>
-        <p:spPr>
-          <a:xfrm>
-            <a:off x="804672" y="4828032"/>
-            <a:ext cx="457200" cy="457200"/>
-          </a:xfrm>
-          <a:prstGeom prst="ellipse">
-            <a:avLst/>
-          </a:prstGeom>
-          <a:solidFill>
-            <a:srgbClr val="2E7D6B"/>
-          </a:solidFill>
-          <a:ln>
-            <a:noFill/>
-          </a:ln>
-          <a:effectLst/>
-        </p:spPr>
-        <p:style>
-          <a:lnRef idx="1">
-            <a:schemeClr val="accent1"/>
-          </a:lnRef>
-          <a:fillRef idx="3">
-            <a:schemeClr val="accent1"/>
-          </a:fillRef>
-          <a:effectRef idx="2">
-            <a:schemeClr val="accent1"/>
-          </a:effectRef>
-          <a:fontRef idx="minor">
-            <a:schemeClr val="lt1"/>
-          </a:fontRef>
-        </p:style>
-        <p:txBody>
-          <a:bodyPr rtlCol="0" anchor="ctr"/>
-          <a:lstStyle/>
-          <a:p>
-            <a:pPr algn="ctr"/>
-          </a:p>
-        </p:txBody>
-      </p:sp>
-      <p:sp>
-        <p:nvSpPr>
-          <p:cNvPr id="23" name="TextBox 22"/>
-          <p:cNvSpPr txBox="1"/>
-          <p:nvPr/>
-        </p:nvSpPr>
-        <p:spPr>
-          <a:xfrm>
-            <a:off x="804672" y="4882896"/>
-            <a:ext cx="457200" cy="384048"/>
-          </a:xfrm>
-          <a:prstGeom prst="rect">
-            <a:avLst/>
-          </a:prstGeom>
-          <a:noFill/>
-        </p:spPr>
-        <p:txBody>
-          <a:bodyPr wrap="square" anchor="t" lIns="0" rIns="0" tIns="0" bIns="0">
-            <a:spAutoFit/>
-          </a:bodyPr>
-          <a:lstStyle/>
-          <a:p>
-            <a:pPr algn="ctr"/>
-            <a:r>
-              <a:rPr sz="1600" b="1">
-                <a:solidFill>
-                  <a:srgbClr val="FFFFFF"/>
-                </a:solidFill>
-                <a:latin typeface="微软雅黑"/>
-                <a:ea typeface="微软雅黑"/>
-                <a:cs typeface="微软雅黑"/>
-              </a:rPr>
-              <a:t>5</a:t>
-            </a:r>
-          </a:p>
-        </p:txBody>
-      </p:sp>
-      <p:sp>
-        <p:nvSpPr>
-          <p:cNvPr id="24" name="TextBox 23"/>
-          <p:cNvSpPr txBox="1"/>
-          <p:nvPr/>
-        </p:nvSpPr>
-        <p:spPr>
-          <a:xfrm>
-            <a:off x="1371600" y="4773168"/>
-            <a:ext cx="9997135" cy="484632"/>
-          </a:xfrm>
-          <a:prstGeom prst="rect">
-            <a:avLst/>
-          </a:prstGeom>
-          <a:noFill/>
-        </p:spPr>
-        <p:txBody>
-          <a:bodyPr wrap="square" anchor="t" lIns="0" rIns="0" tIns="0" bIns="0">
-            <a:spAutoFit/>
-          </a:bodyPr>
-          <a:lstStyle/>
-          <a:p>
-            <a:pPr algn="l">
-              <a:lnSpc>
-                <a:spcPct val="110000"/>
-              </a:lnSpc>
-            </a:pPr>
-            <a:r>
-              <a:rPr sz="1600" b="1">
-                <a:solidFill>
-                  <a:srgbClr val="1C2A33"/>
-                </a:solidFill>
-                <a:latin typeface="微软雅黑"/>
-                <a:ea typeface="微软雅黑"/>
-                <a:cs typeface="微软雅黑"/>
-              </a:rPr>
-              <a:t>Step 5 上下阕对照</a:t>
-            </a:r>
-          </a:p>
-        </p:txBody>
-      </p:sp>
-      <p:sp>
-        <p:nvSpPr>
-          <p:cNvPr id="25" name="Rounded Rectangle 24"/>
-          <p:cNvSpPr/>
-          <p:nvPr/>
-        </p:nvSpPr>
-        <p:spPr>
-          <a:xfrm>
-            <a:off x="640080" y="5486400"/>
-            <a:ext cx="10911535" cy="685800"/>
-          </a:xfrm>
-          <a:prstGeom prst="roundRect">
-            <a:avLst/>
-          </a:prstGeom>
-          <a:solidFill>
-            <a:srgbClr val="FFFFFF"/>
-          </a:solidFill>
-          <a:ln w="22860">
-            <a:solidFill>
-              <a:srgbClr val="2E7D6B"/>
-            </a:solidFill>
-          </a:ln>
-          <a:effectLst/>
-        </p:spPr>
-        <p:style>
-          <a:lnRef idx="1">
-            <a:schemeClr val="accent1"/>
-          </a:lnRef>
-          <a:fillRef idx="3">
-            <a:schemeClr val="accent1"/>
-          </a:fillRef>
-          <a:effectRef idx="2">
-            <a:schemeClr val="accent1"/>
-          </a:effectRef>
-          <a:fontRef idx="minor">
-            <a:schemeClr val="lt1"/>
-          </a:fontRef>
-        </p:style>
-        <p:txBody>
-          <a:bodyPr rtlCol="0" anchor="ctr"/>
-          <a:lstStyle/>
-          <a:p>
-            <a:pPr algn="ctr"/>
-          </a:p>
-        </p:txBody>
-      </p:sp>
-      <p:sp>
-        <p:nvSpPr>
-          <p:cNvPr id="26" name="Oval 25"/>
-          <p:cNvSpPr/>
-          <p:nvPr/>
-        </p:nvSpPr>
-        <p:spPr>
-          <a:xfrm>
-            <a:off x="804672" y="5650992"/>
-            <a:ext cx="457200" cy="457200"/>
-          </a:xfrm>
-          <a:prstGeom prst="ellipse">
-            <a:avLst/>
-          </a:prstGeom>
-          <a:solidFill>
-            <a:srgbClr val="2E7D6B"/>
-          </a:solidFill>
-          <a:ln>
-            <a:noFill/>
-          </a:ln>
-          <a:effectLst/>
-        </p:spPr>
-        <p:style>
-          <a:lnRef idx="1">
-            <a:schemeClr val="accent1"/>
-          </a:lnRef>
-          <a:fillRef idx="3">
-            <a:schemeClr val="accent1"/>
-          </a:fillRef>
-          <a:effectRef idx="2">
-            <a:schemeClr val="accent1"/>
-          </a:effectRef>
-          <a:fontRef idx="minor">
-            <a:schemeClr val="lt1"/>
-          </a:fontRef>
-        </p:style>
-        <p:txBody>
-          <a:bodyPr rtlCol="0" anchor="ctr"/>
-          <a:lstStyle/>
-          <a:p>
-            <a:pPr algn="ctr"/>
-          </a:p>
-        </p:txBody>
-      </p:sp>
-      <p:sp>
-        <p:nvSpPr>
-          <p:cNvPr id="27" name="TextBox 26"/>
-          <p:cNvSpPr txBox="1"/>
-          <p:nvPr/>
-        </p:nvSpPr>
-        <p:spPr>
-          <a:xfrm>
-            <a:off x="804672" y="5705856"/>
-            <a:ext cx="457200" cy="384048"/>
-          </a:xfrm>
-          <a:prstGeom prst="rect">
-            <a:avLst/>
-          </a:prstGeom>
-          <a:noFill/>
-        </p:spPr>
-        <p:txBody>
-          <a:bodyPr wrap="square" anchor="t" lIns="0" rIns="0" tIns="0" bIns="0">
-            <a:spAutoFit/>
-          </a:bodyPr>
-          <a:lstStyle/>
-          <a:p>
-            <a:pPr algn="ctr"/>
-            <a:r>
-              <a:rPr sz="1600" b="1">
-                <a:solidFill>
-                  <a:srgbClr val="FFFFFF"/>
-                </a:solidFill>
-                <a:latin typeface="微软雅黑"/>
-                <a:ea typeface="微软雅黑"/>
-                <a:cs typeface="微软雅黑"/>
-              </a:rPr>
-              <a:t>6</a:t>
-            </a:r>
-          </a:p>
-        </p:txBody>
-      </p:sp>
-      <p:sp>
-        <p:nvSpPr>
-          <p:cNvPr id="28" name="TextBox 27"/>
-          <p:cNvSpPr txBox="1"/>
-          <p:nvPr/>
-        </p:nvSpPr>
-        <p:spPr>
-          <a:xfrm>
-            <a:off x="1371600" y="5596128"/>
-            <a:ext cx="9997135" cy="484632"/>
-          </a:xfrm>
-          <a:prstGeom prst="rect">
-            <a:avLst/>
-          </a:prstGeom>
-          <a:noFill/>
-        </p:spPr>
-        <p:txBody>
-          <a:bodyPr wrap="square" anchor="t" lIns="0" rIns="0" tIns="0" bIns="0">
-            <a:spAutoFit/>
-          </a:bodyPr>
-          <a:lstStyle/>
-          <a:p>
-            <a:pPr algn="l">
-              <a:lnSpc>
-                <a:spcPct val="110000"/>
-              </a:lnSpc>
-            </a:pPr>
-            <a:r>
-              <a:rPr sz="1400" b="1">
-                <a:solidFill>
-                  <a:srgbClr val="1C2A33"/>
-                </a:solidFill>
-                <a:latin typeface="微软雅黑"/>
-                <a:ea typeface="微软雅黑"/>
-                <a:cs typeface="微软雅黑"/>
-              </a:rPr>
-              <a:t>Step 6 比较阅读+小结</a:t>
-            </a:r>
-          </a:p>
-        </p:txBody>
-      </p:sp>
-      <p:sp>
-        <p:nvSpPr>
-          <p:cNvPr id="29" name="TextBox 28"/>
+                <a:latin typeface="楷体"/>
+                <a:ea typeface="楷体"/>
+                <a:cs typeface="楷体"/>
+              </a:rPr>
+              <a:t>了解毛泽东在一师求学（冷水浴、游湘江），读懂"中流击水"的来历。</a:t>
+            </a:r>
+          </a:p>
+        </p:txBody>
+      </p:sp>
+      <p:sp>
+        <p:nvSpPr>
+          <p:cNvPr id="18" name="TextBox 17"/>
           <p:cNvSpPr txBox="1"/>
           <p:nvPr/>
         </p:nvSpPr>
@@ -6589,7 +6925,7 @@
                 <a:ea typeface="微软雅黑"/>
                 <a:cs typeface="微软雅黑"/>
               </a:rPr>
-              <a:t>易混易错</a:t>
+              <a:t>难点 · 怎么破</a:t>
             </a:r>
           </a:p>
         </p:txBody>
@@ -6640,14 +6976,51 @@
       </p:sp>
       <p:sp>
         <p:nvSpPr>
-          <p:cNvPr id="5" name="Rounded Rectangle 4"/>
+          <p:cNvPr id="5" name="TextBox 4"/>
+          <p:cNvSpPr txBox="1"/>
+          <p:nvPr/>
+        </p:nvSpPr>
+        <p:spPr>
+          <a:xfrm>
+            <a:off x="640080" y="1325880"/>
+            <a:ext cx="10058400" cy="640080"/>
+          </a:xfrm>
+          <a:prstGeom prst="rect">
+            <a:avLst/>
+          </a:prstGeom>
+          <a:noFill/>
+        </p:spPr>
+        <p:txBody>
+          <a:bodyPr wrap="square" anchor="t" lIns="0" rIns="0" tIns="0" bIns="0">
+            <a:spAutoFit/>
+          </a:bodyPr>
+          <a:lstStyle/>
+          <a:p>
+            <a:pPr algn="l"/>
+            <a:r>
+              <a:rPr sz="2600" b="1">
+                <a:solidFill>
+                  <a:srgbClr val="1C2A33"/>
+                </a:solidFill>
+                <a:latin typeface="楷体"/>
+                <a:ea typeface="楷体"/>
+                <a:cs typeface="楷体"/>
+              </a:rPr>
+              <a:t>三处容易卡住的地方</a:t>
+            </a:r>
+          </a:p>
+        </p:txBody>
+      </p:sp>
+      <p:sp>
+        <p:nvSpPr>
+          <p:cNvPr id="6" name="Rounded Rectangle 5"/>
           <p:cNvSpPr/>
           <p:nvPr/>
         </p:nvSpPr>
         <p:spPr>
           <a:xfrm>
-            <a:off x="640080" y="1417320"/>
-            <a:ext cx="5349240" cy="2057400"/>
+            <a:off x="640080" y="2194560"/>
+            <a:ext cx="3393338" cy="3931920"/>
           </a:xfrm>
           <a:prstGeom prst="roundRect">
             <a:avLst/>
@@ -6655,7 +7028,7 @@
           <a:solidFill>
             <a:srgbClr val="FFFFFF"/>
           </a:solidFill>
-          <a:ln w="22860">
+          <a:ln w="20320">
             <a:solidFill>
               <a:srgbClr val="B23A2A"/>
             </a:solidFill>
@@ -6686,14 +7059,14 @@
       </p:sp>
       <p:sp>
         <p:nvSpPr>
-          <p:cNvPr id="6" name="Oval 5"/>
+          <p:cNvPr id="7" name="Oval 6"/>
           <p:cNvSpPr/>
           <p:nvPr/>
         </p:nvSpPr>
         <p:spPr>
           <a:xfrm>
-            <a:off x="804672" y="1581912"/>
-            <a:ext cx="457200" cy="457200"/>
+            <a:off x="868680" y="2423160"/>
+            <a:ext cx="548640" cy="548640"/>
           </a:xfrm>
           <a:prstGeom prst="ellipse">
             <a:avLst/>
@@ -6730,14 +7103,14 @@
       </p:sp>
       <p:sp>
         <p:nvSpPr>
-          <p:cNvPr id="7" name="TextBox 6"/>
+          <p:cNvPr id="8" name="TextBox 7"/>
           <p:cNvSpPr txBox="1"/>
           <p:nvPr/>
         </p:nvSpPr>
         <p:spPr>
           <a:xfrm>
-            <a:off x="804672" y="1636776"/>
-            <a:ext cx="457200" cy="384048"/>
+            <a:off x="868680" y="2496312"/>
+            <a:ext cx="548640" cy="411480"/>
           </a:xfrm>
           <a:prstGeom prst="rect">
             <a:avLst/>
@@ -6752,7 +7125,7 @@
           <a:p>
             <a:pPr algn="ctr"/>
             <a:r>
-              <a:rPr sz="1600" b="1">
+              <a:rPr sz="2000" b="1">
                 <a:solidFill>
                   <a:srgbClr val="FFFFFF"/>
                 </a:solidFill>
@@ -6760,21 +7133,21 @@
                 <a:ea typeface="微软雅黑"/>
                 <a:cs typeface="微软雅黑"/>
               </a:rPr>
-              <a:t>!</a:t>
-            </a:r>
-          </a:p>
-        </p:txBody>
-      </p:sp>
-      <p:sp>
-        <p:nvSpPr>
-          <p:cNvPr id="8" name="TextBox 7"/>
+              <a:t>1</a:t>
+            </a:r>
+          </a:p>
+        </p:txBody>
+      </p:sp>
+      <p:sp>
+        <p:nvSpPr>
+          <p:cNvPr id="9" name="TextBox 8"/>
           <p:cNvSpPr txBox="1"/>
           <p:nvPr/>
         </p:nvSpPr>
         <p:spPr>
           <a:xfrm>
-            <a:off x="1371600" y="1527048"/>
-            <a:ext cx="4434840" cy="457200"/>
+            <a:off x="1554480" y="2450592"/>
+            <a:ext cx="2296058" cy="731520"/>
           </a:xfrm>
           <a:prstGeom prst="rect">
             <a:avLst/>
@@ -6789,33 +7162,33 @@
           <a:p>
             <a:pPr algn="l">
               <a:lnSpc>
-                <a:spcPct val="110000"/>
+                <a:spcPct val="130000"/>
               </a:lnSpc>
             </a:pPr>
             <a:r>
-              <a:rPr sz="1600" b="1">
+              <a:rPr sz="1550" b="1">
                 <a:solidFill>
                   <a:srgbClr val="1C2A33"/>
                 </a:solidFill>
-                <a:latin typeface="微软雅黑"/>
-                <a:ea typeface="微软雅黑"/>
-                <a:cs typeface="微软雅黑"/>
-              </a:rPr>
-              <a:t/>
-            </a:r>
-          </a:p>
-        </p:txBody>
-      </p:sp>
-      <p:sp>
-        <p:nvSpPr>
-          <p:cNvPr id="9" name="TextBox 8"/>
+                <a:latin typeface="楷体"/>
+                <a:ea typeface="楷体"/>
+                <a:cs typeface="楷体"/>
+              </a:rPr>
+              <a:t>「粪土」的词类活用</a:t>
+            </a:r>
+          </a:p>
+        </p:txBody>
+      </p:sp>
+      <p:sp>
+        <p:nvSpPr>
+          <p:cNvPr id="10" name="TextBox 9"/>
           <p:cNvSpPr txBox="1"/>
           <p:nvPr/>
         </p:nvSpPr>
         <p:spPr>
           <a:xfrm>
-            <a:off x="1371600" y="1965960"/>
-            <a:ext cx="4434840" cy="1417320"/>
+            <a:off x="914400" y="3246120"/>
+            <a:ext cx="2844698" cy="2743200"/>
           </a:xfrm>
           <a:prstGeom prst="rect">
             <a:avLst/>
@@ -6830,11 +7203,11 @@
           <a:p>
             <a:pPr algn="l">
               <a:lnSpc>
-                <a:spcPct val="128000"/>
+                <a:spcPct val="150000"/>
               </a:lnSpc>
             </a:pPr>
             <a:r>
-              <a:rPr sz="1200" b="0">
+              <a:rPr sz="1350" b="0">
                 <a:solidFill>
                   <a:srgbClr val="1C2A33"/>
                 </a:solidFill>
@@ -6842,21 +7215,21 @@
                 <a:ea typeface="楷体"/>
                 <a:cs typeface="楷体"/>
               </a:rPr>
-              <a:t>① 「粪土」的词类活用。原因：学生习惯现代汉语「粪土=粪便」义，不知此处是名词作意动用法「以……为粪土」，需用例句固化。</a:t>
-            </a:r>
-          </a:p>
-        </p:txBody>
-      </p:sp>
-      <p:sp>
-        <p:nvSpPr>
-          <p:cNvPr id="10" name="Rounded Rectangle 9"/>
+              <a:t>容易当"粪便"讲。→ 名词作意动"以……为粪土"，用"异之""美我"等例句固化。</a:t>
+            </a:r>
+          </a:p>
+        </p:txBody>
+      </p:sp>
+      <p:sp>
+        <p:nvSpPr>
+          <p:cNvPr id="11" name="Rounded Rectangle 10"/>
           <p:cNvSpPr/>
           <p:nvPr/>
         </p:nvSpPr>
         <p:spPr>
           <a:xfrm>
-            <a:off x="6263640" y="1417320"/>
-            <a:ext cx="5349240" cy="2057400"/>
+            <a:off x="4399178" y="2194560"/>
+            <a:ext cx="3393338" cy="3931920"/>
           </a:xfrm>
           <a:prstGeom prst="roundRect">
             <a:avLst/>
@@ -6864,9 +7237,9 @@
           <a:solidFill>
             <a:srgbClr val="FFFFFF"/>
           </a:solidFill>
-          <a:ln w="22860">
+          <a:ln w="20320">
             <a:solidFill>
-              <a:srgbClr val="B23A2A"/>
+              <a:srgbClr val="2E7D6B"/>
             </a:solidFill>
           </a:ln>
           <a:effectLst/>
@@ -6895,20 +7268,20 @@
       </p:sp>
       <p:sp>
         <p:nvSpPr>
-          <p:cNvPr id="11" name="Oval 10"/>
+          <p:cNvPr id="12" name="Oval 11"/>
           <p:cNvSpPr/>
           <p:nvPr/>
         </p:nvSpPr>
         <p:spPr>
           <a:xfrm>
-            <a:off x="6428232" y="1581912"/>
-            <a:ext cx="457200" cy="457200"/>
+            <a:off x="4627778" y="2423160"/>
+            <a:ext cx="548640" cy="548640"/>
           </a:xfrm>
           <a:prstGeom prst="ellipse">
             <a:avLst/>
           </a:prstGeom>
           <a:solidFill>
-            <a:srgbClr val="B23A2A"/>
+            <a:srgbClr val="2E7D6B"/>
           </a:solidFill>
           <a:ln>
             <a:noFill/>
@@ -6939,14 +7312,14 @@
       </p:sp>
       <p:sp>
         <p:nvSpPr>
-          <p:cNvPr id="12" name="TextBox 11"/>
+          <p:cNvPr id="13" name="TextBox 12"/>
           <p:cNvSpPr txBox="1"/>
           <p:nvPr/>
         </p:nvSpPr>
         <p:spPr>
           <a:xfrm>
-            <a:off x="6428232" y="1636776"/>
-            <a:ext cx="457200" cy="384048"/>
+            <a:off x="4627778" y="2496312"/>
+            <a:ext cx="548640" cy="411480"/>
           </a:xfrm>
           <a:prstGeom prst="rect">
             <a:avLst/>
@@ -6961,7 +7334,7 @@
           <a:p>
             <a:pPr algn="ctr"/>
             <a:r>
-              <a:rPr sz="1600" b="1">
+              <a:rPr sz="2000" b="1">
                 <a:solidFill>
                   <a:srgbClr val="FFFFFF"/>
                 </a:solidFill>
@@ -6969,21 +7342,21 @@
                 <a:ea typeface="微软雅黑"/>
                 <a:cs typeface="微软雅黑"/>
               </a:rPr>
-              <a:t>!</a:t>
-            </a:r>
-          </a:p>
-        </p:txBody>
-      </p:sp>
-      <p:sp>
-        <p:nvSpPr>
-          <p:cNvPr id="13" name="TextBox 12"/>
+              <a:t>2</a:t>
+            </a:r>
+          </a:p>
+        </p:txBody>
+      </p:sp>
+      <p:sp>
+        <p:nvSpPr>
+          <p:cNvPr id="14" name="TextBox 13"/>
           <p:cNvSpPr txBox="1"/>
           <p:nvPr/>
         </p:nvSpPr>
         <p:spPr>
           <a:xfrm>
-            <a:off x="6995160" y="1527048"/>
-            <a:ext cx="4434840" cy="457200"/>
+            <a:off x="5313578" y="2450592"/>
+            <a:ext cx="2296058" cy="731520"/>
           </a:xfrm>
           <a:prstGeom prst="rect">
             <a:avLst/>
@@ -6998,33 +7371,33 @@
           <a:p>
             <a:pPr algn="l">
               <a:lnSpc>
-                <a:spcPct val="110000"/>
+                <a:spcPct val="130000"/>
               </a:lnSpc>
             </a:pPr>
             <a:r>
-              <a:rPr sz="1600" b="1">
+              <a:rPr sz="1550" b="1">
                 <a:solidFill>
                   <a:srgbClr val="1C2A33"/>
                 </a:solidFill>
-                <a:latin typeface="微软雅黑"/>
-                <a:ea typeface="微软雅黑"/>
-                <a:cs typeface="微软雅黑"/>
-              </a:rPr>
-              <a:t/>
-            </a:r>
-          </a:p>
-        </p:txBody>
-      </p:sp>
-      <p:sp>
-        <p:nvSpPr>
-          <p:cNvPr id="14" name="TextBox 13"/>
+                <a:latin typeface="楷体"/>
+                <a:ea typeface="楷体"/>
+                <a:cs typeface="楷体"/>
+              </a:rPr>
+              <a:t>「浪遏飞舟」的象征义</a:t>
+            </a:r>
+          </a:p>
+        </p:txBody>
+      </p:sp>
+      <p:sp>
+        <p:nvSpPr>
+          <p:cNvPr id="15" name="TextBox 14"/>
           <p:cNvSpPr txBox="1"/>
           <p:nvPr/>
         </p:nvSpPr>
         <p:spPr>
           <a:xfrm>
-            <a:off x="6995160" y="1965960"/>
-            <a:ext cx="4434840" cy="1417320"/>
+            <a:off x="4673498" y="3246120"/>
+            <a:ext cx="2844698" cy="2743200"/>
           </a:xfrm>
           <a:prstGeom prst="rect">
             <a:avLst/>
@@ -7039,11 +7412,11 @@
           <a:p>
             <a:pPr algn="l">
               <a:lnSpc>
-                <a:spcPct val="128000"/>
+                <a:spcPct val="150000"/>
               </a:lnSpc>
             </a:pPr>
             <a:r>
-              <a:rPr sz="1100" b="0">
+              <a:rPr sz="1350" b="0">
                 <a:solidFill>
                   <a:srgbClr val="1C2A33"/>
                 </a:solidFill>
@@ -7051,21 +7424,21 @@
                 <a:ea typeface="楷体"/>
                 <a:cs typeface="楷体"/>
               </a:rPr>
-              <a:t>② 「浪遏飞舟」的象征义。原因：字面是「浪大挡住飞舟」，象征义是「革命青年敢于搏击风浪、主宰命运」，学生易停在字面，需引导推导。</a:t>
-            </a:r>
-          </a:p>
-        </p:txBody>
-      </p:sp>
-      <p:sp>
-        <p:nvSpPr>
-          <p:cNvPr id="15" name="Rounded Rectangle 14"/>
+              <a:t>容易停在字面"浪大挡舟"。→ 推导为"青年搏击风浪、主宰命运"的豪情。</a:t>
+            </a:r>
+          </a:p>
+        </p:txBody>
+      </p:sp>
+      <p:sp>
+        <p:nvSpPr>
+          <p:cNvPr id="16" name="Rounded Rectangle 15"/>
           <p:cNvSpPr/>
           <p:nvPr/>
         </p:nvSpPr>
         <p:spPr>
           <a:xfrm>
-            <a:off x="640080" y="3703320"/>
-            <a:ext cx="5349240" cy="2057400"/>
+            <a:off x="8158276" y="2194560"/>
+            <a:ext cx="3393338" cy="3931920"/>
           </a:xfrm>
           <a:prstGeom prst="roundRect">
             <a:avLst/>
@@ -7073,9 +7446,9 @@
           <a:solidFill>
             <a:srgbClr val="FFFFFF"/>
           </a:solidFill>
-          <a:ln w="22860">
+          <a:ln w="20320">
             <a:solidFill>
-              <a:srgbClr val="B23A2A"/>
+              <a:srgbClr val="C8A86B"/>
             </a:solidFill>
           </a:ln>
           <a:effectLst/>
@@ -7104,20 +7477,20 @@
       </p:sp>
       <p:sp>
         <p:nvSpPr>
-          <p:cNvPr id="16" name="Oval 15"/>
+          <p:cNvPr id="17" name="Oval 16"/>
           <p:cNvSpPr/>
           <p:nvPr/>
         </p:nvSpPr>
         <p:spPr>
           <a:xfrm>
-            <a:off x="804672" y="3867912"/>
-            <a:ext cx="457200" cy="457200"/>
+            <a:off x="8386876" y="2423160"/>
+            <a:ext cx="548640" cy="548640"/>
           </a:xfrm>
           <a:prstGeom prst="ellipse">
             <a:avLst/>
           </a:prstGeom>
           <a:solidFill>
-            <a:srgbClr val="B23A2A"/>
+            <a:srgbClr val="C8A86B"/>
           </a:solidFill>
           <a:ln>
             <a:noFill/>
@@ -7148,14 +7521,14 @@
       </p:sp>
       <p:sp>
         <p:nvSpPr>
-          <p:cNvPr id="17" name="TextBox 16"/>
+          <p:cNvPr id="18" name="TextBox 17"/>
           <p:cNvSpPr txBox="1"/>
           <p:nvPr/>
         </p:nvSpPr>
         <p:spPr>
           <a:xfrm>
-            <a:off x="804672" y="3922776"/>
-            <a:ext cx="457200" cy="384048"/>
+            <a:off x="8386876" y="2496312"/>
+            <a:ext cx="548640" cy="411480"/>
           </a:xfrm>
           <a:prstGeom prst="rect">
             <a:avLst/>
@@ -7170,7 +7543,7 @@
           <a:p>
             <a:pPr algn="ctr"/>
             <a:r>
-              <a:rPr sz="1600" b="1">
+              <a:rPr sz="2000" b="1">
                 <a:solidFill>
                   <a:srgbClr val="FFFFFF"/>
                 </a:solidFill>
@@ -7178,21 +7551,21 @@
                 <a:ea typeface="微软雅黑"/>
                 <a:cs typeface="微软雅黑"/>
               </a:rPr>
-              <a:t>!</a:t>
-            </a:r>
-          </a:p>
-        </p:txBody>
-      </p:sp>
-      <p:sp>
-        <p:nvSpPr>
-          <p:cNvPr id="18" name="TextBox 17"/>
+              <a:t>3</a:t>
+            </a:r>
+          </a:p>
+        </p:txBody>
+      </p:sp>
+      <p:sp>
+        <p:nvSpPr>
+          <p:cNvPr id="19" name="TextBox 18"/>
           <p:cNvSpPr txBox="1"/>
           <p:nvPr/>
         </p:nvSpPr>
         <p:spPr>
           <a:xfrm>
-            <a:off x="1371600" y="3813048"/>
-            <a:ext cx="4434840" cy="457200"/>
+            <a:off x="9072676" y="2450592"/>
+            <a:ext cx="2296058" cy="731520"/>
           </a:xfrm>
           <a:prstGeom prst="rect">
             <a:avLst/>
@@ -7207,33 +7580,33 @@
           <a:p>
             <a:pPr algn="l">
               <a:lnSpc>
-                <a:spcPct val="110000"/>
+                <a:spcPct val="130000"/>
               </a:lnSpc>
             </a:pPr>
             <a:r>
-              <a:rPr sz="1600" b="1">
+              <a:rPr sz="1550" b="1">
                 <a:solidFill>
                   <a:srgbClr val="1C2A33"/>
                 </a:solidFill>
-                <a:latin typeface="微软雅黑"/>
-                <a:ea typeface="微软雅黑"/>
-                <a:cs typeface="微软雅黑"/>
-              </a:rPr>
-              <a:t/>
-            </a:r>
-          </a:p>
-        </p:txBody>
-      </p:sp>
-      <p:sp>
-        <p:nvSpPr>
-          <p:cNvPr id="19" name="TextBox 18"/>
+                <a:latin typeface="楷体"/>
+                <a:ea typeface="楷体"/>
+                <a:cs typeface="楷体"/>
+              </a:rPr>
+              <a:t>四字句的朗读节奏</a:t>
+            </a:r>
+          </a:p>
+        </p:txBody>
+      </p:sp>
+      <p:sp>
+        <p:nvSpPr>
+          <p:cNvPr id="20" name="TextBox 19"/>
           <p:cNvSpPr txBox="1"/>
           <p:nvPr/>
         </p:nvSpPr>
         <p:spPr>
           <a:xfrm>
-            <a:off x="1371600" y="4251960"/>
-            <a:ext cx="4434840" cy="1417320"/>
+            <a:off x="8432596" y="3246120"/>
+            <a:ext cx="2844698" cy="2743200"/>
           </a:xfrm>
           <a:prstGeom prst="rect">
             <a:avLst/>
@@ -7248,11 +7621,11 @@
           <a:p>
             <a:pPr algn="l">
               <a:lnSpc>
-                <a:spcPct val="128000"/>
+                <a:spcPct val="150000"/>
               </a:lnSpc>
             </a:pPr>
             <a:r>
-              <a:rPr sz="1200" b="0">
+              <a:rPr sz="1350" b="0">
                 <a:solidFill>
                   <a:srgbClr val="1C2A33"/>
                 </a:solidFill>
@@ -7260,14 +7633,14 @@
                 <a:ea typeface="楷体"/>
                 <a:cs typeface="楷体"/>
               </a:rPr>
-              <a:t>③ 四字句的朗读节奏。原因：「风华正茂」「书生意气」等四字句密集，学生易读成2-2停顿而忽略语意连贯，需示范。</a:t>
-            </a:r>
-          </a:p>
-        </p:txBody>
-      </p:sp>
-      <p:sp>
-        <p:nvSpPr>
-          <p:cNvPr id="20" name="TextBox 19"/>
+              <a:t>容易读成 2-2 停顿。→ 示范"恰│同学少年│风华正茂"，语速渐快、力度渐强。</a:t>
+            </a:r>
+          </a:p>
+        </p:txBody>
+      </p:sp>
+      <p:sp>
+        <p:nvSpPr>
+          <p:cNvPr id="21" name="TextBox 20"/>
           <p:cNvSpPr txBox="1"/>
           <p:nvPr/>
         </p:nvSpPr>
@@ -7394,13 +7767,13 @@
             <a:r>
               <a:rPr sz="1300" b="1">
                 <a:solidFill>
-                  <a:srgbClr val="C8A86B"/>
+                  <a:srgbClr val="B23A2A"/>
                 </a:solidFill>
                 <a:latin typeface="微软雅黑"/>
                 <a:ea typeface="微软雅黑"/>
                 <a:cs typeface="微软雅黑"/>
               </a:rPr>
-              <a:t>要点板书</a:t>
+              <a:t>板书精华 · 下阕</a:t>
             </a:r>
           </a:p>
         </p:txBody>
@@ -7420,7 +7793,7 @@
             <a:avLst/>
           </a:prstGeom>
           <a:solidFill>
-            <a:srgbClr val="C8A86B"/>
+            <a:srgbClr val="B23A2A"/>
           </a:solidFill>
           <a:ln>
             <a:noFill/>
@@ -7457,20 +7830,15 @@
         </p:nvSpPr>
         <p:spPr>
           <a:xfrm>
-            <a:off x="640080" y="1417320"/>
-            <a:ext cx="10911535" cy="5394960"/>
+            <a:off x="640080" y="1737360"/>
+            <a:ext cx="10911535" cy="502920"/>
           </a:xfrm>
           <a:prstGeom prst="roundRect">
             <a:avLst/>
           </a:prstGeom>
           <a:solidFill>
-            <a:srgbClr val="FFFFFF"/>
+            <a:srgbClr val="1C2A33"/>
           </a:solidFill>
-          <a:ln w="25400">
-            <a:solidFill>
-              <a:srgbClr val="C8A86B"/>
-            </a:solidFill>
-          </a:ln>
           <a:effectLst/>
         </p:spPr>
         <p:style>
@@ -7503,8 +7871,8 @@
         </p:nvSpPr>
         <p:spPr>
           <a:xfrm>
-            <a:off x="914400" y="1554480"/>
-            <a:ext cx="10362895" cy="5120640"/>
+            <a:off x="914400" y="1810512"/>
+            <a:ext cx="3108960" cy="365760"/>
           </a:xfrm>
           <a:prstGeom prst="rect">
             <a:avLst/>
@@ -7517,47 +7885,17 @@
           </a:bodyPr>
           <a:lstStyle/>
           <a:p>
-            <a:pPr algn="l">
-              <a:lnSpc>
-                <a:spcPct val="110000"/>
-              </a:lnSpc>
-              <a:spcAft>
-                <a:spcPts val="100"/>
-              </a:spcAft>
-            </a:pPr>
-            <a:r>
-              <a:rPr sz="1300" b="0">
-                <a:solidFill>
-                  <a:srgbClr val="1C2A33"/>
+            <a:pPr algn="l"/>
+            <a:r>
+              <a:rPr sz="1500" b="1">
+                <a:solidFill>
+                  <a:srgbClr val="FFFFFF"/>
                 </a:solidFill>
                 <a:latin typeface="微软雅黑"/>
                 <a:ea typeface="微软雅黑"/>
                 <a:cs typeface="微软雅黑"/>
               </a:rPr>
-              <a:t>┌── 沁园春·长沙（下）──┐
-│ 谁主沉浮？ → 答！ │
-│ │
-│ 【下阕结构】 │
-│ 忆→恰→到 │
-│ (领) (群像) (设问作答) │
-│ │
-│ 【同学少年群像表】 │
-│ 风华正茂 | 才华横溢 │
-│ 书生意气 | 意气风发 │
-│ 指点江山 | 关心国事 │
-│ 激扬文字 | 敢于批判 │
-│ 粪土万户侯| 蔑视权贵 │
-│ │
-│ 【意动用法】 │
-│ 粪土→以…为粪土 │
-│ 异→以…为异 │
-│ 美→以…为美 │
-│ │
-│ 【上下阕对照】 │
-│ 上:看景→问沉浮 │
-│ 下:忆人→答击水 │
-│ 雪:数风流人物还看今朝 │
-└────────────────────────┘</a:t>
+              <a:t>板块</a:t>
             </a:r>
           </a:p>
         </p:txBody>
@@ -7565,6 +7903,763 @@
       <p:sp>
         <p:nvSpPr>
           <p:cNvPr id="7" name="TextBox 6"/>
+          <p:cNvSpPr txBox="1"/>
+          <p:nvPr/>
+        </p:nvSpPr>
+        <p:spPr>
+          <a:xfrm>
+            <a:off x="4297680" y="1810512"/>
+            <a:ext cx="7680960" cy="365760"/>
+          </a:xfrm>
+          <a:prstGeom prst="rect">
+            <a:avLst/>
+          </a:prstGeom>
+          <a:noFill/>
+        </p:spPr>
+        <p:txBody>
+          <a:bodyPr wrap="square" anchor="t" lIns="0" rIns="0" tIns="0" bIns="0">
+            <a:spAutoFit/>
+          </a:bodyPr>
+          <a:lstStyle/>
+          <a:p>
+            <a:pPr algn="l"/>
+            <a:r>
+              <a:rPr sz="1500" b="1">
+                <a:solidFill>
+                  <a:srgbClr val="C8A86B"/>
+                </a:solidFill>
+                <a:latin typeface="微软雅黑"/>
+                <a:ea typeface="微软雅黑"/>
+                <a:cs typeface="微软雅黑"/>
+              </a:rPr>
+              <a:t>内容</a:t>
+            </a:r>
+          </a:p>
+        </p:txBody>
+      </p:sp>
+      <p:sp>
+        <p:nvSpPr>
+          <p:cNvPr id="8" name="Rounded Rectangle 7"/>
+          <p:cNvSpPr/>
+          <p:nvPr/>
+        </p:nvSpPr>
+        <p:spPr>
+          <a:xfrm>
+            <a:off x="640080" y="2331720"/>
+            <a:ext cx="10911535" cy="530352"/>
+          </a:xfrm>
+          <a:prstGeom prst="roundRect">
+            <a:avLst/>
+          </a:prstGeom>
+          <a:solidFill>
+            <a:srgbClr val="FFFFFF"/>
+          </a:solidFill>
+          <a:ln w="10160">
+            <a:solidFill>
+              <a:srgbClr val="6B6258"/>
+            </a:solidFill>
+          </a:ln>
+          <a:effectLst/>
+        </p:spPr>
+        <p:style>
+          <a:lnRef idx="1">
+            <a:schemeClr val="accent1"/>
+          </a:lnRef>
+          <a:fillRef idx="3">
+            <a:schemeClr val="accent1"/>
+          </a:fillRef>
+          <a:effectRef idx="2">
+            <a:schemeClr val="accent1"/>
+          </a:effectRef>
+          <a:fontRef idx="minor">
+            <a:schemeClr val="lt1"/>
+          </a:fontRef>
+        </p:style>
+        <p:txBody>
+          <a:bodyPr rtlCol="0" anchor="ctr"/>
+          <a:lstStyle/>
+          <a:p>
+            <a:pPr algn="ctr"/>
+          </a:p>
+        </p:txBody>
+      </p:sp>
+      <p:sp>
+        <p:nvSpPr>
+          <p:cNvPr id="9" name="TextBox 8"/>
+          <p:cNvSpPr txBox="1"/>
+          <p:nvPr/>
+        </p:nvSpPr>
+        <p:spPr>
+          <a:xfrm>
+            <a:off x="914400" y="2423160"/>
+            <a:ext cx="3108960" cy="365760"/>
+          </a:xfrm>
+          <a:prstGeom prst="rect">
+            <a:avLst/>
+          </a:prstGeom>
+          <a:noFill/>
+        </p:spPr>
+        <p:txBody>
+          <a:bodyPr wrap="square" anchor="t" lIns="0" rIns="0" tIns="0" bIns="0">
+            <a:spAutoFit/>
+          </a:bodyPr>
+          <a:lstStyle/>
+          <a:p>
+            <a:pPr algn="l"/>
+            <a:r>
+              <a:rPr sz="1400" b="1">
+                <a:solidFill>
+                  <a:srgbClr val="B23A2A"/>
+                </a:solidFill>
+                <a:latin typeface="微软雅黑"/>
+                <a:ea typeface="微软雅黑"/>
+                <a:cs typeface="微软雅黑"/>
+              </a:rPr>
+              <a:t>下阕结构</a:t>
+            </a:r>
+          </a:p>
+        </p:txBody>
+      </p:sp>
+      <p:sp>
+        <p:nvSpPr>
+          <p:cNvPr id="10" name="TextBox 9"/>
+          <p:cNvSpPr txBox="1"/>
+          <p:nvPr/>
+        </p:nvSpPr>
+        <p:spPr>
+          <a:xfrm>
+            <a:off x="4297680" y="2423160"/>
+            <a:ext cx="7680960" cy="365760"/>
+          </a:xfrm>
+          <a:prstGeom prst="rect">
+            <a:avLst/>
+          </a:prstGeom>
+          <a:noFill/>
+        </p:spPr>
+        <p:txBody>
+          <a:bodyPr wrap="square" anchor="t" lIns="0" rIns="0" tIns="0" bIns="0">
+            <a:spAutoFit/>
+          </a:bodyPr>
+          <a:lstStyle/>
+          <a:p>
+            <a:pPr algn="l"/>
+            <a:r>
+              <a:rPr sz="1250" b="0">
+                <a:solidFill>
+                  <a:srgbClr val="1C2A33"/>
+                </a:solidFill>
+                <a:latin typeface="楷体"/>
+                <a:ea typeface="楷体"/>
+                <a:cs typeface="楷体"/>
+              </a:rPr>
+              <a:t>忆 → 恰 → 到（领字 / 群像 / 设问作答）</a:t>
+            </a:r>
+          </a:p>
+        </p:txBody>
+      </p:sp>
+      <p:sp>
+        <p:nvSpPr>
+          <p:cNvPr id="11" name="Rounded Rectangle 10"/>
+          <p:cNvSpPr/>
+          <p:nvPr/>
+        </p:nvSpPr>
+        <p:spPr>
+          <a:xfrm>
+            <a:off x="640080" y="2916936"/>
+            <a:ext cx="10911535" cy="530352"/>
+          </a:xfrm>
+          <a:prstGeom prst="roundRect">
+            <a:avLst/>
+          </a:prstGeom>
+          <a:solidFill>
+            <a:srgbClr val="E7DFD2"/>
+          </a:solidFill>
+          <a:ln w="10160">
+            <a:solidFill>
+              <a:srgbClr val="6B6258"/>
+            </a:solidFill>
+          </a:ln>
+          <a:effectLst/>
+        </p:spPr>
+        <p:style>
+          <a:lnRef idx="1">
+            <a:schemeClr val="accent1"/>
+          </a:lnRef>
+          <a:fillRef idx="3">
+            <a:schemeClr val="accent1"/>
+          </a:fillRef>
+          <a:effectRef idx="2">
+            <a:schemeClr val="accent1"/>
+          </a:effectRef>
+          <a:fontRef idx="minor">
+            <a:schemeClr val="lt1"/>
+          </a:fontRef>
+        </p:style>
+        <p:txBody>
+          <a:bodyPr rtlCol="0" anchor="ctr"/>
+          <a:lstStyle/>
+          <a:p>
+            <a:pPr algn="ctr"/>
+          </a:p>
+        </p:txBody>
+      </p:sp>
+      <p:sp>
+        <p:nvSpPr>
+          <p:cNvPr id="12" name="TextBox 11"/>
+          <p:cNvSpPr txBox="1"/>
+          <p:nvPr/>
+        </p:nvSpPr>
+        <p:spPr>
+          <a:xfrm>
+            <a:off x="914400" y="3008376"/>
+            <a:ext cx="3108960" cy="365760"/>
+          </a:xfrm>
+          <a:prstGeom prst="rect">
+            <a:avLst/>
+          </a:prstGeom>
+          <a:noFill/>
+        </p:spPr>
+        <p:txBody>
+          <a:bodyPr wrap="square" anchor="t" lIns="0" rIns="0" tIns="0" bIns="0">
+            <a:spAutoFit/>
+          </a:bodyPr>
+          <a:lstStyle/>
+          <a:p>
+            <a:pPr algn="l"/>
+            <a:r>
+              <a:rPr sz="1400" b="1">
+                <a:solidFill>
+                  <a:srgbClr val="2E7D6B"/>
+                </a:solidFill>
+                <a:latin typeface="微软雅黑"/>
+                <a:ea typeface="微软雅黑"/>
+                <a:cs typeface="微软雅黑"/>
+              </a:rPr>
+              <a:t>同学少年群像</a:t>
+            </a:r>
+          </a:p>
+        </p:txBody>
+      </p:sp>
+      <p:sp>
+        <p:nvSpPr>
+          <p:cNvPr id="13" name="TextBox 12"/>
+          <p:cNvSpPr txBox="1"/>
+          <p:nvPr/>
+        </p:nvSpPr>
+        <p:spPr>
+          <a:xfrm>
+            <a:off x="4297680" y="3008376"/>
+            <a:ext cx="7680960" cy="365760"/>
+          </a:xfrm>
+          <a:prstGeom prst="rect">
+            <a:avLst/>
+          </a:prstGeom>
+          <a:noFill/>
+        </p:spPr>
+        <p:txBody>
+          <a:bodyPr wrap="square" anchor="t" lIns="0" rIns="0" tIns="0" bIns="0">
+            <a:spAutoFit/>
+          </a:bodyPr>
+          <a:lstStyle/>
+          <a:p>
+            <a:pPr algn="l"/>
+            <a:r>
+              <a:rPr sz="1250" b="0">
+                <a:solidFill>
+                  <a:srgbClr val="1C2A33"/>
+                </a:solidFill>
+                <a:latin typeface="楷体"/>
+                <a:ea typeface="楷体"/>
+                <a:cs typeface="楷体"/>
+              </a:rPr>
+              <a:t>风华正茂|才华横溢　书生意气|意气风发　指点江山|关心国事</a:t>
+            </a:r>
+          </a:p>
+        </p:txBody>
+      </p:sp>
+      <p:sp>
+        <p:nvSpPr>
+          <p:cNvPr id="14" name="Rounded Rectangle 13"/>
+          <p:cNvSpPr/>
+          <p:nvPr/>
+        </p:nvSpPr>
+        <p:spPr>
+          <a:xfrm>
+            <a:off x="640080" y="3502152"/>
+            <a:ext cx="10911535" cy="530352"/>
+          </a:xfrm>
+          <a:prstGeom prst="roundRect">
+            <a:avLst/>
+          </a:prstGeom>
+          <a:solidFill>
+            <a:srgbClr val="FFFFFF"/>
+          </a:solidFill>
+          <a:ln w="10160">
+            <a:solidFill>
+              <a:srgbClr val="6B6258"/>
+            </a:solidFill>
+          </a:ln>
+          <a:effectLst/>
+        </p:spPr>
+        <p:style>
+          <a:lnRef idx="1">
+            <a:schemeClr val="accent1"/>
+          </a:lnRef>
+          <a:fillRef idx="3">
+            <a:schemeClr val="accent1"/>
+          </a:fillRef>
+          <a:effectRef idx="2">
+            <a:schemeClr val="accent1"/>
+          </a:effectRef>
+          <a:fontRef idx="minor">
+            <a:schemeClr val="lt1"/>
+          </a:fontRef>
+        </p:style>
+        <p:txBody>
+          <a:bodyPr rtlCol="0" anchor="ctr"/>
+          <a:lstStyle/>
+          <a:p>
+            <a:pPr algn="ctr"/>
+          </a:p>
+        </p:txBody>
+      </p:sp>
+      <p:sp>
+        <p:nvSpPr>
+          <p:cNvPr id="15" name="TextBox 14"/>
+          <p:cNvSpPr txBox="1"/>
+          <p:nvPr/>
+        </p:nvSpPr>
+        <p:spPr>
+          <a:xfrm>
+            <a:off x="914400" y="3593592"/>
+            <a:ext cx="3108960" cy="365760"/>
+          </a:xfrm>
+          <a:prstGeom prst="rect">
+            <a:avLst/>
+          </a:prstGeom>
+          <a:noFill/>
+        </p:spPr>
+        <p:txBody>
+          <a:bodyPr wrap="square" anchor="t" lIns="0" rIns="0" tIns="0" bIns="0">
+            <a:spAutoFit/>
+          </a:bodyPr>
+          <a:lstStyle/>
+          <a:p>
+            <a:pPr algn="l"/>
+            <a:r>
+              <a:rPr sz="1400" b="1">
+                <a:solidFill>
+                  <a:srgbClr val="C8A86B"/>
+                </a:solidFill>
+                <a:latin typeface="微软雅黑"/>
+                <a:ea typeface="微软雅黑"/>
+                <a:cs typeface="微软雅黑"/>
+              </a:rPr>
+              <a:t>群像（续）</a:t>
+            </a:r>
+          </a:p>
+        </p:txBody>
+      </p:sp>
+      <p:sp>
+        <p:nvSpPr>
+          <p:cNvPr id="16" name="TextBox 15"/>
+          <p:cNvSpPr txBox="1"/>
+          <p:nvPr/>
+        </p:nvSpPr>
+        <p:spPr>
+          <a:xfrm>
+            <a:off x="4297680" y="3593592"/>
+            <a:ext cx="7680960" cy="365760"/>
+          </a:xfrm>
+          <a:prstGeom prst="rect">
+            <a:avLst/>
+          </a:prstGeom>
+          <a:noFill/>
+        </p:spPr>
+        <p:txBody>
+          <a:bodyPr wrap="square" anchor="t" lIns="0" rIns="0" tIns="0" bIns="0">
+            <a:spAutoFit/>
+          </a:bodyPr>
+          <a:lstStyle/>
+          <a:p>
+            <a:pPr algn="l"/>
+            <a:r>
+              <a:rPr sz="1250" b="0">
+                <a:solidFill>
+                  <a:srgbClr val="1C2A33"/>
+                </a:solidFill>
+                <a:latin typeface="楷体"/>
+                <a:ea typeface="楷体"/>
+                <a:cs typeface="楷体"/>
+              </a:rPr>
+              <a:t>激扬文字|敢于批判　粪土万户侯|蔑视权贵</a:t>
+            </a:r>
+          </a:p>
+        </p:txBody>
+      </p:sp>
+      <p:sp>
+        <p:nvSpPr>
+          <p:cNvPr id="17" name="Rounded Rectangle 16"/>
+          <p:cNvSpPr/>
+          <p:nvPr/>
+        </p:nvSpPr>
+        <p:spPr>
+          <a:xfrm>
+            <a:off x="640080" y="4087368"/>
+            <a:ext cx="10911535" cy="530352"/>
+          </a:xfrm>
+          <a:prstGeom prst="roundRect">
+            <a:avLst/>
+          </a:prstGeom>
+          <a:solidFill>
+            <a:srgbClr val="E7DFD2"/>
+          </a:solidFill>
+          <a:ln w="10160">
+            <a:solidFill>
+              <a:srgbClr val="6B6258"/>
+            </a:solidFill>
+          </a:ln>
+          <a:effectLst/>
+        </p:spPr>
+        <p:style>
+          <a:lnRef idx="1">
+            <a:schemeClr val="accent1"/>
+          </a:lnRef>
+          <a:fillRef idx="3">
+            <a:schemeClr val="accent1"/>
+          </a:fillRef>
+          <a:effectRef idx="2">
+            <a:schemeClr val="accent1"/>
+          </a:effectRef>
+          <a:fontRef idx="minor">
+            <a:schemeClr val="lt1"/>
+          </a:fontRef>
+        </p:style>
+        <p:txBody>
+          <a:bodyPr rtlCol="0" anchor="ctr"/>
+          <a:lstStyle/>
+          <a:p>
+            <a:pPr algn="ctr"/>
+          </a:p>
+        </p:txBody>
+      </p:sp>
+      <p:sp>
+        <p:nvSpPr>
+          <p:cNvPr id="18" name="TextBox 17"/>
+          <p:cNvSpPr txBox="1"/>
+          <p:nvPr/>
+        </p:nvSpPr>
+        <p:spPr>
+          <a:xfrm>
+            <a:off x="914400" y="4178808"/>
+            <a:ext cx="3108960" cy="365760"/>
+          </a:xfrm>
+          <a:prstGeom prst="rect">
+            <a:avLst/>
+          </a:prstGeom>
+          <a:noFill/>
+        </p:spPr>
+        <p:txBody>
+          <a:bodyPr wrap="square" anchor="t" lIns="0" rIns="0" tIns="0" bIns="0">
+            <a:spAutoFit/>
+          </a:bodyPr>
+          <a:lstStyle/>
+          <a:p>
+            <a:pPr algn="l"/>
+            <a:r>
+              <a:rPr sz="1400" b="1">
+                <a:solidFill>
+                  <a:srgbClr val="B23A2A"/>
+                </a:solidFill>
+                <a:latin typeface="微软雅黑"/>
+                <a:ea typeface="微软雅黑"/>
+                <a:cs typeface="微软雅黑"/>
+              </a:rPr>
+              <a:t>意动用法</a:t>
+            </a:r>
+          </a:p>
+        </p:txBody>
+      </p:sp>
+      <p:sp>
+        <p:nvSpPr>
+          <p:cNvPr id="19" name="TextBox 18"/>
+          <p:cNvSpPr txBox="1"/>
+          <p:nvPr/>
+        </p:nvSpPr>
+        <p:spPr>
+          <a:xfrm>
+            <a:off x="4297680" y="4178808"/>
+            <a:ext cx="7680960" cy="365760"/>
+          </a:xfrm>
+          <a:prstGeom prst="rect">
+            <a:avLst/>
+          </a:prstGeom>
+          <a:noFill/>
+        </p:spPr>
+        <p:txBody>
+          <a:bodyPr wrap="square" anchor="t" lIns="0" rIns="0" tIns="0" bIns="0">
+            <a:spAutoFit/>
+          </a:bodyPr>
+          <a:lstStyle/>
+          <a:p>
+            <a:pPr algn="l"/>
+            <a:r>
+              <a:rPr sz="1250" b="0">
+                <a:solidFill>
+                  <a:srgbClr val="1C2A33"/>
+                </a:solidFill>
+                <a:latin typeface="楷体"/>
+                <a:ea typeface="楷体"/>
+                <a:cs typeface="楷体"/>
+              </a:rPr>
+              <a:t>粪土→以…为粪土　异→以…为异　美→以…为美</a:t>
+            </a:r>
+          </a:p>
+        </p:txBody>
+      </p:sp>
+      <p:sp>
+        <p:nvSpPr>
+          <p:cNvPr id="20" name="Rounded Rectangle 19"/>
+          <p:cNvSpPr/>
+          <p:nvPr/>
+        </p:nvSpPr>
+        <p:spPr>
+          <a:xfrm>
+            <a:off x="640080" y="4672584"/>
+            <a:ext cx="10911535" cy="530352"/>
+          </a:xfrm>
+          <a:prstGeom prst="roundRect">
+            <a:avLst/>
+          </a:prstGeom>
+          <a:solidFill>
+            <a:srgbClr val="FFFFFF"/>
+          </a:solidFill>
+          <a:ln w="10160">
+            <a:solidFill>
+              <a:srgbClr val="6B6258"/>
+            </a:solidFill>
+          </a:ln>
+          <a:effectLst/>
+        </p:spPr>
+        <p:style>
+          <a:lnRef idx="1">
+            <a:schemeClr val="accent1"/>
+          </a:lnRef>
+          <a:fillRef idx="3">
+            <a:schemeClr val="accent1"/>
+          </a:fillRef>
+          <a:effectRef idx="2">
+            <a:schemeClr val="accent1"/>
+          </a:effectRef>
+          <a:fontRef idx="minor">
+            <a:schemeClr val="lt1"/>
+          </a:fontRef>
+        </p:style>
+        <p:txBody>
+          <a:bodyPr rtlCol="0" anchor="ctr"/>
+          <a:lstStyle/>
+          <a:p>
+            <a:pPr algn="ctr"/>
+          </a:p>
+        </p:txBody>
+      </p:sp>
+      <p:sp>
+        <p:nvSpPr>
+          <p:cNvPr id="21" name="TextBox 20"/>
+          <p:cNvSpPr txBox="1"/>
+          <p:nvPr/>
+        </p:nvSpPr>
+        <p:spPr>
+          <a:xfrm>
+            <a:off x="914400" y="4764024"/>
+            <a:ext cx="3108960" cy="365760"/>
+          </a:xfrm>
+          <a:prstGeom prst="rect">
+            <a:avLst/>
+          </a:prstGeom>
+          <a:noFill/>
+        </p:spPr>
+        <p:txBody>
+          <a:bodyPr wrap="square" anchor="t" lIns="0" rIns="0" tIns="0" bIns="0">
+            <a:spAutoFit/>
+          </a:bodyPr>
+          <a:lstStyle/>
+          <a:p>
+            <a:pPr algn="l"/>
+            <a:r>
+              <a:rPr sz="1400" b="1">
+                <a:solidFill>
+                  <a:srgbClr val="2E7D6B"/>
+                </a:solidFill>
+                <a:latin typeface="微软雅黑"/>
+                <a:ea typeface="微软雅黑"/>
+                <a:cs typeface="微软雅黑"/>
+              </a:rPr>
+              <a:t>上下阕对照</a:t>
+            </a:r>
+          </a:p>
+        </p:txBody>
+      </p:sp>
+      <p:sp>
+        <p:nvSpPr>
+          <p:cNvPr id="22" name="TextBox 21"/>
+          <p:cNvSpPr txBox="1"/>
+          <p:nvPr/>
+        </p:nvSpPr>
+        <p:spPr>
+          <a:xfrm>
+            <a:off x="4297680" y="4764024"/>
+            <a:ext cx="7680960" cy="365760"/>
+          </a:xfrm>
+          <a:prstGeom prst="rect">
+            <a:avLst/>
+          </a:prstGeom>
+          <a:noFill/>
+        </p:spPr>
+        <p:txBody>
+          <a:bodyPr wrap="square" anchor="t" lIns="0" rIns="0" tIns="0" bIns="0">
+            <a:spAutoFit/>
+          </a:bodyPr>
+          <a:lstStyle/>
+          <a:p>
+            <a:pPr algn="l"/>
+            <a:r>
+              <a:rPr sz="1250" b="0">
+                <a:solidFill>
+                  <a:srgbClr val="1C2A33"/>
+                </a:solidFill>
+                <a:latin typeface="楷体"/>
+                <a:ea typeface="楷体"/>
+                <a:cs typeface="楷体"/>
+              </a:rPr>
+              <a:t>上：看景→问沉浮　｜　下：忆人→答击水</a:t>
+            </a:r>
+          </a:p>
+        </p:txBody>
+      </p:sp>
+      <p:sp>
+        <p:nvSpPr>
+          <p:cNvPr id="23" name="Rounded Rectangle 22"/>
+          <p:cNvSpPr/>
+          <p:nvPr/>
+        </p:nvSpPr>
+        <p:spPr>
+          <a:xfrm>
+            <a:off x="640080" y="5257800"/>
+            <a:ext cx="10911535" cy="530352"/>
+          </a:xfrm>
+          <a:prstGeom prst="roundRect">
+            <a:avLst/>
+          </a:prstGeom>
+          <a:solidFill>
+            <a:srgbClr val="E7DFD2"/>
+          </a:solidFill>
+          <a:ln w="10160">
+            <a:solidFill>
+              <a:srgbClr val="6B6258"/>
+            </a:solidFill>
+          </a:ln>
+          <a:effectLst/>
+        </p:spPr>
+        <p:style>
+          <a:lnRef idx="1">
+            <a:schemeClr val="accent1"/>
+          </a:lnRef>
+          <a:fillRef idx="3">
+            <a:schemeClr val="accent1"/>
+          </a:fillRef>
+          <a:effectRef idx="2">
+            <a:schemeClr val="accent1"/>
+          </a:effectRef>
+          <a:fontRef idx="minor">
+            <a:schemeClr val="lt1"/>
+          </a:fontRef>
+        </p:style>
+        <p:txBody>
+          <a:bodyPr rtlCol="0" anchor="ctr"/>
+          <a:lstStyle/>
+          <a:p>
+            <a:pPr algn="ctr"/>
+          </a:p>
+        </p:txBody>
+      </p:sp>
+      <p:sp>
+        <p:nvSpPr>
+          <p:cNvPr id="24" name="TextBox 23"/>
+          <p:cNvSpPr txBox="1"/>
+          <p:nvPr/>
+        </p:nvSpPr>
+        <p:spPr>
+          <a:xfrm>
+            <a:off x="914400" y="5349240"/>
+            <a:ext cx="3108960" cy="365760"/>
+          </a:xfrm>
+          <a:prstGeom prst="rect">
+            <a:avLst/>
+          </a:prstGeom>
+          <a:noFill/>
+        </p:spPr>
+        <p:txBody>
+          <a:bodyPr wrap="square" anchor="t" lIns="0" rIns="0" tIns="0" bIns="0">
+            <a:spAutoFit/>
+          </a:bodyPr>
+          <a:lstStyle/>
+          <a:p>
+            <a:pPr algn="l"/>
+            <a:r>
+              <a:rPr sz="1400" b="1">
+                <a:solidFill>
+                  <a:srgbClr val="C8A86B"/>
+                </a:solidFill>
+                <a:latin typeface="微软雅黑"/>
+                <a:ea typeface="微软雅黑"/>
+                <a:cs typeface="微软雅黑"/>
+              </a:rPr>
+              <a:t>读词一得</a:t>
+            </a:r>
+          </a:p>
+        </p:txBody>
+      </p:sp>
+      <p:sp>
+        <p:nvSpPr>
+          <p:cNvPr id="25" name="TextBox 24"/>
+          <p:cNvSpPr txBox="1"/>
+          <p:nvPr/>
+        </p:nvSpPr>
+        <p:spPr>
+          <a:xfrm>
+            <a:off x="4297680" y="5349240"/>
+            <a:ext cx="7680960" cy="365760"/>
+          </a:xfrm>
+          <a:prstGeom prst="rect">
+            <a:avLst/>
+          </a:prstGeom>
+          <a:noFill/>
+        </p:spPr>
+        <p:txBody>
+          <a:bodyPr wrap="square" anchor="t" lIns="0" rIns="0" tIns="0" bIns="0">
+            <a:spAutoFit/>
+          </a:bodyPr>
+          <a:lstStyle/>
+          <a:p>
+            <a:pPr algn="l"/>
+            <a:r>
+              <a:rPr sz="1250" b="0">
+                <a:solidFill>
+                  <a:srgbClr val="1C2A33"/>
+                </a:solidFill>
+                <a:latin typeface="楷体"/>
+                <a:ea typeface="楷体"/>
+                <a:cs typeface="楷体"/>
+              </a:rPr>
+              <a:t>问—忆—答：上阕设问，下阕作答，结构浑然一体</a:t>
+            </a:r>
+          </a:p>
+        </p:txBody>
+      </p:sp>
+      <p:sp>
+        <p:nvSpPr>
+          <p:cNvPr id="26" name="TextBox 25"/>
           <p:cNvSpPr txBox="1"/>
           <p:nvPr/>
         </p:nvSpPr>
@@ -7691,13 +8786,13 @@
             <a:r>
               <a:rPr sz="1300" b="1">
                 <a:solidFill>
-                  <a:srgbClr val="2E7D6B"/>
+                  <a:srgbClr val="B23A2A"/>
                 </a:solidFill>
                 <a:latin typeface="微软雅黑"/>
                 <a:ea typeface="微软雅黑"/>
                 <a:cs typeface="微软雅黑"/>
               </a:rPr>
-              <a:t>分层作业</a:t>
+              <a:t>作业 · 分层</a:t>
             </a:r>
           </a:p>
         </p:txBody>
@@ -7712,6 +8807,301 @@
           <a:xfrm>
             <a:off x="640080" y="1097280"/>
             <a:ext cx="822960" cy="30480"/>
+          </a:xfrm>
+          <a:prstGeom prst="rect">
+            <a:avLst/>
+          </a:prstGeom>
+          <a:solidFill>
+            <a:srgbClr val="B23A2A"/>
+          </a:solidFill>
+          <a:ln>
+            <a:noFill/>
+          </a:ln>
+          <a:effectLst/>
+        </p:spPr>
+        <p:style>
+          <a:lnRef idx="1">
+            <a:schemeClr val="accent1"/>
+          </a:lnRef>
+          <a:fillRef idx="3">
+            <a:schemeClr val="accent1"/>
+          </a:fillRef>
+          <a:effectRef idx="2">
+            <a:schemeClr val="accent1"/>
+          </a:effectRef>
+          <a:fontRef idx="minor">
+            <a:schemeClr val="lt1"/>
+          </a:fontRef>
+        </p:style>
+        <p:txBody>
+          <a:bodyPr rtlCol="0" anchor="ctr"/>
+          <a:lstStyle/>
+          <a:p>
+            <a:pPr algn="ctr"/>
+          </a:p>
+        </p:txBody>
+      </p:sp>
+      <p:sp>
+        <p:nvSpPr>
+          <p:cNvPr id="5" name="TextBox 4"/>
+          <p:cNvSpPr txBox="1"/>
+          <p:nvPr/>
+        </p:nvSpPr>
+        <p:spPr>
+          <a:xfrm>
+            <a:off x="640080" y="1325880"/>
+            <a:ext cx="10058400" cy="640080"/>
+          </a:xfrm>
+          <a:prstGeom prst="rect">
+            <a:avLst/>
+          </a:prstGeom>
+          <a:noFill/>
+        </p:spPr>
+        <p:txBody>
+          <a:bodyPr wrap="square" anchor="t" lIns="0" rIns="0" tIns="0" bIns="0">
+            <a:spAutoFit/>
+          </a:bodyPr>
+          <a:lstStyle/>
+          <a:p>
+            <a:pPr algn="l"/>
+            <a:r>
+              <a:rPr sz="2600" b="1">
+                <a:solidFill>
+                  <a:srgbClr val="1C2A33"/>
+                </a:solidFill>
+                <a:latin typeface="楷体"/>
+                <a:ea typeface="楷体"/>
+                <a:cs typeface="楷体"/>
+              </a:rPr>
+              <a:t>基础 · 提升 · 衔接</a:t>
+            </a:r>
+          </a:p>
+        </p:txBody>
+      </p:sp>
+      <p:sp>
+        <p:nvSpPr>
+          <p:cNvPr id="6" name="Rounded Rectangle 5"/>
+          <p:cNvSpPr/>
+          <p:nvPr/>
+        </p:nvSpPr>
+        <p:spPr>
+          <a:xfrm>
+            <a:off x="640080" y="2194560"/>
+            <a:ext cx="3393338" cy="3383280"/>
+          </a:xfrm>
+          <a:prstGeom prst="roundRect">
+            <a:avLst/>
+          </a:prstGeom>
+          <a:solidFill>
+            <a:srgbClr val="FFFFFF"/>
+          </a:solidFill>
+          <a:ln w="20320">
+            <a:solidFill>
+              <a:srgbClr val="B23A2A"/>
+            </a:solidFill>
+          </a:ln>
+          <a:effectLst/>
+        </p:spPr>
+        <p:style>
+          <a:lnRef idx="1">
+            <a:schemeClr val="accent1"/>
+          </a:lnRef>
+          <a:fillRef idx="3">
+            <a:schemeClr val="accent1"/>
+          </a:fillRef>
+          <a:effectRef idx="2">
+            <a:schemeClr val="accent1"/>
+          </a:effectRef>
+          <a:fontRef idx="minor">
+            <a:schemeClr val="lt1"/>
+          </a:fontRef>
+        </p:style>
+        <p:txBody>
+          <a:bodyPr rtlCol="0" anchor="ctr"/>
+          <a:lstStyle/>
+          <a:p>
+            <a:pPr algn="ctr"/>
+          </a:p>
+        </p:txBody>
+      </p:sp>
+      <p:sp>
+        <p:nvSpPr>
+          <p:cNvPr id="7" name="Rectangle 6"/>
+          <p:cNvSpPr/>
+          <p:nvPr/>
+        </p:nvSpPr>
+        <p:spPr>
+          <a:xfrm>
+            <a:off x="640080" y="2194560"/>
+            <a:ext cx="3393338" cy="548640"/>
+          </a:xfrm>
+          <a:prstGeom prst="rect">
+            <a:avLst/>
+          </a:prstGeom>
+          <a:solidFill>
+            <a:srgbClr val="B23A2A"/>
+          </a:solidFill>
+          <a:ln>
+            <a:noFill/>
+          </a:ln>
+          <a:effectLst/>
+        </p:spPr>
+        <p:style>
+          <a:lnRef idx="1">
+            <a:schemeClr val="accent1"/>
+          </a:lnRef>
+          <a:fillRef idx="3">
+            <a:schemeClr val="accent1"/>
+          </a:fillRef>
+          <a:effectRef idx="2">
+            <a:schemeClr val="accent1"/>
+          </a:effectRef>
+          <a:fontRef idx="minor">
+            <a:schemeClr val="lt1"/>
+          </a:fontRef>
+        </p:style>
+        <p:txBody>
+          <a:bodyPr rtlCol="0" anchor="ctr"/>
+          <a:lstStyle/>
+          <a:p>
+            <a:pPr algn="ctr"/>
+          </a:p>
+        </p:txBody>
+      </p:sp>
+      <p:sp>
+        <p:nvSpPr>
+          <p:cNvPr id="8" name="TextBox 7"/>
+          <p:cNvSpPr txBox="1"/>
+          <p:nvPr/>
+        </p:nvSpPr>
+        <p:spPr>
+          <a:xfrm>
+            <a:off x="640080" y="2304288"/>
+            <a:ext cx="3393338" cy="365760"/>
+          </a:xfrm>
+          <a:prstGeom prst="rect">
+            <a:avLst/>
+          </a:prstGeom>
+          <a:noFill/>
+        </p:spPr>
+        <p:txBody>
+          <a:bodyPr wrap="square" anchor="t" lIns="0" rIns="0" tIns="0" bIns="0">
+            <a:spAutoFit/>
+          </a:bodyPr>
+          <a:lstStyle/>
+          <a:p>
+            <a:pPr algn="ctr"/>
+            <a:r>
+              <a:rPr sz="1600" b="1">
+                <a:solidFill>
+                  <a:srgbClr val="FFFFFF"/>
+                </a:solidFill>
+                <a:latin typeface="微软雅黑"/>
+                <a:ea typeface="微软雅黑"/>
+                <a:cs typeface="微软雅黑"/>
+              </a:rPr>
+              <a:t>基础 · 必做</a:t>
+            </a:r>
+          </a:p>
+        </p:txBody>
+      </p:sp>
+      <p:sp>
+        <p:nvSpPr>
+          <p:cNvPr id="9" name="TextBox 8"/>
+          <p:cNvSpPr txBox="1"/>
+          <p:nvPr/>
+        </p:nvSpPr>
+        <p:spPr>
+          <a:xfrm>
+            <a:off x="914400" y="2971800"/>
+            <a:ext cx="2844698" cy="2468880"/>
+          </a:xfrm>
+          <a:prstGeom prst="rect">
+            <a:avLst/>
+          </a:prstGeom>
+          <a:noFill/>
+        </p:spPr>
+        <p:txBody>
+          <a:bodyPr wrap="square" anchor="t" lIns="0" rIns="0" tIns="0" bIns="0">
+            <a:spAutoFit/>
+          </a:bodyPr>
+          <a:lstStyle/>
+          <a:p>
+            <a:pPr algn="l">
+              <a:lnSpc>
+                <a:spcPct val="155000"/>
+              </a:lnSpc>
+            </a:pPr>
+            <a:r>
+              <a:rPr sz="1350" b="0">
+                <a:solidFill>
+                  <a:srgbClr val="1C2A33"/>
+                </a:solidFill>
+                <a:latin typeface="楷体"/>
+                <a:ea typeface="楷体"/>
+                <a:cs typeface="楷体"/>
+              </a:rPr>
+              <a:t>① 背诵并默写全词（含下阕），书写规范、标点正确。② 解释词语在句中的含义与用法：粪土 / 挥斥方遒 / 中流击水。</a:t>
+            </a:r>
+          </a:p>
+        </p:txBody>
+      </p:sp>
+      <p:sp>
+        <p:nvSpPr>
+          <p:cNvPr id="10" name="Rounded Rectangle 9"/>
+          <p:cNvSpPr/>
+          <p:nvPr/>
+        </p:nvSpPr>
+        <p:spPr>
+          <a:xfrm>
+            <a:off x="4399178" y="2194560"/>
+            <a:ext cx="3393338" cy="3383280"/>
+          </a:xfrm>
+          <a:prstGeom prst="roundRect">
+            <a:avLst/>
+          </a:prstGeom>
+          <a:solidFill>
+            <a:srgbClr val="FFFFFF"/>
+          </a:solidFill>
+          <a:ln w="20320">
+            <a:solidFill>
+              <a:srgbClr val="2E7D6B"/>
+            </a:solidFill>
+          </a:ln>
+          <a:effectLst/>
+        </p:spPr>
+        <p:style>
+          <a:lnRef idx="1">
+            <a:schemeClr val="accent1"/>
+          </a:lnRef>
+          <a:fillRef idx="3">
+            <a:schemeClr val="accent1"/>
+          </a:fillRef>
+          <a:effectRef idx="2">
+            <a:schemeClr val="accent1"/>
+          </a:effectRef>
+          <a:fontRef idx="minor">
+            <a:schemeClr val="lt1"/>
+          </a:fontRef>
+        </p:style>
+        <p:txBody>
+          <a:bodyPr rtlCol="0" anchor="ctr"/>
+          <a:lstStyle/>
+          <a:p>
+            <a:pPr algn="ctr"/>
+          </a:p>
+        </p:txBody>
+      </p:sp>
+      <p:sp>
+        <p:nvSpPr>
+          <p:cNvPr id="11" name="Rectangle 10"/>
+          <p:cNvSpPr/>
+          <p:nvPr/>
+        </p:nvSpPr>
+        <p:spPr>
+          <a:xfrm>
+            <a:off x="4399178" y="2194560"/>
+            <a:ext cx="3393338" cy="548640"/>
           </a:xfrm>
           <a:prstGeom prst="rect">
             <a:avLst/>
@@ -7748,14 +9138,92 @@
       </p:sp>
       <p:sp>
         <p:nvSpPr>
-          <p:cNvPr id="5" name="Rounded Rectangle 4"/>
+          <p:cNvPr id="12" name="TextBox 11"/>
+          <p:cNvSpPr txBox="1"/>
+          <p:nvPr/>
+        </p:nvSpPr>
+        <p:spPr>
+          <a:xfrm>
+            <a:off x="4399178" y="2304288"/>
+            <a:ext cx="3393338" cy="365760"/>
+          </a:xfrm>
+          <a:prstGeom prst="rect">
+            <a:avLst/>
+          </a:prstGeom>
+          <a:noFill/>
+        </p:spPr>
+        <p:txBody>
+          <a:bodyPr wrap="square" anchor="t" lIns="0" rIns="0" tIns="0" bIns="0">
+            <a:spAutoFit/>
+          </a:bodyPr>
+          <a:lstStyle/>
+          <a:p>
+            <a:pPr algn="ctr"/>
+            <a:r>
+              <a:rPr sz="1600" b="1">
+                <a:solidFill>
+                  <a:srgbClr val="FFFFFF"/>
+                </a:solidFill>
+                <a:latin typeface="微软雅黑"/>
+                <a:ea typeface="微软雅黑"/>
+                <a:cs typeface="微软雅黑"/>
+              </a:rPr>
+              <a:t>提升 · 选做</a:t>
+            </a:r>
+          </a:p>
+        </p:txBody>
+      </p:sp>
+      <p:sp>
+        <p:nvSpPr>
+          <p:cNvPr id="13" name="TextBox 12"/>
+          <p:cNvSpPr txBox="1"/>
+          <p:nvPr/>
+        </p:nvSpPr>
+        <p:spPr>
+          <a:xfrm>
+            <a:off x="4673498" y="2971800"/>
+            <a:ext cx="2844698" cy="2468880"/>
+          </a:xfrm>
+          <a:prstGeom prst="rect">
+            <a:avLst/>
+          </a:prstGeom>
+          <a:noFill/>
+        </p:spPr>
+        <p:txBody>
+          <a:bodyPr wrap="square" anchor="t" lIns="0" rIns="0" tIns="0" bIns="0">
+            <a:spAutoFit/>
+          </a:bodyPr>
+          <a:lstStyle/>
+          <a:p>
+            <a:pPr algn="l">
+              <a:lnSpc>
+                <a:spcPct val="155000"/>
+              </a:lnSpc>
+            </a:pPr>
+            <a:r>
+              <a:rPr sz="1350" b="0">
+                <a:solidFill>
+                  <a:srgbClr val="1C2A33"/>
+                </a:solidFill>
+                <a:latin typeface="楷体"/>
+                <a:ea typeface="楷体"/>
+                <a:cs typeface="楷体"/>
+              </a:rPr>
+              <a:t>写一段 200 字赏析，主题"从上下阕的问与答看青年毛泽东的担当精神"：①引原文 ②点明结构呼应 ③联系当代青年。</a:t>
+            </a:r>
+          </a:p>
+        </p:txBody>
+      </p:sp>
+      <p:sp>
+        <p:nvSpPr>
+          <p:cNvPr id="14" name="Rounded Rectangle 13"/>
           <p:cNvSpPr/>
           <p:nvPr/>
         </p:nvSpPr>
         <p:spPr>
           <a:xfrm>
-            <a:off x="640080" y="1417320"/>
-            <a:ext cx="10911535" cy="1417320"/>
+            <a:off x="8158276" y="2194560"/>
+            <a:ext cx="3393338" cy="3383280"/>
           </a:xfrm>
           <a:prstGeom prst="roundRect">
             <a:avLst/>
@@ -7763,9 +9231,9 @@
           <a:solidFill>
             <a:srgbClr val="FFFFFF"/>
           </a:solidFill>
-          <a:ln w="22860">
+          <a:ln w="20320">
             <a:solidFill>
-              <a:srgbClr val="2E7D6B"/>
+              <a:srgbClr val="C8A86B"/>
             </a:solidFill>
           </a:ln>
           <a:effectLst/>
@@ -7794,107 +9262,23 @@
       </p:sp>
       <p:sp>
         <p:nvSpPr>
-          <p:cNvPr id="6" name="TextBox 5"/>
-          <p:cNvSpPr txBox="1"/>
-          <p:nvPr/>
-        </p:nvSpPr>
-        <p:spPr>
-          <a:xfrm>
-            <a:off x="1371600" y="1527048"/>
-            <a:ext cx="9997135" cy="457200"/>
-          </a:xfrm>
-          <a:prstGeom prst="rect">
-            <a:avLst/>
-          </a:prstGeom>
-          <a:noFill/>
-        </p:spPr>
-        <p:txBody>
-          <a:bodyPr wrap="square" anchor="t" lIns="0" rIns="0" tIns="0" bIns="0">
-            <a:spAutoFit/>
-          </a:bodyPr>
-          <a:lstStyle/>
-          <a:p>
-            <a:pPr algn="l">
-              <a:lnSpc>
-                <a:spcPct val="110000"/>
-              </a:lnSpc>
-            </a:pPr>
-            <a:r>
-              <a:rPr sz="1600" b="1">
-                <a:solidFill>
-                  <a:srgbClr val="1C2A33"/>
-                </a:solidFill>
-                <a:latin typeface="微软雅黑"/>
-                <a:ea typeface="微软雅黑"/>
-                <a:cs typeface="微软雅黑"/>
-              </a:rPr>
-              <a:t/>
-            </a:r>
-          </a:p>
-        </p:txBody>
-      </p:sp>
-      <p:sp>
-        <p:nvSpPr>
-          <p:cNvPr id="7" name="TextBox 6"/>
-          <p:cNvSpPr txBox="1"/>
-          <p:nvPr/>
-        </p:nvSpPr>
-        <p:spPr>
-          <a:xfrm>
-            <a:off x="1371600" y="1965960"/>
-            <a:ext cx="9997135" cy="777240"/>
-          </a:xfrm>
-          <a:prstGeom prst="rect">
-            <a:avLst/>
-          </a:prstGeom>
-          <a:noFill/>
-        </p:spPr>
-        <p:txBody>
-          <a:bodyPr wrap="square" anchor="t" lIns="0" rIns="0" tIns="0" bIns="0">
-            <a:spAutoFit/>
-          </a:bodyPr>
-          <a:lstStyle/>
-          <a:p>
-            <a:pPr algn="l">
-              <a:lnSpc>
-                <a:spcPct val="128000"/>
-              </a:lnSpc>
-            </a:pPr>
-            <a:r>
-              <a:rPr sz="1200" b="0">
-                <a:solidFill>
-                  <a:srgbClr val="1C2A33"/>
-                </a:solidFill>
-                <a:latin typeface="楷体"/>
-                <a:ea typeface="楷体"/>
-                <a:cs typeface="楷体"/>
-              </a:rPr>
-              <a:t>【基础作业】1. 背诵默写《沁园春·长沙》全词。2. 解释下列词语在句中的含义：①粪土 ②挥斥方遒 ③中流击水。</a:t>
-            </a:r>
-          </a:p>
-        </p:txBody>
-      </p:sp>
-      <p:sp>
-        <p:nvSpPr>
-          <p:cNvPr id="8" name="Rounded Rectangle 7"/>
+          <p:cNvPr id="15" name="Rectangle 14"/>
           <p:cNvSpPr/>
           <p:nvPr/>
         </p:nvSpPr>
         <p:spPr>
           <a:xfrm>
-            <a:off x="640080" y="2971800"/>
-            <a:ext cx="10911535" cy="1417320"/>
-          </a:xfrm>
-          <a:prstGeom prst="roundRect">
+            <a:off x="8158276" y="2194560"/>
+            <a:ext cx="3393338" cy="548640"/>
+          </a:xfrm>
+          <a:prstGeom prst="rect">
             <a:avLst/>
           </a:prstGeom>
           <a:solidFill>
-            <a:srgbClr val="FFFFFF"/>
+            <a:srgbClr val="C8A86B"/>
           </a:solidFill>
-          <a:ln w="22860">
-            <a:solidFill>
-              <a:srgbClr val="2E7D6B"/>
-            </a:solidFill>
+          <a:ln>
+            <a:noFill/>
           </a:ln>
           <a:effectLst/>
         </p:spPr>
@@ -7922,14 +9306,14 @@
       </p:sp>
       <p:sp>
         <p:nvSpPr>
-          <p:cNvPr id="9" name="TextBox 8"/>
+          <p:cNvPr id="16" name="TextBox 15"/>
           <p:cNvSpPr txBox="1"/>
           <p:nvPr/>
         </p:nvSpPr>
         <p:spPr>
           <a:xfrm>
-            <a:off x="1371600" y="3081528"/>
-            <a:ext cx="9997135" cy="457200"/>
+            <a:off x="8158276" y="2304288"/>
+            <a:ext cx="3393338" cy="365760"/>
           </a:xfrm>
           <a:prstGeom prst="rect">
             <a:avLst/>
@@ -7942,35 +9326,31 @@
           </a:bodyPr>
           <a:lstStyle/>
           <a:p>
-            <a:pPr algn="l">
-              <a:lnSpc>
-                <a:spcPct val="110000"/>
-              </a:lnSpc>
-            </a:pPr>
+            <a:pPr algn="ctr"/>
             <a:r>
               <a:rPr sz="1600" b="1">
                 <a:solidFill>
-                  <a:srgbClr val="1C2A33"/>
+                  <a:srgbClr val="FFFFFF"/>
                 </a:solidFill>
                 <a:latin typeface="微软雅黑"/>
                 <a:ea typeface="微软雅黑"/>
                 <a:cs typeface="微软雅黑"/>
               </a:rPr>
-              <a:t/>
-            </a:r>
-          </a:p>
-        </p:txBody>
-      </p:sp>
-      <p:sp>
-        <p:nvSpPr>
-          <p:cNvPr id="10" name="TextBox 9"/>
+              <a:t>衔接 · 铺垫</a:t>
+            </a:r>
+          </a:p>
+        </p:txBody>
+      </p:sp>
+      <p:sp>
+        <p:nvSpPr>
+          <p:cNvPr id="17" name="TextBox 16"/>
           <p:cNvSpPr txBox="1"/>
           <p:nvPr/>
         </p:nvSpPr>
         <p:spPr>
           <a:xfrm>
-            <a:off x="1371600" y="3520440"/>
-            <a:ext cx="9997135" cy="777240"/>
+            <a:off x="8432596" y="2971800"/>
+            <a:ext cx="2844698" cy="2468880"/>
           </a:xfrm>
           <a:prstGeom prst="rect">
             <a:avLst/>
@@ -7985,11 +9365,11 @@
           <a:p>
             <a:pPr algn="l">
               <a:lnSpc>
-                <a:spcPct val="128000"/>
+                <a:spcPct val="155000"/>
               </a:lnSpc>
             </a:pPr>
             <a:r>
-              <a:rPr sz="1100" b="0">
+              <a:rPr sz="1350" b="0">
                 <a:solidFill>
                   <a:srgbClr val="1C2A33"/>
                 </a:solidFill>
@@ -7997,14 +9377,158 @@
                 <a:ea typeface="楷体"/>
                 <a:cs typeface="楷体"/>
               </a:rPr>
-              <a:t>【提高作业】写一段200字赏析，主题为「从《沁园春·长沙》上下阕的『问』与『答』看青年毛泽东的担当精神」。要求：①引用原文；②点明结构呼应；③联系当代青年。</a:t>
-            </a:r>
-          </a:p>
-        </p:txBody>
-      </p:sp>
-      <p:sp>
-        <p:nvSpPr>
-          <p:cNvPr id="11" name="TextBox 10"/>
+              <a:t>下节课转向现代诗群文（《立在地球边上放号》《红烛》）——从古典词到现代诗；"意象"概念可迁移，形式不同。</a:t>
+            </a:r>
+          </a:p>
+        </p:txBody>
+      </p:sp>
+      <p:sp>
+        <p:nvSpPr>
+          <p:cNvPr id="18" name="Rounded Rectangle 17"/>
+          <p:cNvSpPr/>
+          <p:nvPr/>
+        </p:nvSpPr>
+        <p:spPr>
+          <a:xfrm>
+            <a:off x="640080" y="5166360"/>
+            <a:ext cx="10911535" cy="1325880"/>
+          </a:xfrm>
+          <a:prstGeom prst="roundRect">
+            <a:avLst/>
+          </a:prstGeom>
+          <a:solidFill>
+            <a:srgbClr val="1C2A33"/>
+          </a:solidFill>
+          <a:effectLst/>
+        </p:spPr>
+        <p:style>
+          <a:lnRef idx="1">
+            <a:schemeClr val="accent1"/>
+          </a:lnRef>
+          <a:fillRef idx="3">
+            <a:schemeClr val="accent1"/>
+          </a:fillRef>
+          <a:effectRef idx="2">
+            <a:schemeClr val="accent1"/>
+          </a:effectRef>
+          <a:fontRef idx="minor">
+            <a:schemeClr val="lt1"/>
+          </a:fontRef>
+        </p:style>
+        <p:txBody>
+          <a:bodyPr rtlCol="0" anchor="ctr"/>
+          <a:lstStyle/>
+          <a:p>
+            <a:pPr algn="ctr"/>
+          </a:p>
+        </p:txBody>
+      </p:sp>
+      <p:sp>
+        <p:nvSpPr>
+          <p:cNvPr id="19" name="Rectangle 18"/>
+          <p:cNvSpPr/>
+          <p:nvPr/>
+        </p:nvSpPr>
+        <p:spPr>
+          <a:xfrm>
+            <a:off x="914400" y="5394960"/>
+            <a:ext cx="54864" cy="279400"/>
+          </a:xfrm>
+          <a:prstGeom prst="rect">
+            <a:avLst/>
+          </a:prstGeom>
+          <a:solidFill>
+            <a:srgbClr val="C8A86B"/>
+          </a:solidFill>
+          <a:ln>
+            <a:noFill/>
+          </a:ln>
+          <a:effectLst/>
+        </p:spPr>
+        <p:style>
+          <a:lnRef idx="1">
+            <a:schemeClr val="accent1"/>
+          </a:lnRef>
+          <a:fillRef idx="3">
+            <a:schemeClr val="accent1"/>
+          </a:fillRef>
+          <a:effectRef idx="2">
+            <a:schemeClr val="accent1"/>
+          </a:effectRef>
+          <a:fontRef idx="minor">
+            <a:schemeClr val="lt1"/>
+          </a:fontRef>
+        </p:style>
+        <p:txBody>
+          <a:bodyPr rtlCol="0" anchor="ctr"/>
+          <a:lstStyle/>
+          <a:p>
+            <a:pPr algn="ctr"/>
+          </a:p>
+        </p:txBody>
+      </p:sp>
+      <p:sp>
+        <p:nvSpPr>
+          <p:cNvPr id="20" name="TextBox 19"/>
+          <p:cNvSpPr txBox="1"/>
+          <p:nvPr/>
+        </p:nvSpPr>
+        <p:spPr>
+          <a:xfrm>
+            <a:off x="1143000" y="5303520"/>
+            <a:ext cx="10180015" cy="1097280"/>
+          </a:xfrm>
+          <a:prstGeom prst="rect">
+            <a:avLst/>
+          </a:prstGeom>
+          <a:noFill/>
+        </p:spPr>
+        <p:txBody>
+          <a:bodyPr wrap="square" anchor="t" lIns="0" rIns="0" tIns="0" bIns="0">
+            <a:spAutoFit/>
+          </a:bodyPr>
+          <a:lstStyle/>
+          <a:p>
+            <a:pPr algn="l">
+              <a:spcAft>
+                <a:spcPts val="400"/>
+              </a:spcAft>
+            </a:pPr>
+            <a:r>
+              <a:rPr sz="1600" b="1">
+                <a:solidFill>
+                  <a:srgbClr val="C8A86B"/>
+                </a:solidFill>
+                <a:latin typeface="楷体"/>
+                <a:ea typeface="楷体"/>
+                <a:cs typeface="楷体"/>
+              </a:rPr>
+              <a:t>读词口诀</a:t>
+            </a:r>
+          </a:p>
+          <a:p>
+            <a:pPr algn="l">
+              <a:lnSpc>
+                <a:spcPct val="145000"/>
+              </a:lnSpc>
+            </a:pPr>
+            <a:r>
+              <a:rPr sz="1350" b="0">
+                <a:solidFill>
+                  <a:srgbClr val="FFFFFF"/>
+                </a:solidFill>
+                <a:latin typeface="楷体"/>
+                <a:ea typeface="楷体"/>
+                <a:cs typeface="楷体"/>
+              </a:rPr>
+              <a:t>问—忆—答：上阕设问，下阕作答。下一站——现代诗群文，看意象如何迁移。</a:t>
+            </a:r>
+          </a:p>
+        </p:txBody>
+      </p:sp>
+      <p:sp>
+        <p:nvSpPr>
+          <p:cNvPr id="21" name="TextBox 20"/>
           <p:cNvSpPr txBox="1"/>
           <p:nvPr/>
         </p:nvSpPr>
@@ -8131,13 +9655,13 @@
             <a:r>
               <a:rPr sz="1300" b="1">
                 <a:solidFill>
-                  <a:srgbClr val="C8A86B"/>
+                  <a:srgbClr val="B23A2A"/>
                 </a:solidFill>
                 <a:latin typeface="微软雅黑"/>
                 <a:ea typeface="微软雅黑"/>
                 <a:cs typeface="微软雅黑"/>
               </a:rPr>
-              <a:t>本课小结</a:t>
+              <a:t>单元小结 · 青春的价值</a:t>
             </a:r>
           </a:p>
         </p:txBody>
@@ -8157,7 +9681,7 @@
             <a:avLst/>
           </a:prstGeom>
           <a:solidFill>
-            <a:srgbClr val="C8A86B"/>
+            <a:srgbClr val="B23A2A"/>
           </a:solidFill>
           <a:ln>
             <a:noFill/>
@@ -8188,45 +9712,38 @@
       </p:sp>
       <p:sp>
         <p:nvSpPr>
-          <p:cNvPr id="5" name="Rectangle 4"/>
-          <p:cNvSpPr/>
-          <p:nvPr/>
-        </p:nvSpPr>
-        <p:spPr>
-          <a:xfrm>
-            <a:off x="640080" y="1737360"/>
-            <a:ext cx="54864" cy="431800"/>
-          </a:xfrm>
-          <a:prstGeom prst="rect">
-            <a:avLst/>
-          </a:prstGeom>
-          <a:solidFill>
-            <a:srgbClr val="C8A86B"/>
-          </a:solidFill>
-          <a:ln>
-            <a:noFill/>
-          </a:ln>
-          <a:effectLst/>
-        </p:spPr>
-        <p:style>
-          <a:lnRef idx="1">
-            <a:schemeClr val="accent1"/>
-          </a:lnRef>
-          <a:fillRef idx="3">
-            <a:schemeClr val="accent1"/>
-          </a:fillRef>
-          <a:effectRef idx="2">
-            <a:schemeClr val="accent1"/>
-          </a:effectRef>
-          <a:fontRef idx="minor">
-            <a:schemeClr val="lt1"/>
-          </a:fontRef>
-        </p:style>
-        <p:txBody>
-          <a:bodyPr rtlCol="0" anchor="ctr"/>
-          <a:lstStyle/>
-          <a:p>
-            <a:pPr algn="ctr"/>
+          <p:cNvPr id="5" name="TextBox 4"/>
+          <p:cNvSpPr txBox="1"/>
+          <p:nvPr/>
+        </p:nvSpPr>
+        <p:spPr>
+          <a:xfrm>
+            <a:off x="640080" y="1325880"/>
+            <a:ext cx="10515600" cy="640080"/>
+          </a:xfrm>
+          <a:prstGeom prst="rect">
+            <a:avLst/>
+          </a:prstGeom>
+          <a:noFill/>
+        </p:spPr>
+        <p:txBody>
+          <a:bodyPr wrap="square" anchor="t" lIns="0" rIns="0" tIns="0" bIns="0">
+            <a:spAutoFit/>
+          </a:bodyPr>
+          <a:lstStyle/>
+          <a:p>
+            <a:pPr algn="l"/>
+            <a:r>
+              <a:rPr sz="2800" b="1">
+                <a:solidFill>
+                  <a:srgbClr val="1C2A33"/>
+                </a:solidFill>
+                <a:latin typeface="楷体"/>
+                <a:ea typeface="楷体"/>
+                <a:cs typeface="楷体"/>
+              </a:rPr>
+              <a:t>一课收口 · 单元回望</a:t>
+            </a:r>
           </a:p>
         </p:txBody>
       </p:sp>
@@ -8238,8 +9755,8 @@
         </p:nvSpPr>
         <p:spPr>
           <a:xfrm>
-            <a:off x="868680" y="1645920"/>
-            <a:ext cx="10682935" cy="2194560"/>
+            <a:off x="640080" y="2194560"/>
+            <a:ext cx="5227167" cy="4206240"/>
           </a:xfrm>
           <a:prstGeom prst="rect">
             <a:avLst/>
@@ -8261,7 +9778,7 @@
               </a:spcAft>
             </a:pPr>
             <a:r>
-              <a:rPr sz="2200" b="0">
+              <a:rPr sz="1500" b="0">
                 <a:solidFill>
                   <a:srgbClr val="1C2A33"/>
                 </a:solidFill>
@@ -8269,28 +9786,214 @@
                 <a:ea typeface="楷体"/>
                 <a:cs typeface="楷体"/>
               </a:rPr>
-              <a:t>本单元主题：青春的价值。把今天学到的方法带进下一篇——自己读、自己想、自己写。</a:t>
-            </a:r>
-          </a:p>
+              <a:t>本单元人文主题"青春的价值"，任务群"文学阅读与写作"。</a:t>
+            </a:r>
+          </a:p>
+          <a:p>
+            <a:pPr algn="l">
+              <a:lnSpc>
+                <a:spcPct val="150000"/>
+              </a:lnSpc>
+              <a:spcAft>
+                <a:spcPts val="1000"/>
+              </a:spcAft>
+            </a:pPr>
+            <a:r>
+              <a:rPr sz="1500" b="1">
+                <a:solidFill>
+                  <a:srgbClr val="B23A2A"/>
+                </a:solidFill>
+                <a:latin typeface="楷体"/>
+                <a:ea typeface="楷体"/>
+                <a:cs typeface="楷体"/>
+              </a:rPr>
+              <a:t>本课读下阕——以"忆"领起，用"同学少年"群像回答上阕"谁主沉浮"，结构"问—答"呼应。</a:t>
+            </a:r>
+          </a:p>
+          <a:p>
+            <a:pPr algn="l">
+              <a:lnSpc>
+                <a:spcPct val="150000"/>
+              </a:lnSpc>
+            </a:pPr>
+            <a:r>
+              <a:rPr sz="1450" b="0">
+                <a:solidFill>
+                  <a:srgbClr val="1C2A33"/>
+                </a:solidFill>
+                <a:latin typeface="楷体"/>
+                <a:ea typeface="楷体"/>
+                <a:cs typeface="楷体"/>
+              </a:rPr>
+              <a:t>读词路径可迁移：抓领字、串意象、看章法，把上下阕作为一个整体来读。</a:t>
+            </a:r>
+          </a:p>
+        </p:txBody>
+      </p:sp>
+      <p:sp>
+        <p:nvSpPr>
+          <p:cNvPr id="7" name="Rounded Rectangle 6"/>
+          <p:cNvSpPr/>
+          <p:nvPr/>
+        </p:nvSpPr>
+        <p:spPr>
+          <a:xfrm>
+            <a:off x="6324447" y="2194560"/>
+            <a:ext cx="5227167" cy="4206240"/>
+          </a:xfrm>
+          <a:prstGeom prst="roundRect">
+            <a:avLst/>
+          </a:prstGeom>
+          <a:solidFill>
+            <a:srgbClr val="1C2A33"/>
+          </a:solidFill>
+          <a:effectLst/>
+        </p:spPr>
+        <p:style>
+          <a:lnRef idx="1">
+            <a:schemeClr val="accent1"/>
+          </a:lnRef>
+          <a:fillRef idx="3">
+            <a:schemeClr val="accent1"/>
+          </a:fillRef>
+          <a:effectRef idx="2">
+            <a:schemeClr val="accent1"/>
+          </a:effectRef>
+          <a:fontRef idx="minor">
+            <a:schemeClr val="lt1"/>
+          </a:fontRef>
+        </p:style>
+        <p:txBody>
+          <a:bodyPr rtlCol="0" anchor="ctr"/>
+          <a:lstStyle/>
+          <a:p>
+            <a:pPr algn="ctr"/>
+          </a:p>
+        </p:txBody>
+      </p:sp>
+      <p:sp>
+        <p:nvSpPr>
+          <p:cNvPr id="8" name="TextBox 7"/>
+          <p:cNvSpPr txBox="1"/>
+          <p:nvPr/>
+        </p:nvSpPr>
+        <p:spPr>
+          <a:xfrm>
+            <a:off x="6644487" y="2377440"/>
+            <a:ext cx="4587087" cy="457200"/>
+          </a:xfrm>
+          <a:prstGeom prst="rect">
+            <a:avLst/>
+          </a:prstGeom>
+          <a:noFill/>
+        </p:spPr>
+        <p:txBody>
+          <a:bodyPr wrap="square" anchor="t" lIns="0" rIns="0" tIns="0" bIns="0">
+            <a:spAutoFit/>
+          </a:bodyPr>
+          <a:lstStyle/>
           <a:p>
             <a:pPr algn="l"/>
             <a:r>
-              <a:rPr sz="1600" b="1">
-                <a:solidFill>
-                  <a:srgbClr val="B23A2A"/>
+              <a:rPr sz="1700" b="1">
+                <a:solidFill>
+                  <a:srgbClr val="C8A86B"/>
+                </a:solidFill>
+                <a:latin typeface="楷体"/>
+                <a:ea typeface="楷体"/>
+                <a:cs typeface="楷体"/>
+              </a:rPr>
+              <a:t>一句话带走</a:t>
+            </a:r>
+          </a:p>
+        </p:txBody>
+      </p:sp>
+      <p:sp>
+        <p:nvSpPr>
+          <p:cNvPr id="9" name="TextBox 8"/>
+          <p:cNvSpPr txBox="1"/>
+          <p:nvPr/>
+        </p:nvSpPr>
+        <p:spPr>
+          <a:xfrm>
+            <a:off x="6644487" y="2926080"/>
+            <a:ext cx="4587087" cy="3200400"/>
+          </a:xfrm>
+          <a:prstGeom prst="rect">
+            <a:avLst/>
+          </a:prstGeom>
+          <a:noFill/>
+        </p:spPr>
+        <p:txBody>
+          <a:bodyPr wrap="square" anchor="t" lIns="0" rIns="0" tIns="0" bIns="0">
+            <a:spAutoFit/>
+          </a:bodyPr>
+          <a:lstStyle/>
+          <a:p>
+            <a:pPr algn="l">
+              <a:lnSpc>
+                <a:spcPct val="160000"/>
+              </a:lnSpc>
+              <a:spcAft>
+                <a:spcPts val="1000"/>
+              </a:spcAft>
+            </a:pPr>
+            <a:r>
+              <a:rPr sz="1600" b="0">
+                <a:solidFill>
+                  <a:srgbClr val="FFFFFF"/>
+                </a:solidFill>
+                <a:latin typeface="楷体"/>
+                <a:ea typeface="楷体"/>
+                <a:cs typeface="楷体"/>
+              </a:rPr>
+              <a:t>问"谁主沉浮"，答"中流击水"——革命青年以行动主宰命运。</a:t>
+            </a:r>
+          </a:p>
+          <a:p>
+            <a:pPr algn="l">
+              <a:lnSpc>
+                <a:spcPct val="155000"/>
+              </a:lnSpc>
+              <a:spcAft>
+                <a:spcPts val="1000"/>
+              </a:spcAft>
+            </a:pPr>
+            <a:r>
+              <a:rPr sz="1450" b="0">
+                <a:solidFill>
+                  <a:srgbClr val="E7DFD2"/>
+                </a:solidFill>
+                <a:latin typeface="楷体"/>
+                <a:ea typeface="楷体"/>
+                <a:cs typeface="楷体"/>
+              </a:rPr>
+              <a:t>下一站：现代诗群文，看意象如何承载情感。</a:t>
+            </a:r>
+          </a:p>
+          <a:p>
+            <a:pPr algn="l">
+              <a:lnSpc>
+                <a:spcPct val="140000"/>
+              </a:lnSpc>
+            </a:pPr>
+            <a:r>
+              <a:rPr sz="1150" b="0">
+                <a:solidFill>
+                  <a:srgbClr val="6B6258"/>
                 </a:solidFill>
                 <a:latin typeface="微软雅黑"/>
                 <a:ea typeface="微软雅黑"/>
                 <a:cs typeface="微软雅黑"/>
               </a:rPr>
-              <a:t>方法迁移：圈关键信息 → 理事件脉络 → 析人物精神</a:t>
-            </a:r>
-          </a:p>
-        </p:txBody>
-      </p:sp>
-      <p:sp>
-        <p:nvSpPr>
-          <p:cNvPr id="7" name="TextBox 6"/>
+              <a:t>本课件未使用无关配图（学科色块兜底，按 §2.3）。</a:t>
+            </a:r>
+          </a:p>
+        </p:txBody>
+      </p:sp>
+      <p:sp>
+        <p:nvSpPr>
+          <p:cNvPr id="10" name="TextBox 9"/>
           <p:cNvSpPr txBox="1"/>
           <p:nvPr/>
         </p:nvSpPr>
